--- a/Squad_Charlie_Predictive_Maintenance.pptx
+++ b/Squad_Charlie_Predictive_Maintenance.pptx
@@ -4,6 +4,9 @@
   <p:sldMasterIdLst>
     <p:sldMasterId id="2147483648" r:id="rId1"/>
   </p:sldMasterIdLst>
+  <p:notesMasterIdLst>
+    <p:notesMasterId r:id="rId14"/>
+  </p:notesMasterIdLst>
   <p:sldIdLst>
     <p:sldId id="256" r:id="rId2"/>
     <p:sldId id="257" r:id="rId3"/>
@@ -18,9 +21,6 @@
     <p:sldId id="266" r:id="rId12"/>
     <p:sldId id="267" r:id="rId13"/>
   </p:sldIdLst>
-  <p:notesMasterIdLst>
-    <p:notesMasterId r:id="rId14"/>
-  </p:notesMasterIdLst>
   <p:sldSz cx="12192000" cy="6858000"/>
   <p:notesSz cx="6858000" cy="12192000"/>
   <p:defaultTextStyle>
@@ -115,6 +115,11 @@
       </a:defRPr>
     </a:lvl9pPr>
   </p:defaultTextStyle>
+  <p:extLst>
+    <p:ext uri="{EFAFB233-063F-42B5-8137-9DF3F51BA10A}">
+      <p15:sldGuideLst xmlns:p15="http://schemas.microsoft.com/office/powerpoint/2012/main"/>
+    </p:ext>
+  </p:extLst>
 </p:presentation>
 </file>
 
@@ -140,234 +145,10 @@
           <a:chExt cx="0" cy="0"/>
         </a:xfrm>
       </p:grpSpPr>
-      <p:sp>
-        <p:nvSpPr>
-          <p:cNvPr id="2" name="Header Placeholder 1"/>
-          <p:cNvSpPr>
-            <a:spLocks noGrp="1"/>
-          </p:cNvSpPr>
-          <p:nvPr>
-            <p:ph type="hdr" sz="quarter"/>
-          </p:nvPr>
-        </p:nvSpPr>
-        <p:spPr>
-          <a:xfrm>
-            <a:off x="0" y="0"/>
-            <a:ext cx="2971800" cy="458788"/>
-          </a:xfrm>
-          <a:prstGeom prst="rect">
-            <a:avLst/>
-          </a:prstGeom>
-        </p:spPr>
-        <p:txBody>
-          <a:bodyPr vert="horz" lIns="91440" tIns="45720" rIns="91440" bIns="45720" rtlCol="0"/>
-          <a:lstStyle>
-            <a:lvl1pPr algn="l">
-              <a:defRPr sz="1200"/>
-            </a:lvl1pPr>
-          </a:lstStyle>
-          <a:p>
-            <a:endParaRPr lang="en-US"/>
-          </a:p>
-        </p:txBody>
-      </p:sp>
-      <p:sp>
-        <p:nvSpPr>
-          <p:cNvPr id="3" name="Date Placeholder 2"/>
-          <p:cNvSpPr>
-            <a:spLocks noGrp="1"/>
-          </p:cNvSpPr>
-          <p:nvPr>
-            <p:ph type="dt" idx="1"/>
-          </p:nvPr>
-        </p:nvSpPr>
-        <p:spPr>
-          <a:xfrm>
-            <a:off x="3884613" y="0"/>
-            <a:ext cx="2971800" cy="458788"/>
-          </a:xfrm>
-          <a:prstGeom prst="rect">
-            <a:avLst/>
-          </a:prstGeom>
-        </p:spPr>
-        <p:txBody>
-          <a:bodyPr vert="horz" lIns="91440" tIns="45720" rIns="91440" bIns="45720" rtlCol="0"/>
-          <a:lstStyle>
-            <a:lvl1pPr algn="r">
-              <a:defRPr sz="1200"/>
-            </a:lvl1pPr>
-          </a:lstStyle>
-          <a:p>
-            <a:fld id="{5282F153-3F37-0F45-9E97-73ACFA13230C}" type="datetimeFigureOut">
-              <a:rPr lang="en-US"/>
-              <a:t>7/23/19</a:t>
-            </a:fld>
-            <a:endParaRPr lang="en-US"/>
-          </a:p>
-        </p:txBody>
-      </p:sp>
-      <p:sp>
-        <p:nvSpPr>
-          <p:cNvPr id="4" name="Slide Image Placeholder 3"/>
-          <p:cNvSpPr>
-            <a:spLocks noGrp="1" noRot="1" noChangeAspect="1"/>
-          </p:cNvSpPr>
-          <p:nvPr>
-            <p:ph type="sldImg" idx="2"/>
-          </p:nvPr>
-        </p:nvSpPr>
-        <p:spPr>
-          <a:xfrm>
-            <a:off x="685800" y="1143000"/>
-            <a:ext cx="5486400" cy="3086100"/>
-          </a:xfrm>
-          <a:prstGeom prst="rect">
-            <a:avLst/>
-          </a:prstGeom>
-          <a:noFill/>
-          <a:ln w="12700">
-            <a:solidFill>
-              <a:prstClr val="black"/>
-            </a:solidFill>
-          </a:ln>
-        </p:spPr>
-        <p:txBody>
-          <a:bodyPr vert="horz" lIns="91440" tIns="45720" rIns="91440" bIns="45720" rtlCol="0" anchor="ctr"/>
-          <a:lstStyle/>
-          <a:p>
-            <a:endParaRPr lang="en-US"/>
-          </a:p>
-        </p:txBody>
-      </p:sp>
-      <p:sp>
-        <p:nvSpPr>
-          <p:cNvPr id="5" name="Notes Placeholder 4"/>
-          <p:cNvSpPr>
-            <a:spLocks noGrp="1"/>
-          </p:cNvSpPr>
-          <p:nvPr>
-            <p:ph type="body" sz="quarter" idx="3"/>
-          </p:nvPr>
-        </p:nvSpPr>
-        <p:spPr>
-          <a:xfrm>
-            <a:off x="685800" y="4400550"/>
-            <a:ext cx="5486400" cy="3600450"/>
-          </a:xfrm>
-          <a:prstGeom prst="rect">
-            <a:avLst/>
-          </a:prstGeom>
-        </p:spPr>
-        <p:txBody>
-          <a:bodyPr vert="horz" lIns="91440" tIns="45720" rIns="91440" bIns="45720" rtlCol="0"/>
-          <a:lstStyle/>
-          <a:p>
-            <a:pPr lvl="0"/>
-            <a:r>
-              <a:rPr lang="en-US"/>
-              <a:t>Click to edit Master text styles</a:t>
-            </a:r>
-          </a:p>
-          <a:p>
-            <a:pPr lvl="1"/>
-            <a:r>
-              <a:rPr lang="en-US"/>
-              <a:t>Second level</a:t>
-            </a:r>
-          </a:p>
-          <a:p>
-            <a:pPr lvl="2"/>
-            <a:r>
-              <a:rPr lang="en-US"/>
-              <a:t>Third level</a:t>
-            </a:r>
-          </a:p>
-          <a:p>
-            <a:pPr lvl="3"/>
-            <a:r>
-              <a:rPr lang="en-US"/>
-              <a:t>Fourth level</a:t>
-            </a:r>
-          </a:p>
-          <a:p>
-            <a:pPr lvl="4"/>
-            <a:r>
-              <a:rPr lang="en-US"/>
-              <a:t>Fifth level</a:t>
-            </a:r>
-          </a:p>
-        </p:txBody>
-      </p:sp>
-      <p:sp>
-        <p:nvSpPr>
-          <p:cNvPr id="6" name="Footer Placeholder 5"/>
-          <p:cNvSpPr>
-            <a:spLocks noGrp="1"/>
-          </p:cNvSpPr>
-          <p:nvPr>
-            <p:ph type="ftr" sz="quarter" idx="4"/>
-          </p:nvPr>
-        </p:nvSpPr>
-        <p:spPr>
-          <a:xfrm>
-            <a:off x="0" y="8685213"/>
-            <a:ext cx="2971800" cy="458787"/>
-          </a:xfrm>
-          <a:prstGeom prst="rect">
-            <a:avLst/>
-          </a:prstGeom>
-        </p:spPr>
-        <p:txBody>
-          <a:bodyPr vert="horz" lIns="91440" tIns="45720" rIns="91440" bIns="45720" rtlCol="0" anchor="b"/>
-          <a:lstStyle>
-            <a:lvl1pPr algn="l">
-              <a:defRPr sz="1200"/>
-            </a:lvl1pPr>
-          </a:lstStyle>
-          <a:p>
-            <a:endParaRPr lang="en-US"/>
-          </a:p>
-        </p:txBody>
-      </p:sp>
-      <p:sp>
-        <p:nvSpPr>
-          <p:cNvPr id="7" name="Slide Number Placeholder 6"/>
-          <p:cNvSpPr>
-            <a:spLocks noGrp="1"/>
-          </p:cNvSpPr>
-          <p:nvPr>
-            <p:ph type="sldNum" sz="quarter" idx="5"/>
-          </p:nvPr>
-        </p:nvSpPr>
-        <p:spPr>
-          <a:xfrm>
-            <a:off x="3884613" y="8685213"/>
-            <a:ext cx="2971800" cy="458787"/>
-          </a:xfrm>
-          <a:prstGeom prst="rect">
-            <a:avLst/>
-          </a:prstGeom>
-        </p:spPr>
-        <p:txBody>
-          <a:bodyPr vert="horz" lIns="91440" tIns="45720" rIns="91440" bIns="45720" rtlCol="0" anchor="b"/>
-          <a:lstStyle>
-            <a:lvl1pPr algn="r">
-              <a:defRPr sz="1200"/>
-            </a:lvl1pPr>
-          </a:lstStyle>
-          <a:p>
-            <a:fld id="{CE5E9CC1-C706-0F49-92D6-E571CC5EEA8F}" type="slidenum">
-              <a:rPr lang="en-US"/>
-              <a:t>‹#›</a:t>
-            </a:fld>
-            <a:endParaRPr lang="en-US"/>
-          </a:p>
-        </p:txBody>
-      </p:sp>
     </p:spTree>
     <p:extLst>
       <p:ext uri="{BB962C8B-B14F-4D97-AF65-F5344CB8AC3E}">
-        <p14:creationId xmlns:p14="http://schemas.microsoft.com/office/powerpoint/2010/main" val="1024086991"/>
+        <p14:creationId xmlns:p14="http://schemas.microsoft.com/office/powerpoint/2010/main" val="3733839608"/>
       </p:ext>
     </p:extLst>
   </p:cSld>
@@ -515,7 +296,6 @@
               <a:rPr lang="en-US" dirty="0"/>
               <a:t>Introduce the project as an end-to-end predictive-maintenance demonstrator. Emphasise that the results are valid for the controlled synthetic demonstration, not yet for production deployment.</a:t>
             </a:r>
-            <a:endParaRPr lang="en-US" dirty="0"/>
           </a:p>
         </p:txBody>
       </p:sp>
@@ -603,7 +383,6 @@
               <a:rPr lang="en-US" dirty="0"/>
               <a:t>Show how the same model result is communicated differently for field managers and technical users. Mention the report generation and email attachment workflow.</a:t>
             </a:r>
-            <a:endParaRPr lang="en-US" dirty="0"/>
           </a:p>
         </p:txBody>
       </p:sp>
@@ -691,7 +470,6 @@
               <a:rPr lang="en-US" dirty="0"/>
               <a:t>Describe the end-to-end deployment path. Note that this is a desktop prototype, not yet a scheduled or service-based production deployment.</a:t>
             </a:r>
-            <a:endParaRPr lang="en-US" dirty="0"/>
           </a:p>
         </p:txBody>
       </p:sp>
@@ -779,7 +557,6 @@
               <a:rPr lang="en-US" dirty="0"/>
               <a:t>Close with a balanced assessment: the engineering integration is strong, the evaluation is perfect on the synthetic hold-out, and the next work is to establish real-world evidence.</a:t>
             </a:r>
-            <a:endParaRPr lang="en-US" dirty="0"/>
           </a:p>
         </p:txBody>
       </p:sp>
@@ -867,7 +644,6 @@
               <a:rPr lang="en-US" dirty="0"/>
               <a:t>Frame the story: we have a connected workflow, strong demo metrics, and a clear path to production hardening.</a:t>
             </a:r>
-            <a:endParaRPr lang="en-US" dirty="0"/>
           </a:p>
         </p:txBody>
       </p:sp>
@@ -955,7 +731,6 @@
               <a:rPr lang="en-US" dirty="0"/>
               <a:t>Explain the analytical task and connect each lifecycle stage to a concrete project artifact.</a:t>
             </a:r>
-            <a:endParaRPr lang="en-US" dirty="0"/>
           </a:p>
         </p:txBody>
       </p:sp>
@@ -1043,7 +818,6 @@
               <a:rPr lang="en-US" dirty="0"/>
               <a:t>Walk through the lineage and point out that the dataset is intentionally synthetic. Mention the raw-folder/default-CSV path inconsistency as an operational gap.</a:t>
             </a:r>
-            <a:endParaRPr lang="en-US" dirty="0"/>
           </a:p>
         </p:txBody>
       </p:sp>
@@ -1131,7 +905,6 @@
               <a:rPr lang="en-US" dirty="0"/>
               <a:t>Explain class imbalance and the physical signature. Stress that this relationship is a property of the simulator and is a reason not to overclaim real-world performance.</a:t>
             </a:r>
-            <a:endParaRPr lang="en-US" dirty="0"/>
           </a:p>
         </p:txBody>
       </p:sp>
@@ -1219,7 +992,6 @@
               <a:rPr lang="en-US" dirty="0"/>
               <a:t>Describe what is and is not preprocessing. Random Forest does not require scaling, but real predictive maintenance will need richer temporal features and data-quality checks.</a:t>
             </a:r>
-            <a:endParaRPr lang="en-US" dirty="0"/>
           </a:p>
         </p:txBody>
       </p:sp>
@@ -1307,7 +1079,6 @@
               <a:rPr lang="en-US" dirty="0"/>
               <a:t>Explain why Random Forest is suitable as a first model and make clear that the probability thresholds still need calibration and business-cost optimisation.</a:t>
             </a:r>
-            <a:endParaRPr lang="en-US" dirty="0"/>
           </a:p>
         </p:txBody>
       </p:sp>
@@ -1395,7 +1166,6 @@
               <a:rPr lang="en-US" dirty="0"/>
               <a:t>Present the result confidently but responsibly. The score is perfect on this split, while the caveat is that the data-generation rule makes the class boundary highly learnable.</a:t>
             </a:r>
-            <a:endParaRPr lang="en-US" dirty="0"/>
           </a:p>
         </p:txBody>
       </p:sp>
@@ -1483,7 +1253,6 @@
               <a:rPr lang="en-US" dirty="0"/>
               <a:t>Explain that these are latest-reading scores, not historical failure rates. No well crossed the warning or critical threshold, so no alert was triggered.</a:t>
             </a:r>
-            <a:endParaRPr lang="en-US" dirty="0"/>
           </a:p>
         </p:txBody>
       </p:sp>
@@ -1561,6 +1330,7 @@
         <a:solidFill>
           <a:srgbClr val="08111F"/>
         </a:solidFill>
+        <a:effectLst/>
       </p:bgPr>
     </p:bg>
     <p:spTree>
@@ -1601,6 +1371,13 @@
             <a:prstDash val="solid"/>
           </a:ln>
         </p:spPr>
+        <p:txBody>
+          <a:bodyPr/>
+          <a:lstStyle/>
+          <a:p>
+            <a:endParaRPr lang="en-US"/>
+          </a:p>
+        </p:txBody>
       </p:sp>
       <p:sp>
         <p:nvSpPr>
@@ -1623,7 +1400,7 @@
           <a:bodyPr wrap="square" lIns="0" tIns="0" rIns="0" bIns="0" rtlCol="0" anchor="ctr"/>
           <a:lstStyle/>
           <a:p>
-            <a:pPr indent="0" marL="0">
+            <a:pPr marL="0" indent="0">
               <a:buNone/>
             </a:pPr>
             <a:r>
@@ -1662,7 +1439,7 @@
           <a:bodyPr wrap="square" lIns="0" tIns="0" rIns="0" bIns="0" rtlCol="0" anchor="ctr"/>
           <a:lstStyle/>
           <a:p>
-            <a:pPr algn="r" indent="0" marL="0">
+            <a:pPr marL="0" indent="0" algn="r">
               <a:buNone/>
             </a:pPr>
             <a:r>
@@ -1700,7 +1477,7 @@
           </a:prstGeom>
           <a:extLst>
             <a:ext uri="{C572A759-6A51-4108-AA02-DFA0A04FC94B}">
-              <ma14:wrappingTextBoxFlag xmlns:ma14="http://schemas.microsoft.com/office/mac/drawingml/2011/main" val="0"/>
+              <ma14:wrappingTextBoxFlag xmlns:ma14="http://schemas.microsoft.com/office/mac/drawingml/2011/main" xmlns="" val="0"/>
             </a:ext>
           </a:extLst>
         </p:spPr>
@@ -1721,8 +1498,8 @@
           <a:p>
             <a:pPr algn="l"/>
             <a:fld id="{F7021451-1387-4CA6-816F-3879F97B5CBC}" type="slidenum">
-              <a:rPr b="0" lang="en-US"/>
-              <a:t>1002</a:t>
+              <a:rPr lang="en-US" b="0"/>
+              <a:t>‹#›</a:t>
             </a:fld>
             <a:endParaRPr lang="en-US"/>
           </a:p>
@@ -1739,6 +1516,11 @@
 <file path=ppt/slideMasters/slideMaster1.xml><?xml version="1.0" encoding="utf-8"?>
 <p:sldMaster xmlns:a="http://schemas.openxmlformats.org/drawingml/2006/main" xmlns:r="http://schemas.openxmlformats.org/officeDocument/2006/relationships" xmlns:p="http://schemas.openxmlformats.org/presentationml/2006/main">
   <p:cSld>
+    <p:bg>
+      <p:bgRef idx="1001">
+        <a:schemeClr val="bg1"/>
+      </p:bgRef>
+    </p:bg>
     <p:spTree>
       <p:nvGrpSpPr>
         <p:cNvPr id="1" name=""/>
@@ -1773,7 +1555,7 @@
           </a:prstGeom>
           <a:extLst>
             <a:ext uri="{C572A759-6A51-4108-AA02-DFA0A04FC94B}">
-              <ma14:wrappingTextBoxFlag xmlns:ma14="http://schemas.microsoft.com/office/mac/drawingml/2011/main" val="0"/>
+              <ma14:wrappingTextBoxFlag xmlns:ma14="http://schemas.microsoft.com/office/mac/drawingml/2011/main" xmlns="" val="0"/>
             </a:ext>
           </a:extLst>
         </p:spPr>
@@ -1794,8 +1576,8 @@
           <a:p>
             <a:pPr algn="l"/>
             <a:fld id="{F7021451-1387-4CA6-816F-3879F97B5CBC}" type="slidenum">
-              <a:rPr b="0" lang="en-US"/>
-              <a:t>null</a:t>
+              <a:rPr lang="en-US" b="0"/>
+              <a:t>‹#›</a:t>
             </a:fld>
             <a:endParaRPr lang="en-US"/>
           </a:p>
@@ -2070,6 +1852,7 @@
         <a:solidFill>
           <a:srgbClr val="08111F"/>
         </a:solidFill>
+        <a:effectLst/>
       </p:bgPr>
     </p:bg>
     <p:spTree>
@@ -2109,11 +1892,11 @@
           </a:bodyPr>
           <a:lstStyle/>
           <a:p>
-            <a:pPr algn="l" indent="0" marL="0">
-              <a:buNone/>
-            </a:pPr>
-            <a:r>
-              <a:rPr lang="en-US" sz="1400" b="1" spc="220" kern="0" dirty="0">
+            <a:pPr marL="0" indent="0" algn="l">
+              <a:buNone/>
+            </a:pPr>
+            <a:r>
+              <a:rPr lang="en-US" sz="1400" b="1" kern="0" spc="220" dirty="0">
                 <a:solidFill>
                   <a:srgbClr val="38BDF8"/>
                 </a:solidFill>
@@ -2150,7 +1933,7 @@
           </a:bodyPr>
           <a:lstStyle/>
           <a:p>
-            <a:pPr algn="l" indent="0" marL="0">
+            <a:pPr marL="0" indent="0" algn="l">
               <a:buNone/>
             </a:pPr>
             <a:r>
@@ -2167,7 +1950,7 @@
             <a:endParaRPr lang="en-US" sz="3400" dirty="0"/>
           </a:p>
           <a:p>
-            <a:pPr algn="l" indent="0" marL="0">
+            <a:pPr marL="0" indent="0" algn="l">
               <a:buNone/>
             </a:pPr>
             <a:r>
@@ -2208,7 +1991,7 @@
           </a:bodyPr>
           <a:lstStyle/>
           <a:p>
-            <a:pPr algn="l" indent="0" marL="0">
+            <a:pPr marL="0" indent="0" algn="l">
               <a:buNone/>
             </a:pPr>
             <a:r>
@@ -2254,6 +2037,13 @@
             <a:prstDash val="solid"/>
           </a:ln>
         </p:spPr>
+        <p:txBody>
+          <a:bodyPr/>
+          <a:lstStyle/>
+          <a:p>
+            <a:endParaRPr lang="en-US"/>
+          </a:p>
+        </p:txBody>
       </p:sp>
       <p:sp>
         <p:nvSpPr>
@@ -2278,7 +2068,7 @@
           </a:bodyPr>
           <a:lstStyle/>
           <a:p>
-            <a:pPr algn="ctr" indent="0" marL="0">
+            <a:pPr marL="0" indent="0" algn="ctr">
               <a:buNone/>
             </a:pPr>
             <a:r>
@@ -2324,6 +2114,13 @@
             <a:prstDash val="solid"/>
           </a:ln>
         </p:spPr>
+        <p:txBody>
+          <a:bodyPr/>
+          <a:lstStyle/>
+          <a:p>
+            <a:endParaRPr lang="en-US"/>
+          </a:p>
+        </p:txBody>
       </p:sp>
       <p:sp>
         <p:nvSpPr>
@@ -2348,7 +2145,7 @@
           </a:bodyPr>
           <a:lstStyle/>
           <a:p>
-            <a:pPr algn="ctr" indent="0" marL="0">
+            <a:pPr marL="0" indent="0" algn="ctr">
               <a:buNone/>
             </a:pPr>
             <a:r>
@@ -2390,6 +2187,13 @@
             <a:tailEnd type="none"/>
           </a:ln>
         </p:spPr>
+        <p:txBody>
+          <a:bodyPr/>
+          <a:lstStyle/>
+          <a:p>
+            <a:endParaRPr lang="en-US"/>
+          </a:p>
+        </p:txBody>
       </p:sp>
       <p:sp>
         <p:nvSpPr>
@@ -2415,6 +2219,13 @@
             <a:prstDash val="solid"/>
           </a:ln>
         </p:spPr>
+        <p:txBody>
+          <a:bodyPr/>
+          <a:lstStyle/>
+          <a:p>
+            <a:endParaRPr lang="en-US"/>
+          </a:p>
+        </p:txBody>
       </p:sp>
       <p:sp>
         <p:nvSpPr>
@@ -2439,7 +2250,7 @@
           </a:bodyPr>
           <a:lstStyle/>
           <a:p>
-            <a:pPr algn="ctr" indent="0" marL="0">
+            <a:pPr marL="0" indent="0" algn="ctr">
               <a:buNone/>
             </a:pPr>
             <a:r>
@@ -2481,6 +2292,13 @@
             <a:tailEnd type="none"/>
           </a:ln>
         </p:spPr>
+        <p:txBody>
+          <a:bodyPr/>
+          <a:lstStyle/>
+          <a:p>
+            <a:endParaRPr lang="en-US"/>
+          </a:p>
+        </p:txBody>
       </p:sp>
       <p:sp>
         <p:nvSpPr>
@@ -2506,6 +2324,13 @@
             <a:prstDash val="solid"/>
           </a:ln>
         </p:spPr>
+        <p:txBody>
+          <a:bodyPr/>
+          <a:lstStyle/>
+          <a:p>
+            <a:endParaRPr lang="en-US"/>
+          </a:p>
+        </p:txBody>
       </p:sp>
       <p:sp>
         <p:nvSpPr>
@@ -2530,7 +2355,7 @@
           </a:bodyPr>
           <a:lstStyle/>
           <a:p>
-            <a:pPr algn="ctr" indent="0" marL="0">
+            <a:pPr marL="0" indent="0" algn="ctr">
               <a:buNone/>
             </a:pPr>
             <a:r>
@@ -2572,6 +2397,13 @@
             <a:tailEnd type="none"/>
           </a:ln>
         </p:spPr>
+        <p:txBody>
+          <a:bodyPr/>
+          <a:lstStyle/>
+          <a:p>
+            <a:endParaRPr lang="en-US"/>
+          </a:p>
+        </p:txBody>
       </p:sp>
       <p:sp>
         <p:nvSpPr>
@@ -2597,6 +2429,13 @@
             <a:prstDash val="solid"/>
           </a:ln>
         </p:spPr>
+        <p:txBody>
+          <a:bodyPr/>
+          <a:lstStyle/>
+          <a:p>
+            <a:endParaRPr lang="en-US"/>
+          </a:p>
+        </p:txBody>
       </p:sp>
       <p:sp>
         <p:nvSpPr>
@@ -2621,7 +2460,7 @@
           </a:bodyPr>
           <a:lstStyle/>
           <a:p>
-            <a:pPr algn="ctr" indent="0" marL="0">
+            <a:pPr marL="0" indent="0" algn="ctr">
               <a:buNone/>
             </a:pPr>
             <a:r>
@@ -2663,6 +2502,13 @@
             <a:tailEnd type="none"/>
           </a:ln>
         </p:spPr>
+        <p:txBody>
+          <a:bodyPr/>
+          <a:lstStyle/>
+          <a:p>
+            <a:endParaRPr lang="en-US"/>
+          </a:p>
+        </p:txBody>
       </p:sp>
       <p:sp>
         <p:nvSpPr>
@@ -2688,6 +2534,13 @@
             <a:prstDash val="solid"/>
           </a:ln>
         </p:spPr>
+        <p:txBody>
+          <a:bodyPr/>
+          <a:lstStyle/>
+          <a:p>
+            <a:endParaRPr lang="en-US"/>
+          </a:p>
+        </p:txBody>
       </p:sp>
       <p:sp>
         <p:nvSpPr>
@@ -2712,7 +2565,7 @@
           </a:bodyPr>
           <a:lstStyle/>
           <a:p>
-            <a:pPr algn="ctr" indent="0" marL="0">
+            <a:pPr marL="0" indent="0" algn="ctr">
               <a:buNone/>
             </a:pPr>
             <a:r>
@@ -2754,6 +2607,13 @@
             <a:tailEnd type="none"/>
           </a:ln>
         </p:spPr>
+        <p:txBody>
+          <a:bodyPr/>
+          <a:lstStyle/>
+          <a:p>
+            <a:endParaRPr lang="en-US"/>
+          </a:p>
+        </p:txBody>
       </p:sp>
       <p:sp>
         <p:nvSpPr>
@@ -2779,6 +2639,13 @@
             <a:prstDash val="solid"/>
           </a:ln>
         </p:spPr>
+        <p:txBody>
+          <a:bodyPr/>
+          <a:lstStyle/>
+          <a:p>
+            <a:endParaRPr lang="en-US"/>
+          </a:p>
+        </p:txBody>
       </p:sp>
       <p:sp>
         <p:nvSpPr>
@@ -2803,7 +2670,7 @@
           </a:bodyPr>
           <a:lstStyle/>
           <a:p>
-            <a:pPr algn="ctr" indent="0" marL="0">
+            <a:pPr marL="0" indent="0" algn="ctr">
               <a:buNone/>
             </a:pPr>
             <a:r>
@@ -2845,6 +2712,13 @@
             <a:tailEnd type="none"/>
           </a:ln>
         </p:spPr>
+        <p:txBody>
+          <a:bodyPr/>
+          <a:lstStyle/>
+          <a:p>
+            <a:endParaRPr lang="en-US"/>
+          </a:p>
+        </p:txBody>
       </p:sp>
       <p:sp>
         <p:nvSpPr>
@@ -2855,7 +2729,7 @@
         <p:spPr>
           <a:xfrm>
             <a:off x="7315200" y="3474720"/>
-            <a:ext cx="548640" cy="-457200"/>
+            <a:ext cx="548640" cy="0"/>
           </a:xfrm>
           <a:prstGeom prst="line">
             <a:avLst/>
@@ -2870,6 +2744,13 @@
             <a:tailEnd type="none"/>
           </a:ln>
         </p:spPr>
+        <p:txBody>
+          <a:bodyPr/>
+          <a:lstStyle/>
+          <a:p>
+            <a:endParaRPr lang="en-US"/>
+          </a:p>
+        </p:txBody>
       </p:sp>
       <p:sp>
         <p:nvSpPr>
@@ -2895,6 +2776,13 @@
             <a:tailEnd type="none"/>
           </a:ln>
         </p:spPr>
+        <p:txBody>
+          <a:bodyPr/>
+          <a:lstStyle/>
+          <a:p>
+            <a:endParaRPr lang="en-US"/>
+          </a:p>
+        </p:txBody>
       </p:sp>
       <p:sp>
         <p:nvSpPr>
@@ -2920,6 +2808,13 @@
             <a:tailEnd type="none"/>
           </a:ln>
         </p:spPr>
+        <p:txBody>
+          <a:bodyPr/>
+          <a:lstStyle/>
+          <a:p>
+            <a:endParaRPr lang="en-US"/>
+          </a:p>
+        </p:txBody>
       </p:sp>
       <p:sp>
         <p:nvSpPr>
@@ -2930,7 +2825,7 @@
         <p:spPr>
           <a:xfrm>
             <a:off x="8961120" y="3840480"/>
-            <a:ext cx="548640" cy="-502920"/>
+            <a:ext cx="548640" cy="0"/>
           </a:xfrm>
           <a:prstGeom prst="line">
             <a:avLst/>
@@ -2945,6 +2840,13 @@
             <a:tailEnd type="none"/>
           </a:ln>
         </p:spPr>
+        <p:txBody>
+          <a:bodyPr/>
+          <a:lstStyle/>
+          <a:p>
+            <a:endParaRPr lang="en-US"/>
+          </a:p>
+        </p:txBody>
       </p:sp>
       <p:sp>
         <p:nvSpPr>
@@ -2955,7 +2857,7 @@
         <p:spPr>
           <a:xfrm>
             <a:off x="9509760" y="3337560"/>
-            <a:ext cx="548640" cy="-685800"/>
+            <a:ext cx="548640" cy="0"/>
           </a:xfrm>
           <a:prstGeom prst="line">
             <a:avLst/>
@@ -2970,6 +2872,13 @@
             <a:tailEnd type="none"/>
           </a:ln>
         </p:spPr>
+        <p:txBody>
+          <a:bodyPr/>
+          <a:lstStyle/>
+          <a:p>
+            <a:endParaRPr lang="en-US"/>
+          </a:p>
+        </p:txBody>
       </p:sp>
       <p:sp>
         <p:nvSpPr>
@@ -2995,6 +2904,13 @@
             <a:tailEnd type="none"/>
           </a:ln>
         </p:spPr>
+        <p:txBody>
+          <a:bodyPr/>
+          <a:lstStyle/>
+          <a:p>
+            <a:endParaRPr lang="en-US"/>
+          </a:p>
+        </p:txBody>
       </p:sp>
       <p:sp>
         <p:nvSpPr>
@@ -3005,7 +2921,7 @@
         <p:spPr>
           <a:xfrm>
             <a:off x="10607040" y="2834640"/>
-            <a:ext cx="594360" cy="-685800"/>
+            <a:ext cx="594360" cy="0"/>
           </a:xfrm>
           <a:prstGeom prst="line">
             <a:avLst/>
@@ -3020,6 +2936,13 @@
             <a:tailEnd type="none"/>
           </a:ln>
         </p:spPr>
+        <p:txBody>
+          <a:bodyPr/>
+          <a:lstStyle/>
+          <a:p>
+            <a:endParaRPr lang="en-US"/>
+          </a:p>
+        </p:txBody>
       </p:sp>
       <p:sp>
         <p:nvSpPr>
@@ -3044,11 +2967,11 @@
           </a:bodyPr>
           <a:lstStyle/>
           <a:p>
-            <a:pPr algn="l" indent="0" marL="0">
-              <a:buNone/>
-            </a:pPr>
-            <a:r>
-              <a:rPr lang="en-US" sz="900" b="1" spc="100" kern="0" dirty="0">
+            <a:pPr marL="0" indent="0" algn="l">
+              <a:buNone/>
+            </a:pPr>
+            <a:r>
+              <a:rPr lang="en-US" sz="900" b="1" kern="0" spc="100" dirty="0">
                 <a:solidFill>
                   <a:srgbClr val="9DB3C8"/>
                 </a:solidFill>
@@ -3085,7 +3008,7 @@
           </a:bodyPr>
           <a:lstStyle/>
           <a:p>
-            <a:pPr algn="l" indent="0" marL="0">
+            <a:pPr marL="0" indent="0" algn="l">
               <a:buNone/>
             </a:pPr>
             <a:r>
@@ -3105,7 +3028,7 @@
       </p:sp>
       <p:sp>
         <p:nvSpPr>
-          <p:cNvPr id="25" name="Slide Number Placeholder 0"/>
+          <p:cNvPr id="34" name="Slide Number Placeholder 0"/>
           <p:cNvSpPr>
             <a:spLocks noGrp="1"/>
           </p:cNvSpPr>
@@ -3123,7 +3046,7 @@
           </a:prstGeom>
           <a:extLst>
             <a:ext uri="{C572A759-6A51-4108-AA02-DFA0A04FC94B}">
-              <ma14:wrappingTextBoxFlag xmlns:ma14="http://schemas.microsoft.com/office/mac/drawingml/2011/main" val="0"/>
+              <ma14:wrappingTextBoxFlag xmlns:ma14="http://schemas.microsoft.com/office/mac/drawingml/2011/main" xmlns="" val="0"/>
             </a:ext>
           </a:extLst>
         </p:spPr>
@@ -3144,7 +3067,7 @@
           <a:p>
             <a:pPr algn="l"/>
             <a:fld id="{F7021451-1387-4CA6-816F-3879F97B5CBC}" type="slidenum">
-              <a:rPr b="0" lang="en-US"/>
+              <a:rPr lang="en-US" b="0"/>
               <a:t>1</a:t>
             </a:fld>
             <a:endParaRPr lang="en-US"/>
@@ -3199,11 +3122,11 @@
           </a:bodyPr>
           <a:lstStyle/>
           <a:p>
-            <a:pPr algn="l" indent="0" marL="0">
-              <a:buNone/>
-            </a:pPr>
-            <a:r>
-              <a:rPr lang="en-US" sz="900" b="1" spc="150" kern="0" dirty="0">
+            <a:pPr marL="0" indent="0" algn="l">
+              <a:buNone/>
+            </a:pPr>
+            <a:r>
+              <a:rPr lang="en-US" sz="900" b="1" kern="0" spc="150" dirty="0">
                 <a:solidFill>
                   <a:srgbClr val="38BDF8"/>
                 </a:solidFill>
@@ -3240,7 +3163,7 @@
           </a:bodyPr>
           <a:lstStyle/>
           <a:p>
-            <a:pPr algn="l" indent="0" marL="0">
+            <a:pPr marL="0" indent="0" algn="l">
               <a:buNone/>
             </a:pPr>
             <a:r>
@@ -3281,7 +3204,7 @@
           </a:bodyPr>
           <a:lstStyle/>
           <a:p>
-            <a:pPr algn="l" indent="0" marL="0">
+            <a:pPr marL="0" indent="0" algn="l">
               <a:buNone/>
             </a:pPr>
             <a:r>
@@ -3323,6 +3246,13 @@
             <a:prstDash val="solid"/>
           </a:ln>
         </p:spPr>
+        <p:txBody>
+          <a:bodyPr/>
+          <a:lstStyle/>
+          <a:p>
+            <a:endParaRPr lang="en-US"/>
+          </a:p>
+        </p:txBody>
       </p:sp>
       <p:sp>
         <p:nvSpPr>
@@ -3347,7 +3277,7 @@
           </a:bodyPr>
           <a:lstStyle/>
           <a:p>
-            <a:pPr algn="l" indent="0" marL="0">
+            <a:pPr marL="0" indent="0" algn="l">
               <a:buNone/>
             </a:pPr>
             <a:r>
@@ -3389,6 +3319,13 @@
             <a:prstDash val="solid"/>
           </a:ln>
         </p:spPr>
+        <p:txBody>
+          <a:bodyPr/>
+          <a:lstStyle/>
+          <a:p>
+            <a:endParaRPr lang="en-US"/>
+          </a:p>
+        </p:txBody>
       </p:sp>
       <p:sp>
         <p:nvSpPr>
@@ -3413,7 +3350,7 @@
           </a:bodyPr>
           <a:lstStyle/>
           <a:p>
-            <a:pPr algn="ctr" indent="0" marL="0">
+            <a:pPr marL="0" indent="0" algn="ctr">
               <a:buNone/>
             </a:pPr>
             <a:r>
@@ -3455,6 +3392,13 @@
             <a:prstDash val="solid"/>
           </a:ln>
         </p:spPr>
+        <p:txBody>
+          <a:bodyPr/>
+          <a:lstStyle/>
+          <a:p>
+            <a:endParaRPr lang="en-US"/>
+          </a:p>
+        </p:txBody>
       </p:sp>
       <p:sp>
         <p:nvSpPr>
@@ -3479,7 +3423,7 @@
           </a:bodyPr>
           <a:lstStyle/>
           <a:p>
-            <a:pPr algn="ctr" indent="0" marL="0">
+            <a:pPr marL="0" indent="0" algn="ctr">
               <a:buNone/>
             </a:pPr>
             <a:r>
@@ -3521,6 +3465,13 @@
             <a:prstDash val="solid"/>
           </a:ln>
         </p:spPr>
+        <p:txBody>
+          <a:bodyPr/>
+          <a:lstStyle/>
+          <a:p>
+            <a:endParaRPr lang="en-US"/>
+          </a:p>
+        </p:txBody>
       </p:sp>
       <p:sp>
         <p:nvSpPr>
@@ -3545,7 +3496,7 @@
           </a:bodyPr>
           <a:lstStyle/>
           <a:p>
-            <a:pPr algn="ctr" indent="0" marL="0">
+            <a:pPr marL="0" indent="0" algn="ctr">
               <a:buNone/>
             </a:pPr>
             <a:r>
@@ -3587,6 +3538,13 @@
             <a:prstDash val="solid"/>
           </a:ln>
         </p:spPr>
+        <p:txBody>
+          <a:bodyPr/>
+          <a:lstStyle/>
+          <a:p>
+            <a:endParaRPr lang="en-US"/>
+          </a:p>
+        </p:txBody>
       </p:sp>
       <p:sp>
         <p:nvSpPr>
@@ -3611,7 +3569,7 @@
           </a:bodyPr>
           <a:lstStyle/>
           <a:p>
-            <a:pPr algn="ctr" indent="0" marL="0">
+            <a:pPr marL="0" indent="0" algn="ctr">
               <a:buNone/>
             </a:pPr>
             <a:r>
@@ -3653,6 +3611,13 @@
             <a:prstDash val="solid"/>
           </a:ln>
         </p:spPr>
+        <p:txBody>
+          <a:bodyPr/>
+          <a:lstStyle/>
+          <a:p>
+            <a:endParaRPr lang="en-US"/>
+          </a:p>
+        </p:txBody>
       </p:sp>
       <p:sp>
         <p:nvSpPr>
@@ -3677,7 +3642,7 @@
           </a:bodyPr>
           <a:lstStyle/>
           <a:p>
-            <a:pPr algn="l" indent="0" marL="0">
+            <a:pPr marL="0" indent="0" algn="l">
               <a:buNone/>
             </a:pPr>
             <a:r>
@@ -3719,6 +3684,13 @@
             <a:prstDash val="solid"/>
           </a:ln>
         </p:spPr>
+        <p:txBody>
+          <a:bodyPr/>
+          <a:lstStyle/>
+          <a:p>
+            <a:endParaRPr lang="en-US"/>
+          </a:p>
+        </p:txBody>
       </p:sp>
       <p:sp>
         <p:nvSpPr>
@@ -3743,7 +3715,7 @@
           </a:bodyPr>
           <a:lstStyle/>
           <a:p>
-            <a:pPr algn="ctr" indent="0" marL="0">
+            <a:pPr marL="0" indent="0" algn="ctr">
               <a:buNone/>
             </a:pPr>
             <a:r>
@@ -3785,6 +3757,13 @@
             <a:prstDash val="solid"/>
           </a:ln>
         </p:spPr>
+        <p:txBody>
+          <a:bodyPr/>
+          <a:lstStyle/>
+          <a:p>
+            <a:endParaRPr lang="en-US"/>
+          </a:p>
+        </p:txBody>
       </p:sp>
       <p:sp>
         <p:nvSpPr>
@@ -3809,7 +3788,7 @@
           </a:bodyPr>
           <a:lstStyle/>
           <a:p>
-            <a:pPr algn="ctr" indent="0" marL="0">
+            <a:pPr marL="0" indent="0" algn="ctr">
               <a:buNone/>
             </a:pPr>
             <a:r>
@@ -3851,6 +3830,13 @@
             <a:prstDash val="solid"/>
           </a:ln>
         </p:spPr>
+        <p:txBody>
+          <a:bodyPr/>
+          <a:lstStyle/>
+          <a:p>
+            <a:endParaRPr lang="en-US"/>
+          </a:p>
+        </p:txBody>
       </p:sp>
       <p:sp>
         <p:nvSpPr>
@@ -3875,7 +3861,7 @@
           </a:bodyPr>
           <a:lstStyle/>
           <a:p>
-            <a:pPr algn="ctr" indent="0" marL="0">
+            <a:pPr marL="0" indent="0" algn="ctr">
               <a:buNone/>
             </a:pPr>
             <a:r>
@@ -3917,6 +3903,13 @@
             <a:prstDash val="solid"/>
           </a:ln>
         </p:spPr>
+        <p:txBody>
+          <a:bodyPr/>
+          <a:lstStyle/>
+          <a:p>
+            <a:endParaRPr lang="en-US"/>
+          </a:p>
+        </p:txBody>
       </p:sp>
       <p:sp>
         <p:nvSpPr>
@@ -3941,7 +3934,7 @@
           </a:bodyPr>
           <a:lstStyle/>
           <a:p>
-            <a:pPr algn="ctr" indent="0" marL="0">
+            <a:pPr marL="0" indent="0" algn="ctr">
               <a:buNone/>
             </a:pPr>
             <a:r>
@@ -3983,6 +3976,13 @@
             <a:prstDash val="solid"/>
           </a:ln>
         </p:spPr>
+        <p:txBody>
+          <a:bodyPr/>
+          <a:lstStyle/>
+          <a:p>
+            <a:endParaRPr lang="en-US"/>
+          </a:p>
+        </p:txBody>
       </p:sp>
       <p:sp>
         <p:nvSpPr>
@@ -4007,7 +4007,7 @@
           </a:bodyPr>
           <a:lstStyle/>
           <a:p>
-            <a:pPr algn="l" indent="0" marL="0">
+            <a:pPr marL="0" indent="0" algn="l">
               <a:buNone/>
             </a:pPr>
             <a:r>
@@ -4049,6 +4049,13 @@
             <a:prstDash val="solid"/>
           </a:ln>
         </p:spPr>
+        <p:txBody>
+          <a:bodyPr/>
+          <a:lstStyle/>
+          <a:p>
+            <a:endParaRPr lang="en-US"/>
+          </a:p>
+        </p:txBody>
       </p:sp>
       <p:sp>
         <p:nvSpPr>
@@ -4073,7 +4080,7 @@
           </a:bodyPr>
           <a:lstStyle/>
           <a:p>
-            <a:pPr algn="ctr" indent="0" marL="0">
+            <a:pPr marL="0" indent="0" algn="ctr">
               <a:buNone/>
             </a:pPr>
             <a:r>
@@ -4115,6 +4122,13 @@
             <a:prstDash val="solid"/>
           </a:ln>
         </p:spPr>
+        <p:txBody>
+          <a:bodyPr/>
+          <a:lstStyle/>
+          <a:p>
+            <a:endParaRPr lang="en-US"/>
+          </a:p>
+        </p:txBody>
       </p:sp>
       <p:sp>
         <p:nvSpPr>
@@ -4139,7 +4153,7 @@
           </a:bodyPr>
           <a:lstStyle/>
           <a:p>
-            <a:pPr algn="ctr" indent="0" marL="0">
+            <a:pPr marL="0" indent="0" algn="ctr">
               <a:buNone/>
             </a:pPr>
             <a:r>
@@ -4181,6 +4195,13 @@
             <a:prstDash val="solid"/>
           </a:ln>
         </p:spPr>
+        <p:txBody>
+          <a:bodyPr/>
+          <a:lstStyle/>
+          <a:p>
+            <a:endParaRPr lang="en-US"/>
+          </a:p>
+        </p:txBody>
       </p:sp>
       <p:sp>
         <p:nvSpPr>
@@ -4205,7 +4226,7 @@
           </a:bodyPr>
           <a:lstStyle/>
           <a:p>
-            <a:pPr algn="ctr" indent="0" marL="0">
+            <a:pPr marL="0" indent="0" algn="ctr">
               <a:buNone/>
             </a:pPr>
             <a:r>
@@ -4247,6 +4268,13 @@
             <a:prstDash val="solid"/>
           </a:ln>
         </p:spPr>
+        <p:txBody>
+          <a:bodyPr/>
+          <a:lstStyle/>
+          <a:p>
+            <a:endParaRPr lang="en-US"/>
+          </a:p>
+        </p:txBody>
       </p:sp>
       <p:sp>
         <p:nvSpPr>
@@ -4271,7 +4299,7 @@
           </a:bodyPr>
           <a:lstStyle/>
           <a:p>
-            <a:pPr algn="ctr" indent="0" marL="0">
+            <a:pPr marL="0" indent="0" algn="ctr">
               <a:buNone/>
             </a:pPr>
             <a:r>
@@ -4313,6 +4341,13 @@
             <a:prstDash val="solid"/>
           </a:ln>
         </p:spPr>
+        <p:txBody>
+          <a:bodyPr/>
+          <a:lstStyle/>
+          <a:p>
+            <a:endParaRPr lang="en-US"/>
+          </a:p>
+        </p:txBody>
       </p:sp>
       <p:sp>
         <p:nvSpPr>
@@ -4337,7 +4372,7 @@
           </a:bodyPr>
           <a:lstStyle/>
           <a:p>
-            <a:pPr algn="l" indent="0" marL="0">
+            <a:pPr marL="0" indent="0" algn="l">
               <a:buNone/>
             </a:pPr>
             <a:r>
@@ -4379,6 +4414,13 @@
             <a:prstDash val="solid"/>
           </a:ln>
         </p:spPr>
+        <p:txBody>
+          <a:bodyPr/>
+          <a:lstStyle/>
+          <a:p>
+            <a:endParaRPr lang="en-US"/>
+          </a:p>
+        </p:txBody>
       </p:sp>
       <p:sp>
         <p:nvSpPr>
@@ -4403,7 +4445,7 @@
           </a:bodyPr>
           <a:lstStyle/>
           <a:p>
-            <a:pPr algn="ctr" indent="0" marL="0">
+            <a:pPr marL="0" indent="0" algn="ctr">
               <a:buNone/>
             </a:pPr>
             <a:r>
@@ -4445,6 +4487,13 @@
             <a:prstDash val="solid"/>
           </a:ln>
         </p:spPr>
+        <p:txBody>
+          <a:bodyPr/>
+          <a:lstStyle/>
+          <a:p>
+            <a:endParaRPr lang="en-US"/>
+          </a:p>
+        </p:txBody>
       </p:sp>
       <p:sp>
         <p:nvSpPr>
@@ -4469,7 +4518,7 @@
           </a:bodyPr>
           <a:lstStyle/>
           <a:p>
-            <a:pPr algn="ctr" indent="0" marL="0">
+            <a:pPr marL="0" indent="0" algn="ctr">
               <a:buNone/>
             </a:pPr>
             <a:r>
@@ -4511,6 +4560,13 @@
             <a:prstDash val="solid"/>
           </a:ln>
         </p:spPr>
+        <p:txBody>
+          <a:bodyPr/>
+          <a:lstStyle/>
+          <a:p>
+            <a:endParaRPr lang="en-US"/>
+          </a:p>
+        </p:txBody>
       </p:sp>
       <p:sp>
         <p:nvSpPr>
@@ -4535,7 +4591,7 @@
           </a:bodyPr>
           <a:lstStyle/>
           <a:p>
-            <a:pPr algn="ctr" indent="0" marL="0">
+            <a:pPr marL="0" indent="0" algn="ctr">
               <a:buNone/>
             </a:pPr>
             <a:r>
@@ -4577,6 +4633,13 @@
             <a:prstDash val="solid"/>
           </a:ln>
         </p:spPr>
+        <p:txBody>
+          <a:bodyPr/>
+          <a:lstStyle/>
+          <a:p>
+            <a:endParaRPr lang="en-US"/>
+          </a:p>
+        </p:txBody>
       </p:sp>
       <p:sp>
         <p:nvSpPr>
@@ -4601,7 +4664,7 @@
           </a:bodyPr>
           <a:lstStyle/>
           <a:p>
-            <a:pPr algn="ctr" indent="0" marL="0">
+            <a:pPr marL="0" indent="0" algn="ctr">
               <a:buNone/>
             </a:pPr>
             <a:r>
@@ -4643,6 +4706,13 @@
             <a:prstDash val="solid"/>
           </a:ln>
         </p:spPr>
+        <p:txBody>
+          <a:bodyPr/>
+          <a:lstStyle/>
+          <a:p>
+            <a:endParaRPr lang="en-US"/>
+          </a:p>
+        </p:txBody>
       </p:sp>
       <p:sp>
         <p:nvSpPr>
@@ -4667,7 +4737,7 @@
           </a:bodyPr>
           <a:lstStyle/>
           <a:p>
-            <a:pPr algn="l" indent="0" marL="0">
+            <a:pPr marL="0" indent="0" algn="l">
               <a:buNone/>
             </a:pPr>
             <a:r>
@@ -4709,6 +4779,13 @@
             <a:prstDash val="solid"/>
           </a:ln>
         </p:spPr>
+        <p:txBody>
+          <a:bodyPr/>
+          <a:lstStyle/>
+          <a:p>
+            <a:endParaRPr lang="en-US"/>
+          </a:p>
+        </p:txBody>
       </p:sp>
       <p:sp>
         <p:nvSpPr>
@@ -4733,7 +4810,7 @@
           </a:bodyPr>
           <a:lstStyle/>
           <a:p>
-            <a:pPr algn="ctr" indent="0" marL="0">
+            <a:pPr marL="0" indent="0" algn="ctr">
               <a:buNone/>
             </a:pPr>
             <a:r>
@@ -4775,6 +4852,13 @@
             <a:prstDash val="solid"/>
           </a:ln>
         </p:spPr>
+        <p:txBody>
+          <a:bodyPr/>
+          <a:lstStyle/>
+          <a:p>
+            <a:endParaRPr lang="en-US"/>
+          </a:p>
+        </p:txBody>
       </p:sp>
       <p:sp>
         <p:nvSpPr>
@@ -4799,7 +4883,7 @@
           </a:bodyPr>
           <a:lstStyle/>
           <a:p>
-            <a:pPr algn="ctr" indent="0" marL="0">
+            <a:pPr marL="0" indent="0" algn="ctr">
               <a:buNone/>
             </a:pPr>
             <a:r>
@@ -4841,6 +4925,13 @@
             <a:prstDash val="solid"/>
           </a:ln>
         </p:spPr>
+        <p:txBody>
+          <a:bodyPr/>
+          <a:lstStyle/>
+          <a:p>
+            <a:endParaRPr lang="en-US"/>
+          </a:p>
+        </p:txBody>
       </p:sp>
       <p:sp>
         <p:nvSpPr>
@@ -4865,7 +4956,7 @@
           </a:bodyPr>
           <a:lstStyle/>
           <a:p>
-            <a:pPr algn="ctr" indent="0" marL="0">
+            <a:pPr marL="0" indent="0" algn="ctr">
               <a:buNone/>
             </a:pPr>
             <a:r>
@@ -4907,6 +4998,13 @@
             <a:prstDash val="solid"/>
           </a:ln>
         </p:spPr>
+        <p:txBody>
+          <a:bodyPr/>
+          <a:lstStyle/>
+          <a:p>
+            <a:endParaRPr lang="en-US"/>
+          </a:p>
+        </p:txBody>
       </p:sp>
       <p:sp>
         <p:nvSpPr>
@@ -4931,7 +5029,7 @@
           </a:bodyPr>
           <a:lstStyle/>
           <a:p>
-            <a:pPr algn="ctr" indent="0" marL="0">
+            <a:pPr marL="0" indent="0" algn="ctr">
               <a:buNone/>
             </a:pPr>
             <a:r>
@@ -4973,6 +5071,13 @@
             <a:prstDash val="solid"/>
           </a:ln>
         </p:spPr>
+        <p:txBody>
+          <a:bodyPr/>
+          <a:lstStyle/>
+          <a:p>
+            <a:endParaRPr lang="en-US"/>
+          </a:p>
+        </p:txBody>
       </p:sp>
       <p:sp>
         <p:nvSpPr>
@@ -4997,7 +5102,7 @@
           </a:bodyPr>
           <a:lstStyle/>
           <a:p>
-            <a:pPr algn="l" indent="0" marL="0">
+            <a:pPr marL="0" indent="0" algn="l">
               <a:buNone/>
             </a:pPr>
             <a:r>
@@ -5039,6 +5144,13 @@
             <a:prstDash val="solid"/>
           </a:ln>
         </p:spPr>
+        <p:txBody>
+          <a:bodyPr/>
+          <a:lstStyle/>
+          <a:p>
+            <a:endParaRPr lang="en-US"/>
+          </a:p>
+        </p:txBody>
       </p:sp>
       <p:sp>
         <p:nvSpPr>
@@ -5063,7 +5175,7 @@
           </a:bodyPr>
           <a:lstStyle/>
           <a:p>
-            <a:pPr algn="ctr" indent="0" marL="0">
+            <a:pPr marL="0" indent="0" algn="ctr">
               <a:buNone/>
             </a:pPr>
             <a:r>
@@ -5105,6 +5217,13 @@
             <a:prstDash val="solid"/>
           </a:ln>
         </p:spPr>
+        <p:txBody>
+          <a:bodyPr/>
+          <a:lstStyle/>
+          <a:p>
+            <a:endParaRPr lang="en-US"/>
+          </a:p>
+        </p:txBody>
       </p:sp>
       <p:sp>
         <p:nvSpPr>
@@ -5129,7 +5248,7 @@
           </a:bodyPr>
           <a:lstStyle/>
           <a:p>
-            <a:pPr algn="ctr" indent="0" marL="0">
+            <a:pPr marL="0" indent="0" algn="ctr">
               <a:buNone/>
             </a:pPr>
             <a:r>
@@ -5171,6 +5290,13 @@
             <a:prstDash val="solid"/>
           </a:ln>
         </p:spPr>
+        <p:txBody>
+          <a:bodyPr/>
+          <a:lstStyle/>
+          <a:p>
+            <a:endParaRPr lang="en-US"/>
+          </a:p>
+        </p:txBody>
       </p:sp>
       <p:sp>
         <p:nvSpPr>
@@ -5195,7 +5321,7 @@
           </a:bodyPr>
           <a:lstStyle/>
           <a:p>
-            <a:pPr algn="ctr" indent="0" marL="0">
+            <a:pPr marL="0" indent="0" algn="ctr">
               <a:buNone/>
             </a:pPr>
             <a:r>
@@ -5237,6 +5363,13 @@
             <a:prstDash val="solid"/>
           </a:ln>
         </p:spPr>
+        <p:txBody>
+          <a:bodyPr/>
+          <a:lstStyle/>
+          <a:p>
+            <a:endParaRPr lang="en-US"/>
+          </a:p>
+        </p:txBody>
       </p:sp>
       <p:sp>
         <p:nvSpPr>
@@ -5261,7 +5394,7 @@
           </a:bodyPr>
           <a:lstStyle/>
           <a:p>
-            <a:pPr algn="ctr" indent="0" marL="0">
+            <a:pPr marL="0" indent="0" algn="ctr">
               <a:buNone/>
             </a:pPr>
             <a:r>
@@ -5307,6 +5440,13 @@
             <a:prstDash val="solid"/>
           </a:ln>
         </p:spPr>
+        <p:txBody>
+          <a:bodyPr/>
+          <a:lstStyle/>
+          <a:p>
+            <a:endParaRPr lang="en-US"/>
+          </a:p>
+        </p:txBody>
       </p:sp>
       <p:sp>
         <p:nvSpPr>
@@ -5331,11 +5471,11 @@
           </a:bodyPr>
           <a:lstStyle/>
           <a:p>
-            <a:pPr algn="l" indent="0" marL="0">
-              <a:buNone/>
-            </a:pPr>
-            <a:r>
-              <a:rPr lang="en-US" sz="1000" b="1" spc="100" kern="0" dirty="0">
+            <a:pPr marL="0" indent="0" algn="l">
+              <a:buNone/>
+            </a:pPr>
+            <a:r>
+              <a:rPr lang="en-US" sz="1000" b="1" kern="0" spc="100" dirty="0">
                 <a:solidFill>
                   <a:srgbClr val="38BDF8"/>
                 </a:solidFill>
@@ -5372,7 +5512,7 @@
           </a:bodyPr>
           <a:lstStyle/>
           <a:p>
-            <a:pPr algn="l" indent="0" marL="0">
+            <a:pPr marL="0" indent="0" algn="l">
               <a:buNone/>
             </a:pPr>
             <a:r>
@@ -5413,7 +5553,7 @@
           </a:bodyPr>
           <a:lstStyle/>
           <a:p>
-            <a:pPr algn="l" indent="0" marL="0">
+            <a:pPr marL="0" indent="0" algn="l">
               <a:buNone/>
             </a:pPr>
             <a:r>
@@ -5454,7 +5594,7 @@
           </a:bodyPr>
           <a:lstStyle/>
           <a:p>
-            <a:pPr algn="l" indent="0" marL="0">
+            <a:pPr marL="0" indent="0" algn="l">
               <a:buNone/>
             </a:pPr>
             <a:r>
@@ -5495,7 +5635,7 @@
           </a:bodyPr>
           <a:lstStyle/>
           <a:p>
-            <a:pPr algn="l" indent="0" marL="0">
+            <a:pPr marL="0" indent="0" algn="l">
               <a:buNone/>
             </a:pPr>
             <a:r>
@@ -5536,7 +5676,7 @@
           </a:bodyPr>
           <a:lstStyle/>
           <a:p>
-            <a:pPr algn="l" indent="0" marL="0">
+            <a:pPr marL="0" indent="0" algn="l">
               <a:buNone/>
             </a:pPr>
             <a:r>
@@ -5577,7 +5717,7 @@
           </a:bodyPr>
           <a:lstStyle/>
           <a:p>
-            <a:pPr algn="l" indent="0" marL="0">
+            <a:pPr marL="0" indent="0" algn="l">
               <a:buNone/>
             </a:pPr>
             <a:r>
@@ -5618,7 +5758,7 @@
           </a:bodyPr>
           <a:lstStyle/>
           <a:p>
-            <a:pPr algn="l" indent="0" marL="0">
+            <a:pPr marL="0" indent="0" algn="l">
               <a:buNone/>
             </a:pPr>
             <a:r>
@@ -5659,7 +5799,7 @@
           </a:bodyPr>
           <a:lstStyle/>
           <a:p>
-            <a:pPr algn="l" indent="0" marL="0">
+            <a:pPr marL="0" indent="0" algn="l">
               <a:buNone/>
             </a:pPr>
             <a:r>
@@ -5700,7 +5840,7 @@
           </a:bodyPr>
           <a:lstStyle/>
           <a:p>
-            <a:pPr algn="l" indent="0" marL="0">
+            <a:pPr marL="0" indent="0" algn="l">
               <a:buNone/>
             </a:pPr>
             <a:r>
@@ -5741,7 +5881,7 @@
           </a:bodyPr>
           <a:lstStyle/>
           <a:p>
-            <a:pPr algn="l" indent="0" marL="0">
+            <a:pPr marL="0" indent="0" algn="l">
               <a:buNone/>
             </a:pPr>
             <a:r>
@@ -5782,7 +5922,7 @@
           </a:bodyPr>
           <a:lstStyle/>
           <a:p>
-            <a:pPr algn="l" indent="0" marL="0">
+            <a:pPr marL="0" indent="0" algn="l">
               <a:buNone/>
             </a:pPr>
             <a:r>
@@ -5823,7 +5963,7 @@
           </a:bodyPr>
           <a:lstStyle/>
           <a:p>
-            <a:pPr algn="l" indent="0" marL="0">
+            <a:pPr marL="0" indent="0" algn="l">
               <a:buNone/>
             </a:pPr>
             <a:r>
@@ -5843,7 +5983,7 @@
       </p:sp>
       <p:sp>
         <p:nvSpPr>
-          <p:cNvPr id="25" name="Slide Number Placeholder 0"/>
+          <p:cNvPr id="79" name="Slide Number Placeholder 0"/>
           <p:cNvSpPr>
             <a:spLocks noGrp="1"/>
           </p:cNvSpPr>
@@ -5861,7 +6001,7 @@
           </a:prstGeom>
           <a:extLst>
             <a:ext uri="{C572A759-6A51-4108-AA02-DFA0A04FC94B}">
-              <ma14:wrappingTextBoxFlag xmlns:ma14="http://schemas.microsoft.com/office/mac/drawingml/2011/main" val="0"/>
+              <ma14:wrappingTextBoxFlag xmlns:ma14="http://schemas.microsoft.com/office/mac/drawingml/2011/main" xmlns="" val="0"/>
             </a:ext>
           </a:extLst>
         </p:spPr>
@@ -5882,7 +6022,7 @@
           <a:p>
             <a:pPr algn="l"/>
             <a:fld id="{F7021451-1387-4CA6-816F-3879F97B5CBC}" type="slidenum">
-              <a:rPr b="0" lang="en-US"/>
+              <a:rPr lang="en-US" b="0"/>
               <a:t>10</a:t>
             </a:fld>
             <a:endParaRPr lang="en-US"/>
@@ -5937,11 +6077,11 @@
           </a:bodyPr>
           <a:lstStyle/>
           <a:p>
-            <a:pPr algn="l" indent="0" marL="0">
-              <a:buNone/>
-            </a:pPr>
-            <a:r>
-              <a:rPr lang="en-US" sz="900" b="1" spc="150" kern="0" dirty="0">
+            <a:pPr marL="0" indent="0" algn="l">
+              <a:buNone/>
+            </a:pPr>
+            <a:r>
+              <a:rPr lang="en-US" sz="900" b="1" kern="0" spc="150" dirty="0">
                 <a:solidFill>
                   <a:srgbClr val="38BDF8"/>
                 </a:solidFill>
@@ -5978,7 +6118,7 @@
           </a:bodyPr>
           <a:lstStyle/>
           <a:p>
-            <a:pPr algn="l" indent="0" marL="0">
+            <a:pPr marL="0" indent="0" algn="l">
               <a:buNone/>
             </a:pPr>
             <a:r>
@@ -6019,7 +6159,7 @@
           </a:bodyPr>
           <a:lstStyle/>
           <a:p>
-            <a:pPr algn="l" indent="0" marL="0">
+            <a:pPr marL="0" indent="0" algn="l">
               <a:buNone/>
             </a:pPr>
             <a:r>
@@ -6065,6 +6205,13 @@
             <a:prstDash val="solid"/>
           </a:ln>
         </p:spPr>
+        <p:txBody>
+          <a:bodyPr/>
+          <a:lstStyle/>
+          <a:p>
+            <a:endParaRPr lang="en-US"/>
+          </a:p>
+        </p:txBody>
       </p:sp>
       <p:sp>
         <p:nvSpPr>
@@ -6089,7 +6236,7 @@
           </a:bodyPr>
           <a:lstStyle/>
           <a:p>
-            <a:pPr algn="ctr" indent="0" marL="0">
+            <a:pPr marL="0" indent="0" algn="ctr">
               <a:buNone/>
             </a:pPr>
             <a:r>
@@ -6130,7 +6277,7 @@
           </a:bodyPr>
           <a:lstStyle/>
           <a:p>
-            <a:pPr algn="ctr" indent="0" marL="0">
+            <a:pPr marL="0" indent="0" algn="ctr">
               <a:buNone/>
             </a:pPr>
             <a:r>
@@ -6172,6 +6319,13 @@
             <a:tailEnd type="none"/>
           </a:ln>
         </p:spPr>
+        <p:txBody>
+          <a:bodyPr/>
+          <a:lstStyle/>
+          <a:p>
+            <a:endParaRPr lang="en-US"/>
+          </a:p>
+        </p:txBody>
       </p:sp>
       <p:sp>
         <p:nvSpPr>
@@ -6201,6 +6355,13 @@
             <a:prstDash val="solid"/>
           </a:ln>
         </p:spPr>
+        <p:txBody>
+          <a:bodyPr/>
+          <a:lstStyle/>
+          <a:p>
+            <a:endParaRPr lang="en-US"/>
+          </a:p>
+        </p:txBody>
       </p:sp>
       <p:sp>
         <p:nvSpPr>
@@ -6225,7 +6386,7 @@
           </a:bodyPr>
           <a:lstStyle/>
           <a:p>
-            <a:pPr algn="ctr" indent="0" marL="0">
+            <a:pPr marL="0" indent="0" algn="ctr">
               <a:buNone/>
             </a:pPr>
             <a:r>
@@ -6266,7 +6427,7 @@
           </a:bodyPr>
           <a:lstStyle/>
           <a:p>
-            <a:pPr algn="ctr" indent="0" marL="0">
+            <a:pPr marL="0" indent="0" algn="ctr">
               <a:buNone/>
             </a:pPr>
             <a:r>
@@ -6308,6 +6469,13 @@
             <a:tailEnd type="none"/>
           </a:ln>
         </p:spPr>
+        <p:txBody>
+          <a:bodyPr/>
+          <a:lstStyle/>
+          <a:p>
+            <a:endParaRPr lang="en-US"/>
+          </a:p>
+        </p:txBody>
       </p:sp>
       <p:sp>
         <p:nvSpPr>
@@ -6337,6 +6505,13 @@
             <a:prstDash val="solid"/>
           </a:ln>
         </p:spPr>
+        <p:txBody>
+          <a:bodyPr/>
+          <a:lstStyle/>
+          <a:p>
+            <a:endParaRPr lang="en-US"/>
+          </a:p>
+        </p:txBody>
       </p:sp>
       <p:sp>
         <p:nvSpPr>
@@ -6361,7 +6536,7 @@
           </a:bodyPr>
           <a:lstStyle/>
           <a:p>
-            <a:pPr algn="ctr" indent="0" marL="0">
+            <a:pPr marL="0" indent="0" algn="ctr">
               <a:buNone/>
             </a:pPr>
             <a:r>
@@ -6402,7 +6577,7 @@
           </a:bodyPr>
           <a:lstStyle/>
           <a:p>
-            <a:pPr algn="ctr" indent="0" marL="0">
+            <a:pPr marL="0" indent="0" algn="ctr">
               <a:buNone/>
             </a:pPr>
             <a:r>
@@ -6444,6 +6619,13 @@
             <a:tailEnd type="none"/>
           </a:ln>
         </p:spPr>
+        <p:txBody>
+          <a:bodyPr/>
+          <a:lstStyle/>
+          <a:p>
+            <a:endParaRPr lang="en-US"/>
+          </a:p>
+        </p:txBody>
       </p:sp>
       <p:sp>
         <p:nvSpPr>
@@ -6473,6 +6655,13 @@
             <a:prstDash val="solid"/>
           </a:ln>
         </p:spPr>
+        <p:txBody>
+          <a:bodyPr/>
+          <a:lstStyle/>
+          <a:p>
+            <a:endParaRPr lang="en-US"/>
+          </a:p>
+        </p:txBody>
       </p:sp>
       <p:sp>
         <p:nvSpPr>
@@ -6497,7 +6686,7 @@
           </a:bodyPr>
           <a:lstStyle/>
           <a:p>
-            <a:pPr algn="ctr" indent="0" marL="0">
+            <a:pPr marL="0" indent="0" algn="ctr">
               <a:buNone/>
             </a:pPr>
             <a:r>
@@ -6538,7 +6727,7 @@
           </a:bodyPr>
           <a:lstStyle/>
           <a:p>
-            <a:pPr algn="ctr" indent="0" marL="0">
+            <a:pPr marL="0" indent="0" algn="ctr">
               <a:buNone/>
             </a:pPr>
             <a:r>
@@ -6580,6 +6769,13 @@
             <a:tailEnd type="none"/>
           </a:ln>
         </p:spPr>
+        <p:txBody>
+          <a:bodyPr/>
+          <a:lstStyle/>
+          <a:p>
+            <a:endParaRPr lang="en-US"/>
+          </a:p>
+        </p:txBody>
       </p:sp>
       <p:sp>
         <p:nvSpPr>
@@ -6609,6 +6805,13 @@
             <a:prstDash val="solid"/>
           </a:ln>
         </p:spPr>
+        <p:txBody>
+          <a:bodyPr/>
+          <a:lstStyle/>
+          <a:p>
+            <a:endParaRPr lang="en-US"/>
+          </a:p>
+        </p:txBody>
       </p:sp>
       <p:sp>
         <p:nvSpPr>
@@ -6633,7 +6836,7 @@
           </a:bodyPr>
           <a:lstStyle/>
           <a:p>
-            <a:pPr algn="ctr" indent="0" marL="0">
+            <a:pPr marL="0" indent="0" algn="ctr">
               <a:buNone/>
             </a:pPr>
             <a:r>
@@ -6674,7 +6877,7 @@
           </a:bodyPr>
           <a:lstStyle/>
           <a:p>
-            <a:pPr algn="ctr" indent="0" marL="0">
+            <a:pPr marL="0" indent="0" algn="ctr">
               <a:buNone/>
             </a:pPr>
             <a:r>
@@ -6720,6 +6923,13 @@
             <a:prstDash val="solid"/>
           </a:ln>
         </p:spPr>
+        <p:txBody>
+          <a:bodyPr/>
+          <a:lstStyle/>
+          <a:p>
+            <a:endParaRPr lang="en-US"/>
+          </a:p>
+        </p:txBody>
       </p:sp>
       <p:sp>
         <p:nvSpPr>
@@ -6744,7 +6954,7 @@
           </a:bodyPr>
           <a:lstStyle/>
           <a:p>
-            <a:pPr algn="l" indent="0" marL="0">
+            <a:pPr marL="0" indent="0" algn="l">
               <a:buNone/>
             </a:pPr>
             <a:r>
@@ -6785,7 +6995,7 @@
           </a:bodyPr>
           <a:lstStyle/>
           <a:p>
-            <a:pPr algn="l" indent="0" marL="0">
+            <a:pPr marL="0" indent="0" algn="l">
               <a:buNone/>
             </a:pPr>
             <a:r>
@@ -6831,6 +7041,13 @@
             <a:prstDash val="solid"/>
           </a:ln>
         </p:spPr>
+        <p:txBody>
+          <a:bodyPr/>
+          <a:lstStyle/>
+          <a:p>
+            <a:endParaRPr lang="en-US"/>
+          </a:p>
+        </p:txBody>
       </p:sp>
       <p:sp>
         <p:nvSpPr>
@@ -6855,7 +7072,7 @@
           </a:bodyPr>
           <a:lstStyle/>
           <a:p>
-            <a:pPr algn="l" indent="0" marL="0">
+            <a:pPr marL="0" indent="0" algn="l">
               <a:buNone/>
             </a:pPr>
             <a:r>
@@ -6896,7 +7113,7 @@
           </a:bodyPr>
           <a:lstStyle/>
           <a:p>
-            <a:pPr algn="l" indent="0" marL="0">
+            <a:pPr marL="0" indent="0" algn="l">
               <a:buNone/>
             </a:pPr>
             <a:r>
@@ -6942,6 +7159,13 @@
             <a:prstDash val="solid"/>
           </a:ln>
         </p:spPr>
+        <p:txBody>
+          <a:bodyPr/>
+          <a:lstStyle/>
+          <a:p>
+            <a:endParaRPr lang="en-US"/>
+          </a:p>
+        </p:txBody>
       </p:sp>
       <p:sp>
         <p:nvSpPr>
@@ -6966,7 +7190,7 @@
           </a:bodyPr>
           <a:lstStyle/>
           <a:p>
-            <a:pPr algn="l" indent="0" marL="0">
+            <a:pPr marL="0" indent="0" algn="l">
               <a:buNone/>
             </a:pPr>
             <a:r>
@@ -7007,7 +7231,7 @@
           </a:bodyPr>
           <a:lstStyle/>
           <a:p>
-            <a:pPr algn="l" indent="0" marL="0">
+            <a:pPr marL="0" indent="0" algn="l">
               <a:buNone/>
             </a:pPr>
             <a:r>
@@ -7027,7 +7251,7 @@
       </p:sp>
       <p:sp>
         <p:nvSpPr>
-          <p:cNvPr id="25" name="Slide Number Placeholder 0"/>
+          <p:cNvPr id="33" name="Slide Number Placeholder 0"/>
           <p:cNvSpPr>
             <a:spLocks noGrp="1"/>
           </p:cNvSpPr>
@@ -7045,7 +7269,7 @@
           </a:prstGeom>
           <a:extLst>
             <a:ext uri="{C572A759-6A51-4108-AA02-DFA0A04FC94B}">
-              <ma14:wrappingTextBoxFlag xmlns:ma14="http://schemas.microsoft.com/office/mac/drawingml/2011/main" val="0"/>
+              <ma14:wrappingTextBoxFlag xmlns:ma14="http://schemas.microsoft.com/office/mac/drawingml/2011/main" xmlns="" val="0"/>
             </a:ext>
           </a:extLst>
         </p:spPr>
@@ -7066,7 +7290,7 @@
           <a:p>
             <a:pPr algn="l"/>
             <a:fld id="{F7021451-1387-4CA6-816F-3879F97B5CBC}" type="slidenum">
-              <a:rPr b="0" lang="en-US"/>
+              <a:rPr lang="en-US" b="0"/>
               <a:t>11</a:t>
             </a:fld>
             <a:endParaRPr lang="en-US"/>
@@ -7121,11 +7345,11 @@
           </a:bodyPr>
           <a:lstStyle/>
           <a:p>
-            <a:pPr algn="l" indent="0" marL="0">
-              <a:buNone/>
-            </a:pPr>
-            <a:r>
-              <a:rPr lang="en-US" sz="900" b="1" spc="150" kern="0" dirty="0">
+            <a:pPr marL="0" indent="0" algn="l">
+              <a:buNone/>
+            </a:pPr>
+            <a:r>
+              <a:rPr lang="en-US" sz="900" b="1" kern="0" spc="150" dirty="0">
                 <a:solidFill>
                   <a:srgbClr val="38BDF8"/>
                 </a:solidFill>
@@ -7162,7 +7386,7 @@
           </a:bodyPr>
           <a:lstStyle/>
           <a:p>
-            <a:pPr algn="l" indent="0" marL="0">
+            <a:pPr marL="0" indent="0" algn="l">
               <a:buNone/>
             </a:pPr>
             <a:r>
@@ -7203,7 +7427,7 @@
           </a:bodyPr>
           <a:lstStyle/>
           <a:p>
-            <a:pPr algn="l" indent="0" marL="0">
+            <a:pPr marL="0" indent="0" algn="l">
               <a:buNone/>
             </a:pPr>
             <a:r>
@@ -7249,6 +7473,13 @@
             <a:prstDash val="solid"/>
           </a:ln>
         </p:spPr>
+        <p:txBody>
+          <a:bodyPr/>
+          <a:lstStyle/>
+          <a:p>
+            <a:endParaRPr lang="en-US"/>
+          </a:p>
+        </p:txBody>
       </p:sp>
       <p:sp>
         <p:nvSpPr>
@@ -7273,11 +7504,11 @@
           </a:bodyPr>
           <a:lstStyle/>
           <a:p>
-            <a:pPr algn="l" indent="0" marL="0">
-              <a:buNone/>
-            </a:pPr>
-            <a:r>
-              <a:rPr lang="en-US" sz="1000" b="1" spc="100" kern="0" dirty="0">
+            <a:pPr marL="0" indent="0" algn="l">
+              <a:buNone/>
+            </a:pPr>
+            <a:r>
+              <a:rPr lang="en-US" sz="1000" b="1" kern="0" spc="100" dirty="0">
                 <a:solidFill>
                   <a:srgbClr val="F85149"/>
                 </a:solidFill>
@@ -7315,6 +7546,13 @@
             <a:prstDash val="solid"/>
           </a:ln>
         </p:spPr>
+        <p:txBody>
+          <a:bodyPr/>
+          <a:lstStyle/>
+          <a:p>
+            <a:endParaRPr lang="en-US"/>
+          </a:p>
+        </p:txBody>
       </p:sp>
       <p:sp>
         <p:nvSpPr>
@@ -7339,7 +7577,7 @@
           </a:bodyPr>
           <a:lstStyle/>
           <a:p>
-            <a:pPr algn="l" indent="0" marL="0">
+            <a:pPr marL="0" indent="0" algn="l">
               <a:buNone/>
             </a:pPr>
             <a:r>
@@ -7381,6 +7619,13 @@
             <a:prstDash val="solid"/>
           </a:ln>
         </p:spPr>
+        <p:txBody>
+          <a:bodyPr/>
+          <a:lstStyle/>
+          <a:p>
+            <a:endParaRPr lang="en-US"/>
+          </a:p>
+        </p:txBody>
       </p:sp>
       <p:sp>
         <p:nvSpPr>
@@ -7405,7 +7650,7 @@
           </a:bodyPr>
           <a:lstStyle/>
           <a:p>
-            <a:pPr algn="l" indent="0" marL="0">
+            <a:pPr marL="0" indent="0" algn="l">
               <a:buNone/>
             </a:pPr>
             <a:r>
@@ -7447,6 +7692,13 @@
             <a:prstDash val="solid"/>
           </a:ln>
         </p:spPr>
+        <p:txBody>
+          <a:bodyPr/>
+          <a:lstStyle/>
+          <a:p>
+            <a:endParaRPr lang="en-US"/>
+          </a:p>
+        </p:txBody>
       </p:sp>
       <p:sp>
         <p:nvSpPr>
@@ -7471,7 +7723,7 @@
           </a:bodyPr>
           <a:lstStyle/>
           <a:p>
-            <a:pPr algn="l" indent="0" marL="0">
+            <a:pPr marL="0" indent="0" algn="l">
               <a:buNone/>
             </a:pPr>
             <a:r>
@@ -7513,6 +7765,13 @@
             <a:prstDash val="solid"/>
           </a:ln>
         </p:spPr>
+        <p:txBody>
+          <a:bodyPr/>
+          <a:lstStyle/>
+          <a:p>
+            <a:endParaRPr lang="en-US"/>
+          </a:p>
+        </p:txBody>
       </p:sp>
       <p:sp>
         <p:nvSpPr>
@@ -7537,7 +7796,7 @@
           </a:bodyPr>
           <a:lstStyle/>
           <a:p>
-            <a:pPr algn="l" indent="0" marL="0">
+            <a:pPr marL="0" indent="0" algn="l">
               <a:buNone/>
             </a:pPr>
             <a:r>
@@ -7579,6 +7838,13 @@
             <a:prstDash val="solid"/>
           </a:ln>
         </p:spPr>
+        <p:txBody>
+          <a:bodyPr/>
+          <a:lstStyle/>
+          <a:p>
+            <a:endParaRPr lang="en-US"/>
+          </a:p>
+        </p:txBody>
       </p:sp>
       <p:sp>
         <p:nvSpPr>
@@ -7603,7 +7869,7 @@
           </a:bodyPr>
           <a:lstStyle/>
           <a:p>
-            <a:pPr algn="l" indent="0" marL="0">
+            <a:pPr marL="0" indent="0" algn="l">
               <a:buNone/>
             </a:pPr>
             <a:r>
@@ -7649,6 +7915,13 @@
             <a:prstDash val="solid"/>
           </a:ln>
         </p:spPr>
+        <p:txBody>
+          <a:bodyPr/>
+          <a:lstStyle/>
+          <a:p>
+            <a:endParaRPr lang="en-US"/>
+          </a:p>
+        </p:txBody>
       </p:sp>
       <p:sp>
         <p:nvSpPr>
@@ -7673,11 +7946,11 @@
           </a:bodyPr>
           <a:lstStyle/>
           <a:p>
-            <a:pPr algn="l" indent="0" marL="0">
-              <a:buNone/>
-            </a:pPr>
-            <a:r>
-              <a:rPr lang="en-US" sz="1000" b="1" spc="100" kern="0" dirty="0">
+            <a:pPr marL="0" indent="0" algn="l">
+              <a:buNone/>
+            </a:pPr>
+            <a:r>
+              <a:rPr lang="en-US" sz="1000" b="1" kern="0" spc="100" dirty="0">
                 <a:solidFill>
                   <a:srgbClr val="3FB950"/>
                 </a:solidFill>
@@ -7719,6 +7992,13 @@
             <a:prstDash val="solid"/>
           </a:ln>
         </p:spPr>
+        <p:txBody>
+          <a:bodyPr/>
+          <a:lstStyle/>
+          <a:p>
+            <a:endParaRPr lang="en-US"/>
+          </a:p>
+        </p:txBody>
       </p:sp>
       <p:sp>
         <p:nvSpPr>
@@ -7743,7 +8023,7 @@
           </a:bodyPr>
           <a:lstStyle/>
           <a:p>
-            <a:pPr algn="ctr" indent="0" marL="0">
+            <a:pPr marL="0" indent="0" algn="ctr">
               <a:buNone/>
             </a:pPr>
             <a:r>
@@ -7784,7 +8064,7 @@
           </a:bodyPr>
           <a:lstStyle/>
           <a:p>
-            <a:pPr algn="l" indent="0" marL="0">
+            <a:pPr marL="0" indent="0" algn="l">
               <a:buNone/>
             </a:pPr>
             <a:r>
@@ -7830,6 +8110,13 @@
             <a:prstDash val="solid"/>
           </a:ln>
         </p:spPr>
+        <p:txBody>
+          <a:bodyPr/>
+          <a:lstStyle/>
+          <a:p>
+            <a:endParaRPr lang="en-US"/>
+          </a:p>
+        </p:txBody>
       </p:sp>
       <p:sp>
         <p:nvSpPr>
@@ -7854,7 +8141,7 @@
           </a:bodyPr>
           <a:lstStyle/>
           <a:p>
-            <a:pPr algn="ctr" indent="0" marL="0">
+            <a:pPr marL="0" indent="0" algn="ctr">
               <a:buNone/>
             </a:pPr>
             <a:r>
@@ -7895,7 +8182,7 @@
           </a:bodyPr>
           <a:lstStyle/>
           <a:p>
-            <a:pPr algn="l" indent="0" marL="0">
+            <a:pPr marL="0" indent="0" algn="l">
               <a:buNone/>
             </a:pPr>
             <a:r>
@@ -7941,6 +8228,13 @@
             <a:prstDash val="solid"/>
           </a:ln>
         </p:spPr>
+        <p:txBody>
+          <a:bodyPr/>
+          <a:lstStyle/>
+          <a:p>
+            <a:endParaRPr lang="en-US"/>
+          </a:p>
+        </p:txBody>
       </p:sp>
       <p:sp>
         <p:nvSpPr>
@@ -7965,7 +8259,7 @@
           </a:bodyPr>
           <a:lstStyle/>
           <a:p>
-            <a:pPr algn="ctr" indent="0" marL="0">
+            <a:pPr marL="0" indent="0" algn="ctr">
               <a:buNone/>
             </a:pPr>
             <a:r>
@@ -8006,7 +8300,7 @@
           </a:bodyPr>
           <a:lstStyle/>
           <a:p>
-            <a:pPr algn="l" indent="0" marL="0">
+            <a:pPr marL="0" indent="0" algn="l">
               <a:buNone/>
             </a:pPr>
             <a:r>
@@ -8052,6 +8346,13 @@
             <a:prstDash val="solid"/>
           </a:ln>
         </p:spPr>
+        <p:txBody>
+          <a:bodyPr/>
+          <a:lstStyle/>
+          <a:p>
+            <a:endParaRPr lang="en-US"/>
+          </a:p>
+        </p:txBody>
       </p:sp>
       <p:sp>
         <p:nvSpPr>
@@ -8076,7 +8377,7 @@
           </a:bodyPr>
           <a:lstStyle/>
           <a:p>
-            <a:pPr algn="ctr" indent="0" marL="0">
+            <a:pPr marL="0" indent="0" algn="ctr">
               <a:buNone/>
             </a:pPr>
             <a:r>
@@ -8117,7 +8418,7 @@
           </a:bodyPr>
           <a:lstStyle/>
           <a:p>
-            <a:pPr algn="l" indent="0" marL="0">
+            <a:pPr marL="0" indent="0" algn="l">
               <a:buNone/>
             </a:pPr>
             <a:r>
@@ -8163,6 +8464,13 @@
             <a:prstDash val="solid"/>
           </a:ln>
         </p:spPr>
+        <p:txBody>
+          <a:bodyPr/>
+          <a:lstStyle/>
+          <a:p>
+            <a:endParaRPr lang="en-US"/>
+          </a:p>
+        </p:txBody>
       </p:sp>
       <p:sp>
         <p:nvSpPr>
@@ -8187,7 +8495,7 @@
           </a:bodyPr>
           <a:lstStyle/>
           <a:p>
-            <a:pPr algn="ctr" indent="0" marL="0">
+            <a:pPr marL="0" indent="0" algn="ctr">
               <a:buNone/>
             </a:pPr>
             <a:r>
@@ -8228,7 +8536,7 @@
           </a:bodyPr>
           <a:lstStyle/>
           <a:p>
-            <a:pPr algn="l" indent="0" marL="0">
+            <a:pPr marL="0" indent="0" algn="l">
               <a:buNone/>
             </a:pPr>
             <a:r>
@@ -8274,6 +8582,13 @@
             <a:prstDash val="solid"/>
           </a:ln>
         </p:spPr>
+        <p:txBody>
+          <a:bodyPr/>
+          <a:lstStyle/>
+          <a:p>
+            <a:endParaRPr lang="en-US"/>
+          </a:p>
+        </p:txBody>
       </p:sp>
       <p:sp>
         <p:nvSpPr>
@@ -8298,7 +8613,7 @@
           </a:bodyPr>
           <a:lstStyle/>
           <a:p>
-            <a:pPr algn="ctr" indent="0" marL="0">
+            <a:pPr marL="0" indent="0" algn="ctr">
               <a:buNone/>
             </a:pPr>
             <a:r>
@@ -8318,7 +8633,7 @@
       </p:sp>
       <p:sp>
         <p:nvSpPr>
-          <p:cNvPr id="25" name="Slide Number Placeholder 0"/>
+          <p:cNvPr id="36" name="Slide Number Placeholder 0"/>
           <p:cNvSpPr>
             <a:spLocks noGrp="1"/>
           </p:cNvSpPr>
@@ -8336,7 +8651,7 @@
           </a:prstGeom>
           <a:extLst>
             <a:ext uri="{C572A759-6A51-4108-AA02-DFA0A04FC94B}">
-              <ma14:wrappingTextBoxFlag xmlns:ma14="http://schemas.microsoft.com/office/mac/drawingml/2011/main" val="0"/>
+              <ma14:wrappingTextBoxFlag xmlns:ma14="http://schemas.microsoft.com/office/mac/drawingml/2011/main" xmlns="" val="0"/>
             </a:ext>
           </a:extLst>
         </p:spPr>
@@ -8357,7 +8672,7 @@
           <a:p>
             <a:pPr algn="l"/>
             <a:fld id="{F7021451-1387-4CA6-816F-3879F97B5CBC}" type="slidenum">
-              <a:rPr b="0" lang="en-US"/>
+              <a:rPr lang="en-US" b="0"/>
               <a:t>12</a:t>
             </a:fld>
             <a:endParaRPr lang="en-US"/>
@@ -8412,11 +8727,11 @@
           </a:bodyPr>
           <a:lstStyle/>
           <a:p>
-            <a:pPr algn="l" indent="0" marL="0">
-              <a:buNone/>
-            </a:pPr>
-            <a:r>
-              <a:rPr lang="en-US" sz="900" b="1" spc="150" kern="0" dirty="0">
+            <a:pPr marL="0" indent="0" algn="l">
+              <a:buNone/>
+            </a:pPr>
+            <a:r>
+              <a:rPr lang="en-US" sz="900" b="1" kern="0" spc="150" dirty="0">
                 <a:solidFill>
                   <a:srgbClr val="38BDF8"/>
                 </a:solidFill>
@@ -8453,7 +8768,7 @@
           </a:bodyPr>
           <a:lstStyle/>
           <a:p>
-            <a:pPr algn="l" indent="0" marL="0">
+            <a:pPr marL="0" indent="0" algn="l">
               <a:buNone/>
             </a:pPr>
             <a:r>
@@ -8494,7 +8809,7 @@
           </a:bodyPr>
           <a:lstStyle/>
           <a:p>
-            <a:pPr algn="l" indent="0" marL="0">
+            <a:pPr marL="0" indent="0" algn="l">
               <a:buNone/>
             </a:pPr>
             <a:r>
@@ -8540,6 +8855,13 @@
             <a:prstDash val="solid"/>
           </a:ln>
         </p:spPr>
+        <p:txBody>
+          <a:bodyPr/>
+          <a:lstStyle/>
+          <a:p>
+            <a:endParaRPr lang="en-US"/>
+          </a:p>
+        </p:txBody>
       </p:sp>
       <p:sp>
         <p:nvSpPr>
@@ -8564,7 +8886,7 @@
           </a:bodyPr>
           <a:lstStyle/>
           <a:p>
-            <a:pPr algn="l" indent="0" marL="0">
+            <a:pPr marL="0" indent="0" algn="l">
               <a:buNone/>
             </a:pPr>
             <a:r>
@@ -8605,11 +8927,11 @@
           </a:bodyPr>
           <a:lstStyle/>
           <a:p>
-            <a:pPr algn="l" indent="0" marL="0">
-              <a:buNone/>
-            </a:pPr>
-            <a:r>
-              <a:rPr lang="en-US" sz="800" b="1" spc="100" kern="0" dirty="0">
+            <a:pPr marL="0" indent="0" algn="l">
+              <a:buNone/>
+            </a:pPr>
+            <a:r>
+              <a:rPr lang="en-US" sz="800" b="1" kern="0" spc="100" dirty="0">
                 <a:solidFill>
                   <a:srgbClr val="9DB3C8"/>
                 </a:solidFill>
@@ -8651,6 +8973,13 @@
             <a:prstDash val="solid"/>
           </a:ln>
         </p:spPr>
+        <p:txBody>
+          <a:bodyPr/>
+          <a:lstStyle/>
+          <a:p>
+            <a:endParaRPr lang="en-US"/>
+          </a:p>
+        </p:txBody>
       </p:sp>
       <p:sp>
         <p:nvSpPr>
@@ -8675,7 +9004,7 @@
           </a:bodyPr>
           <a:lstStyle/>
           <a:p>
-            <a:pPr algn="l" indent="0" marL="0">
+            <a:pPr marL="0" indent="0" algn="l">
               <a:buNone/>
             </a:pPr>
             <a:r>
@@ -8716,11 +9045,11 @@
           </a:bodyPr>
           <a:lstStyle/>
           <a:p>
-            <a:pPr algn="l" indent="0" marL="0">
-              <a:buNone/>
-            </a:pPr>
-            <a:r>
-              <a:rPr lang="en-US" sz="800" b="1" spc="100" kern="0" dirty="0">
+            <a:pPr marL="0" indent="0" algn="l">
+              <a:buNone/>
+            </a:pPr>
+            <a:r>
+              <a:rPr lang="en-US" sz="800" b="1" kern="0" spc="100" dirty="0">
                 <a:solidFill>
                   <a:srgbClr val="9DB3C8"/>
                 </a:solidFill>
@@ -8762,6 +9091,13 @@
             <a:prstDash val="solid"/>
           </a:ln>
         </p:spPr>
+        <p:txBody>
+          <a:bodyPr/>
+          <a:lstStyle/>
+          <a:p>
+            <a:endParaRPr lang="en-US"/>
+          </a:p>
+        </p:txBody>
       </p:sp>
       <p:sp>
         <p:nvSpPr>
@@ -8786,7 +9122,7 @@
           </a:bodyPr>
           <a:lstStyle/>
           <a:p>
-            <a:pPr algn="l" indent="0" marL="0">
+            <a:pPr marL="0" indent="0" algn="l">
               <a:buNone/>
             </a:pPr>
             <a:r>
@@ -8827,11 +9163,11 @@
           </a:bodyPr>
           <a:lstStyle/>
           <a:p>
-            <a:pPr algn="l" indent="0" marL="0">
-              <a:buNone/>
-            </a:pPr>
-            <a:r>
-              <a:rPr lang="en-US" sz="800" b="1" spc="100" kern="0" dirty="0">
+            <a:pPr marL="0" indent="0" algn="l">
+              <a:buNone/>
+            </a:pPr>
+            <a:r>
+              <a:rPr lang="en-US" sz="800" b="1" kern="0" spc="100" dirty="0">
                 <a:solidFill>
                   <a:srgbClr val="9DB3C8"/>
                 </a:solidFill>
@@ -8873,6 +9209,13 @@
             <a:prstDash val="solid"/>
           </a:ln>
         </p:spPr>
+        <p:txBody>
+          <a:bodyPr/>
+          <a:lstStyle/>
+          <a:p>
+            <a:endParaRPr lang="en-US"/>
+          </a:p>
+        </p:txBody>
       </p:sp>
       <p:sp>
         <p:nvSpPr>
@@ -8897,7 +9240,7 @@
           </a:bodyPr>
           <a:lstStyle/>
           <a:p>
-            <a:pPr algn="l" indent="0" marL="0">
+            <a:pPr marL="0" indent="0" algn="l">
               <a:buNone/>
             </a:pPr>
             <a:r>
@@ -8938,11 +9281,11 @@
           </a:bodyPr>
           <a:lstStyle/>
           <a:p>
-            <a:pPr algn="l" indent="0" marL="0">
-              <a:buNone/>
-            </a:pPr>
-            <a:r>
-              <a:rPr lang="en-US" sz="800" b="1" spc="100" kern="0" dirty="0">
+            <a:pPr marL="0" indent="0" algn="l">
+              <a:buNone/>
+            </a:pPr>
+            <a:r>
+              <a:rPr lang="en-US" sz="800" b="1" kern="0" spc="100" dirty="0">
                 <a:solidFill>
                   <a:srgbClr val="9DB3C8"/>
                 </a:solidFill>
@@ -8984,6 +9327,13 @@
             <a:prstDash val="solid"/>
           </a:ln>
         </p:spPr>
+        <p:txBody>
+          <a:bodyPr/>
+          <a:lstStyle/>
+          <a:p>
+            <a:endParaRPr lang="en-US"/>
+          </a:p>
+        </p:txBody>
       </p:sp>
       <p:sp>
         <p:nvSpPr>
@@ -9008,7 +9358,7 @@
           </a:bodyPr>
           <a:lstStyle/>
           <a:p>
-            <a:pPr algn="l" indent="0" marL="0">
+            <a:pPr marL="0" indent="0" algn="l">
               <a:buNone/>
             </a:pPr>
             <a:r>
@@ -9049,11 +9399,11 @@
           </a:bodyPr>
           <a:lstStyle/>
           <a:p>
-            <a:pPr algn="l" indent="0" marL="0">
-              <a:buNone/>
-            </a:pPr>
-            <a:r>
-              <a:rPr lang="en-US" sz="800" b="1" spc="100" kern="0" dirty="0">
+            <a:pPr marL="0" indent="0" algn="l">
+              <a:buNone/>
+            </a:pPr>
+            <a:r>
+              <a:rPr lang="en-US" sz="800" b="1" kern="0" spc="100" dirty="0">
                 <a:solidFill>
                   <a:srgbClr val="9DB3C8"/>
                 </a:solidFill>
@@ -9095,6 +9445,13 @@
             <a:prstDash val="solid"/>
           </a:ln>
         </p:spPr>
+        <p:txBody>
+          <a:bodyPr/>
+          <a:lstStyle/>
+          <a:p>
+            <a:endParaRPr lang="en-US"/>
+          </a:p>
+        </p:txBody>
       </p:sp>
       <p:sp>
         <p:nvSpPr>
@@ -9119,7 +9476,7 @@
           </a:bodyPr>
           <a:lstStyle/>
           <a:p>
-            <a:pPr algn="ctr" indent="0" marL="0">
+            <a:pPr marL="0" indent="0" algn="ctr">
               <a:buNone/>
             </a:pPr>
             <a:r>
@@ -9161,6 +9518,13 @@
             <a:tailEnd type="none"/>
           </a:ln>
         </p:spPr>
+        <p:txBody>
+          <a:bodyPr/>
+          <a:lstStyle/>
+          <a:p>
+            <a:endParaRPr lang="en-US"/>
+          </a:p>
+        </p:txBody>
       </p:sp>
       <p:sp>
         <p:nvSpPr>
@@ -9190,6 +9554,13 @@
             <a:prstDash val="solid"/>
           </a:ln>
         </p:spPr>
+        <p:txBody>
+          <a:bodyPr/>
+          <a:lstStyle/>
+          <a:p>
+            <a:endParaRPr lang="en-US"/>
+          </a:p>
+        </p:txBody>
       </p:sp>
       <p:sp>
         <p:nvSpPr>
@@ -9214,7 +9585,7 @@
           </a:bodyPr>
           <a:lstStyle/>
           <a:p>
-            <a:pPr algn="ctr" indent="0" marL="0">
+            <a:pPr marL="0" indent="0" algn="ctr">
               <a:buNone/>
             </a:pPr>
             <a:r>
@@ -9256,6 +9627,13 @@
             <a:tailEnd type="none"/>
           </a:ln>
         </p:spPr>
+        <p:txBody>
+          <a:bodyPr/>
+          <a:lstStyle/>
+          <a:p>
+            <a:endParaRPr lang="en-US"/>
+          </a:p>
+        </p:txBody>
       </p:sp>
       <p:sp>
         <p:nvSpPr>
@@ -9285,6 +9663,13 @@
             <a:prstDash val="solid"/>
           </a:ln>
         </p:spPr>
+        <p:txBody>
+          <a:bodyPr/>
+          <a:lstStyle/>
+          <a:p>
+            <a:endParaRPr lang="en-US"/>
+          </a:p>
+        </p:txBody>
       </p:sp>
       <p:sp>
         <p:nvSpPr>
@@ -9309,7 +9694,7 @@
           </a:bodyPr>
           <a:lstStyle/>
           <a:p>
-            <a:pPr algn="ctr" indent="0" marL="0">
+            <a:pPr marL="0" indent="0" algn="ctr">
               <a:buNone/>
             </a:pPr>
             <a:r>
@@ -9351,6 +9736,13 @@
             <a:tailEnd type="none"/>
           </a:ln>
         </p:spPr>
+        <p:txBody>
+          <a:bodyPr/>
+          <a:lstStyle/>
+          <a:p>
+            <a:endParaRPr lang="en-US"/>
+          </a:p>
+        </p:txBody>
       </p:sp>
       <p:sp>
         <p:nvSpPr>
@@ -9380,6 +9772,13 @@
             <a:prstDash val="solid"/>
           </a:ln>
         </p:spPr>
+        <p:txBody>
+          <a:bodyPr/>
+          <a:lstStyle/>
+          <a:p>
+            <a:endParaRPr lang="en-US"/>
+          </a:p>
+        </p:txBody>
       </p:sp>
       <p:sp>
         <p:nvSpPr>
@@ -9404,7 +9803,7 @@
           </a:bodyPr>
           <a:lstStyle/>
           <a:p>
-            <a:pPr algn="ctr" indent="0" marL="0">
+            <a:pPr marL="0" indent="0" algn="ctr">
               <a:buNone/>
             </a:pPr>
             <a:r>
@@ -9446,6 +9845,13 @@
             <a:tailEnd type="none"/>
           </a:ln>
         </p:spPr>
+        <p:txBody>
+          <a:bodyPr/>
+          <a:lstStyle/>
+          <a:p>
+            <a:endParaRPr lang="en-US"/>
+          </a:p>
+        </p:txBody>
       </p:sp>
       <p:sp>
         <p:nvSpPr>
@@ -9475,6 +9881,13 @@
             <a:prstDash val="solid"/>
           </a:ln>
         </p:spPr>
+        <p:txBody>
+          <a:bodyPr/>
+          <a:lstStyle/>
+          <a:p>
+            <a:endParaRPr lang="en-US"/>
+          </a:p>
+        </p:txBody>
       </p:sp>
       <p:sp>
         <p:nvSpPr>
@@ -9499,7 +9912,7 @@
           </a:bodyPr>
           <a:lstStyle/>
           <a:p>
-            <a:pPr algn="ctr" indent="0" marL="0">
+            <a:pPr marL="0" indent="0" algn="ctr">
               <a:buNone/>
             </a:pPr>
             <a:r>
@@ -9541,6 +9954,13 @@
             <a:tailEnd type="none"/>
           </a:ln>
         </p:spPr>
+        <p:txBody>
+          <a:bodyPr/>
+          <a:lstStyle/>
+          <a:p>
+            <a:endParaRPr lang="en-US"/>
+          </a:p>
+        </p:txBody>
       </p:sp>
       <p:sp>
         <p:nvSpPr>
@@ -9570,6 +9990,13 @@
             <a:prstDash val="solid"/>
           </a:ln>
         </p:spPr>
+        <p:txBody>
+          <a:bodyPr/>
+          <a:lstStyle/>
+          <a:p>
+            <a:endParaRPr lang="en-US"/>
+          </a:p>
+        </p:txBody>
       </p:sp>
       <p:sp>
         <p:nvSpPr>
@@ -9594,7 +10021,7 @@
           </a:bodyPr>
           <a:lstStyle/>
           <a:p>
-            <a:pPr algn="ctr" indent="0" marL="0">
+            <a:pPr marL="0" indent="0" algn="ctr">
               <a:buNone/>
             </a:pPr>
             <a:r>
@@ -9636,6 +10063,13 @@
             <a:tailEnd type="none"/>
           </a:ln>
         </p:spPr>
+        <p:txBody>
+          <a:bodyPr/>
+          <a:lstStyle/>
+          <a:p>
+            <a:endParaRPr lang="en-US"/>
+          </a:p>
+        </p:txBody>
       </p:sp>
       <p:sp>
         <p:nvSpPr>
@@ -9665,6 +10099,13 @@
             <a:prstDash val="solid"/>
           </a:ln>
         </p:spPr>
+        <p:txBody>
+          <a:bodyPr/>
+          <a:lstStyle/>
+          <a:p>
+            <a:endParaRPr lang="en-US"/>
+          </a:p>
+        </p:txBody>
       </p:sp>
       <p:sp>
         <p:nvSpPr>
@@ -9689,7 +10130,7 @@
           </a:bodyPr>
           <a:lstStyle/>
           <a:p>
-            <a:pPr algn="ctr" indent="0" marL="0">
+            <a:pPr marL="0" indent="0" algn="ctr">
               <a:buNone/>
             </a:pPr>
             <a:r>
@@ -9731,6 +10172,13 @@
             <a:tailEnd type="none"/>
           </a:ln>
         </p:spPr>
+        <p:txBody>
+          <a:bodyPr/>
+          <a:lstStyle/>
+          <a:p>
+            <a:endParaRPr lang="en-US"/>
+          </a:p>
+        </p:txBody>
       </p:sp>
       <p:sp>
         <p:nvSpPr>
@@ -9760,6 +10208,13 @@
             <a:prstDash val="solid"/>
           </a:ln>
         </p:spPr>
+        <p:txBody>
+          <a:bodyPr/>
+          <a:lstStyle/>
+          <a:p>
+            <a:endParaRPr lang="en-US"/>
+          </a:p>
+        </p:txBody>
       </p:sp>
       <p:sp>
         <p:nvSpPr>
@@ -9784,7 +10239,7 @@
           </a:bodyPr>
           <a:lstStyle/>
           <a:p>
-            <a:pPr algn="ctr" indent="0" marL="0">
+            <a:pPr marL="0" indent="0" algn="ctr">
               <a:buNone/>
             </a:pPr>
             <a:r>
@@ -9830,6 +10285,13 @@
             <a:prstDash val="solid"/>
           </a:ln>
         </p:spPr>
+        <p:txBody>
+          <a:bodyPr/>
+          <a:lstStyle/>
+          <a:p>
+            <a:endParaRPr lang="en-US"/>
+          </a:p>
+        </p:txBody>
       </p:sp>
       <p:sp>
         <p:nvSpPr>
@@ -9854,7 +10316,7 @@
           </a:bodyPr>
           <a:lstStyle/>
           <a:p>
-            <a:pPr algn="l" indent="0" marL="0">
+            <a:pPr marL="0" indent="0" algn="l">
               <a:buNone/>
             </a:pPr>
             <a:r>
@@ -9895,7 +10357,7 @@
           </a:bodyPr>
           <a:lstStyle/>
           <a:p>
-            <a:pPr algn="l" indent="0" marL="0">
+            <a:pPr marL="0" indent="0" algn="l">
               <a:buNone/>
             </a:pPr>
             <a:r>
@@ -9915,7 +10377,7 @@
       </p:sp>
       <p:sp>
         <p:nvSpPr>
-          <p:cNvPr id="25" name="Slide Number Placeholder 0"/>
+          <p:cNvPr id="46" name="Slide Number Placeholder 0"/>
           <p:cNvSpPr>
             <a:spLocks noGrp="1"/>
           </p:cNvSpPr>
@@ -9933,7 +10395,7 @@
           </a:prstGeom>
           <a:extLst>
             <a:ext uri="{C572A759-6A51-4108-AA02-DFA0A04FC94B}">
-              <ma14:wrappingTextBoxFlag xmlns:ma14="http://schemas.microsoft.com/office/mac/drawingml/2011/main" val="0"/>
+              <ma14:wrappingTextBoxFlag xmlns:ma14="http://schemas.microsoft.com/office/mac/drawingml/2011/main" xmlns="" val="0"/>
             </a:ext>
           </a:extLst>
         </p:spPr>
@@ -9954,7 +10416,7 @@
           <a:p>
             <a:pPr algn="l"/>
             <a:fld id="{F7021451-1387-4CA6-816F-3879F97B5CBC}" type="slidenum">
-              <a:rPr b="0" lang="en-US"/>
+              <a:rPr lang="en-US" b="0"/>
               <a:t>2</a:t>
             </a:fld>
             <a:endParaRPr lang="en-US"/>
@@ -10009,11 +10471,11 @@
           </a:bodyPr>
           <a:lstStyle/>
           <a:p>
-            <a:pPr algn="l" indent="0" marL="0">
-              <a:buNone/>
-            </a:pPr>
-            <a:r>
-              <a:rPr lang="en-US" sz="900" b="1" spc="150" kern="0" dirty="0">
+            <a:pPr marL="0" indent="0" algn="l">
+              <a:buNone/>
+            </a:pPr>
+            <a:r>
+              <a:rPr lang="en-US" sz="900" b="1" kern="0" spc="150" dirty="0">
                 <a:solidFill>
                   <a:srgbClr val="38BDF8"/>
                 </a:solidFill>
@@ -10050,7 +10512,7 @@
           </a:bodyPr>
           <a:lstStyle/>
           <a:p>
-            <a:pPr algn="l" indent="0" marL="0">
+            <a:pPr marL="0" indent="0" algn="l">
               <a:buNone/>
             </a:pPr>
             <a:r>
@@ -10091,7 +10553,7 @@
           </a:bodyPr>
           <a:lstStyle/>
           <a:p>
-            <a:pPr algn="l" indent="0" marL="0">
+            <a:pPr marL="0" indent="0" algn="l">
               <a:buNone/>
             </a:pPr>
             <a:r>
@@ -10137,6 +10599,13 @@
             <a:prstDash val="solid"/>
           </a:ln>
         </p:spPr>
+        <p:txBody>
+          <a:bodyPr/>
+          <a:lstStyle/>
+          <a:p>
+            <a:endParaRPr lang="en-US"/>
+          </a:p>
+        </p:txBody>
       </p:sp>
       <p:sp>
         <p:nvSpPr>
@@ -10161,11 +10630,11 @@
           </a:bodyPr>
           <a:lstStyle/>
           <a:p>
-            <a:pPr algn="l" indent="0" marL="0">
-              <a:buNone/>
-            </a:pPr>
-            <a:r>
-              <a:rPr lang="en-US" sz="1000" b="1" spc="100" kern="0" dirty="0">
+            <a:pPr marL="0" indent="0" algn="l">
+              <a:buNone/>
+            </a:pPr>
+            <a:r>
+              <a:rPr lang="en-US" sz="1000" b="1" kern="0" spc="100" dirty="0">
                 <a:solidFill>
                   <a:srgbClr val="38BDF8"/>
                 </a:solidFill>
@@ -10202,7 +10671,7 @@
           </a:bodyPr>
           <a:lstStyle/>
           <a:p>
-            <a:pPr algn="l" indent="0" marL="0">
+            <a:pPr marL="0" indent="0" algn="l">
               <a:buNone/>
             </a:pPr>
             <a:r>
@@ -10244,6 +10713,13 @@
             <a:prstDash val="solid"/>
           </a:ln>
         </p:spPr>
+        <p:txBody>
+          <a:bodyPr/>
+          <a:lstStyle/>
+          <a:p>
+            <a:endParaRPr lang="en-US"/>
+          </a:p>
+        </p:txBody>
       </p:sp>
       <p:sp>
         <p:nvSpPr>
@@ -10268,7 +10744,7 @@
           </a:bodyPr>
           <a:lstStyle/>
           <a:p>
-            <a:pPr algn="l" indent="0" marL="0">
+            <a:pPr marL="0" indent="0" algn="l">
               <a:buNone/>
             </a:pPr>
             <a:r>
@@ -10310,6 +10786,13 @@
             <a:prstDash val="solid"/>
           </a:ln>
         </p:spPr>
+        <p:txBody>
+          <a:bodyPr/>
+          <a:lstStyle/>
+          <a:p>
+            <a:endParaRPr lang="en-US"/>
+          </a:p>
+        </p:txBody>
       </p:sp>
       <p:sp>
         <p:nvSpPr>
@@ -10334,7 +10817,7 @@
           </a:bodyPr>
           <a:lstStyle/>
           <a:p>
-            <a:pPr algn="l" indent="0" marL="0">
+            <a:pPr marL="0" indent="0" algn="l">
               <a:buNone/>
             </a:pPr>
             <a:r>
@@ -10376,6 +10859,13 @@
             <a:prstDash val="solid"/>
           </a:ln>
         </p:spPr>
+        <p:txBody>
+          <a:bodyPr/>
+          <a:lstStyle/>
+          <a:p>
+            <a:endParaRPr lang="en-US"/>
+          </a:p>
+        </p:txBody>
       </p:sp>
       <p:sp>
         <p:nvSpPr>
@@ -10400,7 +10890,7 @@
           </a:bodyPr>
           <a:lstStyle/>
           <a:p>
-            <a:pPr algn="l" indent="0" marL="0">
+            <a:pPr marL="0" indent="0" algn="l">
               <a:buNone/>
             </a:pPr>
             <a:r>
@@ -10442,6 +10932,13 @@
             <a:prstDash val="solid"/>
           </a:ln>
         </p:spPr>
+        <p:txBody>
+          <a:bodyPr/>
+          <a:lstStyle/>
+          <a:p>
+            <a:endParaRPr lang="en-US"/>
+          </a:p>
+        </p:txBody>
       </p:sp>
       <p:sp>
         <p:nvSpPr>
@@ -10466,7 +10963,7 @@
           </a:bodyPr>
           <a:lstStyle/>
           <a:p>
-            <a:pPr algn="l" indent="0" marL="0">
+            <a:pPr marL="0" indent="0" algn="l">
               <a:buNone/>
             </a:pPr>
             <a:r>
@@ -10512,6 +11009,13 @@
             <a:prstDash val="solid"/>
           </a:ln>
         </p:spPr>
+        <p:txBody>
+          <a:bodyPr/>
+          <a:lstStyle/>
+          <a:p>
+            <a:endParaRPr lang="en-US"/>
+          </a:p>
+        </p:txBody>
       </p:sp>
       <p:sp>
         <p:nvSpPr>
@@ -10536,11 +11040,11 @@
           </a:bodyPr>
           <a:lstStyle/>
           <a:p>
-            <a:pPr algn="l" indent="0" marL="0">
-              <a:buNone/>
-            </a:pPr>
-            <a:r>
-              <a:rPr lang="en-US" sz="1000" b="1" spc="100" kern="0" dirty="0">
+            <a:pPr marL="0" indent="0" algn="l">
+              <a:buNone/>
+            </a:pPr>
+            <a:r>
+              <a:rPr lang="en-US" sz="1000" b="1" kern="0" spc="100" dirty="0">
                 <a:solidFill>
                   <a:srgbClr val="38BDF8"/>
                 </a:solidFill>
@@ -10582,6 +11086,13 @@
             <a:prstDash val="solid"/>
           </a:ln>
         </p:spPr>
+        <p:txBody>
+          <a:bodyPr/>
+          <a:lstStyle/>
+          <a:p>
+            <a:endParaRPr lang="en-US"/>
+          </a:p>
+        </p:txBody>
       </p:sp>
       <p:sp>
         <p:nvSpPr>
@@ -10606,7 +11117,7 @@
           </a:bodyPr>
           <a:lstStyle/>
           <a:p>
-            <a:pPr algn="ctr" indent="0" marL="0">
+            <a:pPr marL="0" indent="0" algn="ctr">
               <a:buNone/>
             </a:pPr>
             <a:r>
@@ -10652,6 +11163,13 @@
             <a:prstDash val="solid"/>
           </a:ln>
         </p:spPr>
+        <p:txBody>
+          <a:bodyPr/>
+          <a:lstStyle/>
+          <a:p>
+            <a:endParaRPr lang="en-US"/>
+          </a:p>
+        </p:txBody>
       </p:sp>
       <p:sp>
         <p:nvSpPr>
@@ -10676,7 +11194,7 @@
           </a:bodyPr>
           <a:lstStyle/>
           <a:p>
-            <a:pPr algn="ctr" indent="0" marL="0">
+            <a:pPr marL="0" indent="0" algn="ctr">
               <a:buNone/>
             </a:pPr>
             <a:r>
@@ -10722,6 +11240,13 @@
             <a:prstDash val="solid"/>
           </a:ln>
         </p:spPr>
+        <p:txBody>
+          <a:bodyPr/>
+          <a:lstStyle/>
+          <a:p>
+            <a:endParaRPr lang="en-US"/>
+          </a:p>
+        </p:txBody>
       </p:sp>
       <p:sp>
         <p:nvSpPr>
@@ -10746,7 +11271,7 @@
           </a:bodyPr>
           <a:lstStyle/>
           <a:p>
-            <a:pPr algn="ctr" indent="0" marL="0">
+            <a:pPr marL="0" indent="0" algn="ctr">
               <a:buNone/>
             </a:pPr>
             <a:r>
@@ -10792,6 +11317,13 @@
             <a:prstDash val="solid"/>
           </a:ln>
         </p:spPr>
+        <p:txBody>
+          <a:bodyPr/>
+          <a:lstStyle/>
+          <a:p>
+            <a:endParaRPr lang="en-US"/>
+          </a:p>
+        </p:txBody>
       </p:sp>
       <p:sp>
         <p:nvSpPr>
@@ -10816,7 +11348,7 @@
           </a:bodyPr>
           <a:lstStyle/>
           <a:p>
-            <a:pPr algn="ctr" indent="0" marL="0">
+            <a:pPr marL="0" indent="0" algn="ctr">
               <a:buNone/>
             </a:pPr>
             <a:r>
@@ -10862,6 +11394,13 @@
             <a:prstDash val="solid"/>
           </a:ln>
         </p:spPr>
+        <p:txBody>
+          <a:bodyPr/>
+          <a:lstStyle/>
+          <a:p>
+            <a:endParaRPr lang="en-US"/>
+          </a:p>
+        </p:txBody>
       </p:sp>
       <p:sp>
         <p:nvSpPr>
@@ -10886,7 +11425,7 @@
           </a:bodyPr>
           <a:lstStyle/>
           <a:p>
-            <a:pPr algn="ctr" indent="0" marL="0">
+            <a:pPr marL="0" indent="0" algn="ctr">
               <a:buNone/>
             </a:pPr>
             <a:r>
@@ -10932,6 +11471,13 @@
             <a:prstDash val="solid"/>
           </a:ln>
         </p:spPr>
+        <p:txBody>
+          <a:bodyPr/>
+          <a:lstStyle/>
+          <a:p>
+            <a:endParaRPr lang="en-US"/>
+          </a:p>
+        </p:txBody>
       </p:sp>
       <p:sp>
         <p:nvSpPr>
@@ -10956,7 +11502,7 @@
           </a:bodyPr>
           <a:lstStyle/>
           <a:p>
-            <a:pPr algn="ctr" indent="0" marL="0">
+            <a:pPr marL="0" indent="0" algn="ctr">
               <a:buNone/>
             </a:pPr>
             <a:r>
@@ -11002,6 +11548,13 @@
             <a:prstDash val="solid"/>
           </a:ln>
         </p:spPr>
+        <p:txBody>
+          <a:bodyPr/>
+          <a:lstStyle/>
+          <a:p>
+            <a:endParaRPr lang="en-US"/>
+          </a:p>
+        </p:txBody>
       </p:sp>
       <p:sp>
         <p:nvSpPr>
@@ -11026,7 +11579,7 @@
           </a:bodyPr>
           <a:lstStyle/>
           <a:p>
-            <a:pPr algn="ctr" indent="0" marL="0">
+            <a:pPr marL="0" indent="0" algn="ctr">
               <a:buNone/>
             </a:pPr>
             <a:r>
@@ -11072,6 +11625,13 @@
             <a:prstDash val="solid"/>
           </a:ln>
         </p:spPr>
+        <p:txBody>
+          <a:bodyPr/>
+          <a:lstStyle/>
+          <a:p>
+            <a:endParaRPr lang="en-US"/>
+          </a:p>
+        </p:txBody>
       </p:sp>
       <p:sp>
         <p:nvSpPr>
@@ -11096,7 +11656,7 @@
           </a:bodyPr>
           <a:lstStyle/>
           <a:p>
-            <a:pPr algn="ctr" indent="0" marL="0">
+            <a:pPr marL="0" indent="0" algn="ctr">
               <a:buNone/>
             </a:pPr>
             <a:r>
@@ -11137,7 +11697,7 @@
           </a:bodyPr>
           <a:lstStyle/>
           <a:p>
-            <a:pPr algn="l" indent="0" marL="0">
+            <a:pPr marL="0" indent="0" algn="l">
               <a:buNone/>
             </a:pPr>
             <a:r>
@@ -11179,6 +11739,13 @@
             <a:tailEnd type="none"/>
           </a:ln>
         </p:spPr>
+        <p:txBody>
+          <a:bodyPr/>
+          <a:lstStyle/>
+          <a:p>
+            <a:endParaRPr lang="en-US"/>
+          </a:p>
+        </p:txBody>
       </p:sp>
       <p:sp>
         <p:nvSpPr>
@@ -11203,7 +11770,7 @@
           </a:bodyPr>
           <a:lstStyle/>
           <a:p>
-            <a:pPr algn="l" indent="0" marL="0">
+            <a:pPr marL="0" indent="0" algn="l">
               <a:buNone/>
             </a:pPr>
             <a:r>
@@ -11223,7 +11790,7 @@
       </p:sp>
       <p:sp>
         <p:nvSpPr>
-          <p:cNvPr id="25" name="Slide Number Placeholder 0"/>
+          <p:cNvPr id="37" name="Slide Number Placeholder 0"/>
           <p:cNvSpPr>
             <a:spLocks noGrp="1"/>
           </p:cNvSpPr>
@@ -11241,7 +11808,7 @@
           </a:prstGeom>
           <a:extLst>
             <a:ext uri="{C572A759-6A51-4108-AA02-DFA0A04FC94B}">
-              <ma14:wrappingTextBoxFlag xmlns:ma14="http://schemas.microsoft.com/office/mac/drawingml/2011/main" val="0"/>
+              <ma14:wrappingTextBoxFlag xmlns:ma14="http://schemas.microsoft.com/office/mac/drawingml/2011/main" xmlns="" val="0"/>
             </a:ext>
           </a:extLst>
         </p:spPr>
@@ -11262,7 +11829,7 @@
           <a:p>
             <a:pPr algn="l"/>
             <a:fld id="{F7021451-1387-4CA6-816F-3879F97B5CBC}" type="slidenum">
-              <a:rPr b="0" lang="en-US"/>
+              <a:rPr lang="en-US" b="0"/>
               <a:t>3</a:t>
             </a:fld>
             <a:endParaRPr lang="en-US"/>
@@ -11317,11 +11884,11 @@
           </a:bodyPr>
           <a:lstStyle/>
           <a:p>
-            <a:pPr algn="l" indent="0" marL="0">
-              <a:buNone/>
-            </a:pPr>
-            <a:r>
-              <a:rPr lang="en-US" sz="900" b="1" spc="150" kern="0" dirty="0">
+            <a:pPr marL="0" indent="0" algn="l">
+              <a:buNone/>
+            </a:pPr>
+            <a:r>
+              <a:rPr lang="en-US" sz="900" b="1" kern="0" spc="150" dirty="0">
                 <a:solidFill>
                   <a:srgbClr val="38BDF8"/>
                 </a:solidFill>
@@ -11358,7 +11925,7 @@
           </a:bodyPr>
           <a:lstStyle/>
           <a:p>
-            <a:pPr algn="l" indent="0" marL="0">
+            <a:pPr marL="0" indent="0" algn="l">
               <a:buNone/>
             </a:pPr>
             <a:r>
@@ -11399,7 +11966,7 @@
           </a:bodyPr>
           <a:lstStyle/>
           <a:p>
-            <a:pPr algn="l" indent="0" marL="0">
+            <a:pPr marL="0" indent="0" algn="l">
               <a:buNone/>
             </a:pPr>
             <a:r>
@@ -11445,6 +12012,13 @@
             <a:prstDash val="solid"/>
           </a:ln>
         </p:spPr>
+        <p:txBody>
+          <a:bodyPr/>
+          <a:lstStyle/>
+          <a:p>
+            <a:endParaRPr lang="en-US"/>
+          </a:p>
+        </p:txBody>
       </p:sp>
       <p:sp>
         <p:nvSpPr>
@@ -11469,7 +12043,7 @@
           </a:bodyPr>
           <a:lstStyle/>
           <a:p>
-            <a:pPr algn="ctr" indent="0" marL="0">
+            <a:pPr marL="0" indent="0" algn="ctr">
               <a:buNone/>
             </a:pPr>
             <a:r>
@@ -11511,6 +12085,13 @@
             <a:tailEnd type="none"/>
           </a:ln>
         </p:spPr>
+        <p:txBody>
+          <a:bodyPr/>
+          <a:lstStyle/>
+          <a:p>
+            <a:endParaRPr lang="en-US"/>
+          </a:p>
+        </p:txBody>
       </p:sp>
       <p:sp>
         <p:nvSpPr>
@@ -11540,6 +12121,13 @@
             <a:prstDash val="solid"/>
           </a:ln>
         </p:spPr>
+        <p:txBody>
+          <a:bodyPr/>
+          <a:lstStyle/>
+          <a:p>
+            <a:endParaRPr lang="en-US"/>
+          </a:p>
+        </p:txBody>
       </p:sp>
       <p:sp>
         <p:nvSpPr>
@@ -11564,7 +12152,7 @@
           </a:bodyPr>
           <a:lstStyle/>
           <a:p>
-            <a:pPr algn="ctr" indent="0" marL="0">
+            <a:pPr marL="0" indent="0" algn="ctr">
               <a:buNone/>
             </a:pPr>
             <a:r>
@@ -11606,6 +12194,13 @@
             <a:tailEnd type="none"/>
           </a:ln>
         </p:spPr>
+        <p:txBody>
+          <a:bodyPr/>
+          <a:lstStyle/>
+          <a:p>
+            <a:endParaRPr lang="en-US"/>
+          </a:p>
+        </p:txBody>
       </p:sp>
       <p:sp>
         <p:nvSpPr>
@@ -11635,6 +12230,13 @@
             <a:prstDash val="solid"/>
           </a:ln>
         </p:spPr>
+        <p:txBody>
+          <a:bodyPr/>
+          <a:lstStyle/>
+          <a:p>
+            <a:endParaRPr lang="en-US"/>
+          </a:p>
+        </p:txBody>
       </p:sp>
       <p:sp>
         <p:nvSpPr>
@@ -11659,7 +12261,7 @@
           </a:bodyPr>
           <a:lstStyle/>
           <a:p>
-            <a:pPr algn="ctr" indent="0" marL="0">
+            <a:pPr marL="0" indent="0" algn="ctr">
               <a:buNone/>
             </a:pPr>
             <a:r>
@@ -11701,6 +12303,13 @@
             <a:tailEnd type="none"/>
           </a:ln>
         </p:spPr>
+        <p:txBody>
+          <a:bodyPr/>
+          <a:lstStyle/>
+          <a:p>
+            <a:endParaRPr lang="en-US"/>
+          </a:p>
+        </p:txBody>
       </p:sp>
       <p:sp>
         <p:nvSpPr>
@@ -11730,6 +12339,13 @@
             <a:prstDash val="solid"/>
           </a:ln>
         </p:spPr>
+        <p:txBody>
+          <a:bodyPr/>
+          <a:lstStyle/>
+          <a:p>
+            <a:endParaRPr lang="en-US"/>
+          </a:p>
+        </p:txBody>
       </p:sp>
       <p:sp>
         <p:nvSpPr>
@@ -11754,7 +12370,7 @@
           </a:bodyPr>
           <a:lstStyle/>
           <a:p>
-            <a:pPr algn="ctr" indent="0" marL="0">
+            <a:pPr marL="0" indent="0" algn="ctr">
               <a:buNone/>
             </a:pPr>
             <a:r>
@@ -11796,6 +12412,13 @@
             <a:tailEnd type="none"/>
           </a:ln>
         </p:spPr>
+        <p:txBody>
+          <a:bodyPr/>
+          <a:lstStyle/>
+          <a:p>
+            <a:endParaRPr lang="en-US"/>
+          </a:p>
+        </p:txBody>
       </p:sp>
       <p:sp>
         <p:nvSpPr>
@@ -11825,6 +12448,13 @@
             <a:prstDash val="solid"/>
           </a:ln>
         </p:spPr>
+        <p:txBody>
+          <a:bodyPr/>
+          <a:lstStyle/>
+          <a:p>
+            <a:endParaRPr lang="en-US"/>
+          </a:p>
+        </p:txBody>
       </p:sp>
       <p:sp>
         <p:nvSpPr>
@@ -11849,7 +12479,7 @@
           </a:bodyPr>
           <a:lstStyle/>
           <a:p>
-            <a:pPr algn="ctr" indent="0" marL="0">
+            <a:pPr marL="0" indent="0" algn="ctr">
               <a:buNone/>
             </a:pPr>
             <a:r>
@@ -11891,6 +12521,13 @@
             <a:tailEnd type="none"/>
           </a:ln>
         </p:spPr>
+        <p:txBody>
+          <a:bodyPr/>
+          <a:lstStyle/>
+          <a:p>
+            <a:endParaRPr lang="en-US"/>
+          </a:p>
+        </p:txBody>
       </p:sp>
       <p:sp>
         <p:nvSpPr>
@@ -11920,6 +12557,13 @@
             <a:prstDash val="solid"/>
           </a:ln>
         </p:spPr>
+        <p:txBody>
+          <a:bodyPr/>
+          <a:lstStyle/>
+          <a:p>
+            <a:endParaRPr lang="en-US"/>
+          </a:p>
+        </p:txBody>
       </p:sp>
       <p:sp>
         <p:nvSpPr>
@@ -11944,7 +12588,7 @@
           </a:bodyPr>
           <a:lstStyle/>
           <a:p>
-            <a:pPr algn="ctr" indent="0" marL="0">
+            <a:pPr marL="0" indent="0" algn="ctr">
               <a:buNone/>
             </a:pPr>
             <a:r>
@@ -11990,6 +12634,13 @@
             <a:prstDash val="solid"/>
           </a:ln>
         </p:spPr>
+        <p:txBody>
+          <a:bodyPr/>
+          <a:lstStyle/>
+          <a:p>
+            <a:endParaRPr lang="en-US"/>
+          </a:p>
+        </p:txBody>
       </p:sp>
       <p:sp>
         <p:nvSpPr>
@@ -12014,7 +12665,7 @@
           </a:bodyPr>
           <a:lstStyle/>
           <a:p>
-            <a:pPr algn="l" indent="0" marL="0">
+            <a:pPr marL="0" indent="0" algn="l">
               <a:buNone/>
             </a:pPr>
             <a:r>
@@ -12055,11 +12706,11 @@
           </a:bodyPr>
           <a:lstStyle/>
           <a:p>
-            <a:pPr algn="l" indent="0" marL="0">
-              <a:buNone/>
-            </a:pPr>
-            <a:r>
-              <a:rPr lang="en-US" sz="800" b="1" spc="100" kern="0" dirty="0">
+            <a:pPr marL="0" indent="0" algn="l">
+              <a:buNone/>
+            </a:pPr>
+            <a:r>
+              <a:rPr lang="en-US" sz="800" b="1" kern="0" spc="100" dirty="0">
                 <a:solidFill>
                   <a:srgbClr val="9DB3C8"/>
                 </a:solidFill>
@@ -12101,6 +12752,13 @@
             <a:prstDash val="solid"/>
           </a:ln>
         </p:spPr>
+        <p:txBody>
+          <a:bodyPr/>
+          <a:lstStyle/>
+          <a:p>
+            <a:endParaRPr lang="en-US"/>
+          </a:p>
+        </p:txBody>
       </p:sp>
       <p:sp>
         <p:nvSpPr>
@@ -12125,7 +12783,7 @@
           </a:bodyPr>
           <a:lstStyle/>
           <a:p>
-            <a:pPr algn="l" indent="0" marL="0">
+            <a:pPr marL="0" indent="0" algn="l">
               <a:buNone/>
             </a:pPr>
             <a:r>
@@ -12166,11 +12824,11 @@
           </a:bodyPr>
           <a:lstStyle/>
           <a:p>
-            <a:pPr algn="l" indent="0" marL="0">
-              <a:buNone/>
-            </a:pPr>
-            <a:r>
-              <a:rPr lang="en-US" sz="800" b="1" spc="100" kern="0" dirty="0">
+            <a:pPr marL="0" indent="0" algn="l">
+              <a:buNone/>
+            </a:pPr>
+            <a:r>
+              <a:rPr lang="en-US" sz="800" b="1" kern="0" spc="100" dirty="0">
                 <a:solidFill>
                   <a:srgbClr val="9DB3C8"/>
                 </a:solidFill>
@@ -12212,6 +12870,13 @@
             <a:prstDash val="solid"/>
           </a:ln>
         </p:spPr>
+        <p:txBody>
+          <a:bodyPr/>
+          <a:lstStyle/>
+          <a:p>
+            <a:endParaRPr lang="en-US"/>
+          </a:p>
+        </p:txBody>
       </p:sp>
       <p:sp>
         <p:nvSpPr>
@@ -12236,7 +12901,7 @@
           </a:bodyPr>
           <a:lstStyle/>
           <a:p>
-            <a:pPr algn="l" indent="0" marL="0">
+            <a:pPr marL="0" indent="0" algn="l">
               <a:buNone/>
             </a:pPr>
             <a:r>
@@ -12277,11 +12942,11 @@
           </a:bodyPr>
           <a:lstStyle/>
           <a:p>
-            <a:pPr algn="l" indent="0" marL="0">
-              <a:buNone/>
-            </a:pPr>
-            <a:r>
-              <a:rPr lang="en-US" sz="800" b="1" spc="100" kern="0" dirty="0">
+            <a:pPr marL="0" indent="0" algn="l">
+              <a:buNone/>
+            </a:pPr>
+            <a:r>
+              <a:rPr lang="en-US" sz="800" b="1" kern="0" spc="100" dirty="0">
                 <a:solidFill>
                   <a:srgbClr val="9DB3C8"/>
                 </a:solidFill>
@@ -12323,6 +12988,13 @@
             <a:prstDash val="solid"/>
           </a:ln>
         </p:spPr>
+        <p:txBody>
+          <a:bodyPr/>
+          <a:lstStyle/>
+          <a:p>
+            <a:endParaRPr lang="en-US"/>
+          </a:p>
+        </p:txBody>
       </p:sp>
       <p:sp>
         <p:nvSpPr>
@@ -12347,7 +13019,7 @@
           </a:bodyPr>
           <a:lstStyle/>
           <a:p>
-            <a:pPr algn="l" indent="0" marL="0">
+            <a:pPr marL="0" indent="0" algn="l">
               <a:buNone/>
             </a:pPr>
             <a:r>
@@ -12388,11 +13060,11 @@
           </a:bodyPr>
           <a:lstStyle/>
           <a:p>
-            <a:pPr algn="l" indent="0" marL="0">
-              <a:buNone/>
-            </a:pPr>
-            <a:r>
-              <a:rPr lang="en-US" sz="800" b="1" spc="100" kern="0" dirty="0">
+            <a:pPr marL="0" indent="0" algn="l">
+              <a:buNone/>
+            </a:pPr>
+            <a:r>
+              <a:rPr lang="en-US" sz="800" b="1" kern="0" spc="100" dirty="0">
                 <a:solidFill>
                   <a:srgbClr val="9DB3C8"/>
                 </a:solidFill>
@@ -12434,6 +13106,13 @@
             <a:prstDash val="solid"/>
           </a:ln>
         </p:spPr>
+        <p:txBody>
+          <a:bodyPr/>
+          <a:lstStyle/>
+          <a:p>
+            <a:endParaRPr lang="en-US"/>
+          </a:p>
+        </p:txBody>
       </p:sp>
       <p:sp>
         <p:nvSpPr>
@@ -12458,7 +13137,7 @@
           </a:bodyPr>
           <a:lstStyle/>
           <a:p>
-            <a:pPr algn="l" indent="0" marL="0">
+            <a:pPr marL="0" indent="0" algn="l">
               <a:buNone/>
             </a:pPr>
             <a:r>
@@ -12499,11 +13178,11 @@
           </a:bodyPr>
           <a:lstStyle/>
           <a:p>
-            <a:pPr algn="l" indent="0" marL="0">
-              <a:buNone/>
-            </a:pPr>
-            <a:r>
-              <a:rPr lang="en-US" sz="800" b="1" spc="100" kern="0" dirty="0">
+            <a:pPr marL="0" indent="0" algn="l">
+              <a:buNone/>
+            </a:pPr>
+            <a:r>
+              <a:rPr lang="en-US" sz="800" b="1" kern="0" spc="100" dirty="0">
                 <a:solidFill>
                   <a:srgbClr val="9DB3C8"/>
                 </a:solidFill>
@@ -12541,6 +13220,13 @@
             <a:prstDash val="solid"/>
           </a:ln>
         </p:spPr>
+        <p:txBody>
+          <a:bodyPr/>
+          <a:lstStyle/>
+          <a:p>
+            <a:endParaRPr lang="en-US"/>
+          </a:p>
+        </p:txBody>
       </p:sp>
       <p:sp>
         <p:nvSpPr>
@@ -12565,7 +13251,7 @@
           </a:bodyPr>
           <a:lstStyle/>
           <a:p>
-            <a:pPr algn="l" indent="0" marL="0">
+            <a:pPr marL="0" indent="0" algn="l">
               <a:buNone/>
             </a:pPr>
             <a:r>
@@ -12607,6 +13293,13 @@
             <a:prstDash val="solid"/>
           </a:ln>
         </p:spPr>
+        <p:txBody>
+          <a:bodyPr/>
+          <a:lstStyle/>
+          <a:p>
+            <a:endParaRPr lang="en-US"/>
+          </a:p>
+        </p:txBody>
       </p:sp>
       <p:sp>
         <p:nvSpPr>
@@ -12631,7 +13324,7 @@
           </a:bodyPr>
           <a:lstStyle/>
           <a:p>
-            <a:pPr algn="ctr" indent="0" marL="0">
+            <a:pPr marL="0" indent="0" algn="ctr">
               <a:buNone/>
             </a:pPr>
             <a:r>
@@ -12673,6 +13366,13 @@
             <a:prstDash val="solid"/>
           </a:ln>
         </p:spPr>
+        <p:txBody>
+          <a:bodyPr/>
+          <a:lstStyle/>
+          <a:p>
+            <a:endParaRPr lang="en-US"/>
+          </a:p>
+        </p:txBody>
       </p:sp>
       <p:sp>
         <p:nvSpPr>
@@ -12697,7 +13397,7 @@
           </a:bodyPr>
           <a:lstStyle/>
           <a:p>
-            <a:pPr algn="ctr" indent="0" marL="0">
+            <a:pPr marL="0" indent="0" algn="ctr">
               <a:buNone/>
             </a:pPr>
             <a:r>
@@ -12739,6 +13439,13 @@
             <a:prstDash val="solid"/>
           </a:ln>
         </p:spPr>
+        <p:txBody>
+          <a:bodyPr/>
+          <a:lstStyle/>
+          <a:p>
+            <a:endParaRPr lang="en-US"/>
+          </a:p>
+        </p:txBody>
       </p:sp>
       <p:sp>
         <p:nvSpPr>
@@ -12763,7 +13470,7 @@
           </a:bodyPr>
           <a:lstStyle/>
           <a:p>
-            <a:pPr algn="l" indent="0" marL="0">
+            <a:pPr marL="0" indent="0" algn="l">
               <a:buNone/>
             </a:pPr>
             <a:r>
@@ -12805,6 +13512,13 @@
             <a:prstDash val="solid"/>
           </a:ln>
         </p:spPr>
+        <p:txBody>
+          <a:bodyPr/>
+          <a:lstStyle/>
+          <a:p>
+            <a:endParaRPr lang="en-US"/>
+          </a:p>
+        </p:txBody>
       </p:sp>
       <p:sp>
         <p:nvSpPr>
@@ -12829,7 +13543,7 @@
           </a:bodyPr>
           <a:lstStyle/>
           <a:p>
-            <a:pPr algn="ctr" indent="0" marL="0">
+            <a:pPr marL="0" indent="0" algn="ctr">
               <a:buNone/>
             </a:pPr>
             <a:r>
@@ -12871,6 +13585,13 @@
             <a:prstDash val="solid"/>
           </a:ln>
         </p:spPr>
+        <p:txBody>
+          <a:bodyPr/>
+          <a:lstStyle/>
+          <a:p>
+            <a:endParaRPr lang="en-US"/>
+          </a:p>
+        </p:txBody>
       </p:sp>
       <p:sp>
         <p:nvSpPr>
@@ -12895,7 +13616,7 @@
           </a:bodyPr>
           <a:lstStyle/>
           <a:p>
-            <a:pPr algn="ctr" indent="0" marL="0">
+            <a:pPr marL="0" indent="0" algn="ctr">
               <a:buNone/>
             </a:pPr>
             <a:r>
@@ -12937,6 +13658,13 @@
             <a:prstDash val="solid"/>
           </a:ln>
         </p:spPr>
+        <p:txBody>
+          <a:bodyPr/>
+          <a:lstStyle/>
+          <a:p>
+            <a:endParaRPr lang="en-US"/>
+          </a:p>
+        </p:txBody>
       </p:sp>
       <p:sp>
         <p:nvSpPr>
@@ -12961,7 +13689,7 @@
           </a:bodyPr>
           <a:lstStyle/>
           <a:p>
-            <a:pPr algn="l" indent="0" marL="0">
+            <a:pPr marL="0" indent="0" algn="l">
               <a:buNone/>
             </a:pPr>
             <a:r>
@@ -13003,6 +13731,13 @@
             <a:prstDash val="solid"/>
           </a:ln>
         </p:spPr>
+        <p:txBody>
+          <a:bodyPr/>
+          <a:lstStyle/>
+          <a:p>
+            <a:endParaRPr lang="en-US"/>
+          </a:p>
+        </p:txBody>
       </p:sp>
       <p:sp>
         <p:nvSpPr>
@@ -13027,7 +13762,7 @@
           </a:bodyPr>
           <a:lstStyle/>
           <a:p>
-            <a:pPr algn="ctr" indent="0" marL="0">
+            <a:pPr marL="0" indent="0" algn="ctr">
               <a:buNone/>
             </a:pPr>
             <a:r>
@@ -13069,6 +13804,13 @@
             <a:prstDash val="solid"/>
           </a:ln>
         </p:spPr>
+        <p:txBody>
+          <a:bodyPr/>
+          <a:lstStyle/>
+          <a:p>
+            <a:endParaRPr lang="en-US"/>
+          </a:p>
+        </p:txBody>
       </p:sp>
       <p:sp>
         <p:nvSpPr>
@@ -13093,7 +13835,7 @@
           </a:bodyPr>
           <a:lstStyle/>
           <a:p>
-            <a:pPr algn="ctr" indent="0" marL="0">
+            <a:pPr marL="0" indent="0" algn="ctr">
               <a:buNone/>
             </a:pPr>
             <a:r>
@@ -13135,6 +13877,13 @@
             <a:prstDash val="solid"/>
           </a:ln>
         </p:spPr>
+        <p:txBody>
+          <a:bodyPr/>
+          <a:lstStyle/>
+          <a:p>
+            <a:endParaRPr lang="en-US"/>
+          </a:p>
+        </p:txBody>
       </p:sp>
       <p:sp>
         <p:nvSpPr>
@@ -13159,7 +13908,7 @@
           </a:bodyPr>
           <a:lstStyle/>
           <a:p>
-            <a:pPr algn="l" indent="0" marL="0">
+            <a:pPr marL="0" indent="0" algn="l">
               <a:buNone/>
             </a:pPr>
             <a:r>
@@ -13201,6 +13950,13 @@
             <a:prstDash val="solid"/>
           </a:ln>
         </p:spPr>
+        <p:txBody>
+          <a:bodyPr/>
+          <a:lstStyle/>
+          <a:p>
+            <a:endParaRPr lang="en-US"/>
+          </a:p>
+        </p:txBody>
       </p:sp>
       <p:sp>
         <p:nvSpPr>
@@ -13225,7 +13981,7 @@
           </a:bodyPr>
           <a:lstStyle/>
           <a:p>
-            <a:pPr algn="ctr" indent="0" marL="0">
+            <a:pPr marL="0" indent="0" algn="ctr">
               <a:buNone/>
             </a:pPr>
             <a:r>
@@ -13267,6 +14023,13 @@
             <a:prstDash val="solid"/>
           </a:ln>
         </p:spPr>
+        <p:txBody>
+          <a:bodyPr/>
+          <a:lstStyle/>
+          <a:p>
+            <a:endParaRPr lang="en-US"/>
+          </a:p>
+        </p:txBody>
       </p:sp>
       <p:sp>
         <p:nvSpPr>
@@ -13291,7 +14054,7 @@
           </a:bodyPr>
           <a:lstStyle/>
           <a:p>
-            <a:pPr algn="ctr" indent="0" marL="0">
+            <a:pPr marL="0" indent="0" algn="ctr">
               <a:buNone/>
             </a:pPr>
             <a:r>
@@ -13333,6 +14096,13 @@
             <a:prstDash val="solid"/>
           </a:ln>
         </p:spPr>
+        <p:txBody>
+          <a:bodyPr/>
+          <a:lstStyle/>
+          <a:p>
+            <a:endParaRPr lang="en-US"/>
+          </a:p>
+        </p:txBody>
       </p:sp>
       <p:sp>
         <p:nvSpPr>
@@ -13357,7 +14127,7 @@
           </a:bodyPr>
           <a:lstStyle/>
           <a:p>
-            <a:pPr algn="l" indent="0" marL="0">
+            <a:pPr marL="0" indent="0" algn="l">
               <a:buNone/>
             </a:pPr>
             <a:r>
@@ -13399,6 +14169,13 @@
             <a:prstDash val="solid"/>
           </a:ln>
         </p:spPr>
+        <p:txBody>
+          <a:bodyPr/>
+          <a:lstStyle/>
+          <a:p>
+            <a:endParaRPr lang="en-US"/>
+          </a:p>
+        </p:txBody>
       </p:sp>
       <p:sp>
         <p:nvSpPr>
@@ -13423,7 +14200,7 @@
           </a:bodyPr>
           <a:lstStyle/>
           <a:p>
-            <a:pPr algn="ctr" indent="0" marL="0">
+            <a:pPr marL="0" indent="0" algn="ctr">
               <a:buNone/>
             </a:pPr>
             <a:r>
@@ -13465,6 +14242,13 @@
             <a:prstDash val="solid"/>
           </a:ln>
         </p:spPr>
+        <p:txBody>
+          <a:bodyPr/>
+          <a:lstStyle/>
+          <a:p>
+            <a:endParaRPr lang="en-US"/>
+          </a:p>
+        </p:txBody>
       </p:sp>
       <p:sp>
         <p:nvSpPr>
@@ -13489,7 +14273,7 @@
           </a:bodyPr>
           <a:lstStyle/>
           <a:p>
-            <a:pPr algn="ctr" indent="0" marL="0">
+            <a:pPr marL="0" indent="0" algn="ctr">
               <a:buNone/>
             </a:pPr>
             <a:r>
@@ -13531,6 +14315,13 @@
             <a:prstDash val="solid"/>
           </a:ln>
         </p:spPr>
+        <p:txBody>
+          <a:bodyPr/>
+          <a:lstStyle/>
+          <a:p>
+            <a:endParaRPr lang="en-US"/>
+          </a:p>
+        </p:txBody>
       </p:sp>
       <p:sp>
         <p:nvSpPr>
@@ -13555,7 +14346,7 @@
           </a:bodyPr>
           <a:lstStyle/>
           <a:p>
-            <a:pPr algn="l" indent="0" marL="0">
+            <a:pPr marL="0" indent="0" algn="l">
               <a:buNone/>
             </a:pPr>
             <a:r>
@@ -13597,6 +14388,13 @@
             <a:prstDash val="solid"/>
           </a:ln>
         </p:spPr>
+        <p:txBody>
+          <a:bodyPr/>
+          <a:lstStyle/>
+          <a:p>
+            <a:endParaRPr lang="en-US"/>
+          </a:p>
+        </p:txBody>
       </p:sp>
       <p:sp>
         <p:nvSpPr>
@@ -13621,7 +14419,7 @@
           </a:bodyPr>
           <a:lstStyle/>
           <a:p>
-            <a:pPr algn="ctr" indent="0" marL="0">
+            <a:pPr marL="0" indent="0" algn="ctr">
               <a:buNone/>
             </a:pPr>
             <a:r>
@@ -13663,6 +14461,13 @@
             <a:prstDash val="solid"/>
           </a:ln>
         </p:spPr>
+        <p:txBody>
+          <a:bodyPr/>
+          <a:lstStyle/>
+          <a:p>
+            <a:endParaRPr lang="en-US"/>
+          </a:p>
+        </p:txBody>
       </p:sp>
       <p:sp>
         <p:nvSpPr>
@@ -13687,7 +14492,7 @@
           </a:bodyPr>
           <a:lstStyle/>
           <a:p>
-            <a:pPr algn="ctr" indent="0" marL="0">
+            <a:pPr marL="0" indent="0" algn="ctr">
               <a:buNone/>
             </a:pPr>
             <a:r>
@@ -13729,6 +14534,13 @@
             <a:prstDash val="solid"/>
           </a:ln>
         </p:spPr>
+        <p:txBody>
+          <a:bodyPr/>
+          <a:lstStyle/>
+          <a:p>
+            <a:endParaRPr lang="en-US"/>
+          </a:p>
+        </p:txBody>
       </p:sp>
       <p:sp>
         <p:nvSpPr>
@@ -13753,7 +14565,7 @@
           </a:bodyPr>
           <a:lstStyle/>
           <a:p>
-            <a:pPr algn="l" indent="0" marL="0">
+            <a:pPr marL="0" indent="0" algn="l">
               <a:buNone/>
             </a:pPr>
             <a:r>
@@ -13795,6 +14607,13 @@
             <a:prstDash val="solid"/>
           </a:ln>
         </p:spPr>
+        <p:txBody>
+          <a:bodyPr/>
+          <a:lstStyle/>
+          <a:p>
+            <a:endParaRPr lang="en-US"/>
+          </a:p>
+        </p:txBody>
       </p:sp>
       <p:sp>
         <p:nvSpPr>
@@ -13819,7 +14638,7 @@
           </a:bodyPr>
           <a:lstStyle/>
           <a:p>
-            <a:pPr algn="ctr" indent="0" marL="0">
+            <a:pPr marL="0" indent="0" algn="ctr">
               <a:buNone/>
             </a:pPr>
             <a:r>
@@ -13861,6 +14680,13 @@
             <a:prstDash val="solid"/>
           </a:ln>
         </p:spPr>
+        <p:txBody>
+          <a:bodyPr/>
+          <a:lstStyle/>
+          <a:p>
+            <a:endParaRPr lang="en-US"/>
+          </a:p>
+        </p:txBody>
       </p:sp>
       <p:sp>
         <p:nvSpPr>
@@ -13885,7 +14711,7 @@
           </a:bodyPr>
           <a:lstStyle/>
           <a:p>
-            <a:pPr algn="ctr" indent="0" marL="0">
+            <a:pPr marL="0" indent="0" algn="ctr">
               <a:buNone/>
             </a:pPr>
             <a:r>
@@ -13927,6 +14753,13 @@
             <a:prstDash val="solid"/>
           </a:ln>
         </p:spPr>
+        <p:txBody>
+          <a:bodyPr/>
+          <a:lstStyle/>
+          <a:p>
+            <a:endParaRPr lang="en-US"/>
+          </a:p>
+        </p:txBody>
       </p:sp>
       <p:sp>
         <p:nvSpPr>
@@ -13951,7 +14784,7 @@
           </a:bodyPr>
           <a:lstStyle/>
           <a:p>
-            <a:pPr algn="l" indent="0" marL="0">
+            <a:pPr marL="0" indent="0" algn="l">
               <a:buNone/>
             </a:pPr>
             <a:r>
@@ -13993,6 +14826,13 @@
             <a:prstDash val="solid"/>
           </a:ln>
         </p:spPr>
+        <p:txBody>
+          <a:bodyPr/>
+          <a:lstStyle/>
+          <a:p>
+            <a:endParaRPr lang="en-US"/>
+          </a:p>
+        </p:txBody>
       </p:sp>
       <p:sp>
         <p:nvSpPr>
@@ -14017,7 +14857,7 @@
           </a:bodyPr>
           <a:lstStyle/>
           <a:p>
-            <a:pPr algn="ctr" indent="0" marL="0">
+            <a:pPr marL="0" indent="0" algn="ctr">
               <a:buNone/>
             </a:pPr>
             <a:r>
@@ -14059,6 +14899,13 @@
             <a:prstDash val="solid"/>
           </a:ln>
         </p:spPr>
+        <p:txBody>
+          <a:bodyPr/>
+          <a:lstStyle/>
+          <a:p>
+            <a:endParaRPr lang="en-US"/>
+          </a:p>
+        </p:txBody>
       </p:sp>
       <p:sp>
         <p:nvSpPr>
@@ -14083,7 +14930,7 @@
           </a:bodyPr>
           <a:lstStyle/>
           <a:p>
-            <a:pPr algn="ctr" indent="0" marL="0">
+            <a:pPr marL="0" indent="0" algn="ctr">
               <a:buNone/>
             </a:pPr>
             <a:r>
@@ -14129,6 +14976,13 @@
             <a:prstDash val="solid"/>
           </a:ln>
         </p:spPr>
+        <p:txBody>
+          <a:bodyPr/>
+          <a:lstStyle/>
+          <a:p>
+            <a:endParaRPr lang="en-US"/>
+          </a:p>
+        </p:txBody>
       </p:sp>
       <p:sp>
         <p:nvSpPr>
@@ -14153,11 +15007,11 @@
           </a:bodyPr>
           <a:lstStyle/>
           <a:p>
-            <a:pPr algn="l" indent="0" marL="0">
-              <a:buNone/>
-            </a:pPr>
-            <a:r>
-              <a:rPr lang="en-US" sz="1000" b="1" spc="100" kern="0" dirty="0">
+            <a:pPr marL="0" indent="0" algn="l">
+              <a:buNone/>
+            </a:pPr>
+            <a:r>
+              <a:rPr lang="en-US" sz="1000" b="1" kern="0" spc="100" dirty="0">
                 <a:solidFill>
                   <a:srgbClr val="38BDF8"/>
                 </a:solidFill>
@@ -14195,6 +15049,13 @@
             <a:prstDash val="solid"/>
           </a:ln>
         </p:spPr>
+        <p:txBody>
+          <a:bodyPr/>
+          <a:lstStyle/>
+          <a:p>
+            <a:endParaRPr lang="en-US"/>
+          </a:p>
+        </p:txBody>
       </p:sp>
       <p:sp>
         <p:nvSpPr>
@@ -14219,7 +15080,7 @@
           </a:bodyPr>
           <a:lstStyle/>
           <a:p>
-            <a:pPr algn="l" indent="0" marL="0">
+            <a:pPr marL="0" indent="0" algn="l">
               <a:buNone/>
             </a:pPr>
             <a:r>
@@ -14261,6 +15122,13 @@
             <a:prstDash val="solid"/>
           </a:ln>
         </p:spPr>
+        <p:txBody>
+          <a:bodyPr/>
+          <a:lstStyle/>
+          <a:p>
+            <a:endParaRPr lang="en-US"/>
+          </a:p>
+        </p:txBody>
       </p:sp>
       <p:sp>
         <p:nvSpPr>
@@ -14285,7 +15153,7 @@
           </a:bodyPr>
           <a:lstStyle/>
           <a:p>
-            <a:pPr algn="l" indent="0" marL="0">
+            <a:pPr marL="0" indent="0" algn="l">
               <a:buNone/>
             </a:pPr>
             <a:r>
@@ -14327,6 +15195,13 @@
             <a:prstDash val="solid"/>
           </a:ln>
         </p:spPr>
+        <p:txBody>
+          <a:bodyPr/>
+          <a:lstStyle/>
+          <a:p>
+            <a:endParaRPr lang="en-US"/>
+          </a:p>
+        </p:txBody>
       </p:sp>
       <p:sp>
         <p:nvSpPr>
@@ -14351,7 +15226,7 @@
           </a:bodyPr>
           <a:lstStyle/>
           <a:p>
-            <a:pPr algn="l" indent="0" marL="0">
+            <a:pPr marL="0" indent="0" algn="l">
               <a:buNone/>
             </a:pPr>
             <a:r>
@@ -14371,7 +15246,7 @@
       </p:sp>
       <p:sp>
         <p:nvSpPr>
-          <p:cNvPr id="25" name="Slide Number Placeholder 0"/>
+          <p:cNvPr id="93" name="Slide Number Placeholder 0"/>
           <p:cNvSpPr>
             <a:spLocks noGrp="1"/>
           </p:cNvSpPr>
@@ -14389,7 +15264,7 @@
           </a:prstGeom>
           <a:extLst>
             <a:ext uri="{C572A759-6A51-4108-AA02-DFA0A04FC94B}">
-              <ma14:wrappingTextBoxFlag xmlns:ma14="http://schemas.microsoft.com/office/mac/drawingml/2011/main" val="0"/>
+              <ma14:wrappingTextBoxFlag xmlns:ma14="http://schemas.microsoft.com/office/mac/drawingml/2011/main" xmlns="" val="0"/>
             </a:ext>
           </a:extLst>
         </p:spPr>
@@ -14410,7 +15285,7 @@
           <a:p>
             <a:pPr algn="l"/>
             <a:fld id="{F7021451-1387-4CA6-816F-3879F97B5CBC}" type="slidenum">
-              <a:rPr b="0" lang="en-US"/>
+              <a:rPr lang="en-US" b="0"/>
               <a:t>4</a:t>
             </a:fld>
             <a:endParaRPr lang="en-US"/>
@@ -14465,11 +15340,11 @@
           </a:bodyPr>
           <a:lstStyle/>
           <a:p>
-            <a:pPr algn="l" indent="0" marL="0">
-              <a:buNone/>
-            </a:pPr>
-            <a:r>
-              <a:rPr lang="en-US" sz="900" b="1" spc="150" kern="0" dirty="0">
+            <a:pPr marL="0" indent="0" algn="l">
+              <a:buNone/>
+            </a:pPr>
+            <a:r>
+              <a:rPr lang="en-US" sz="900" b="1" kern="0" spc="150" dirty="0">
                 <a:solidFill>
                   <a:srgbClr val="38BDF8"/>
                 </a:solidFill>
@@ -14506,7 +15381,7 @@
           </a:bodyPr>
           <a:lstStyle/>
           <a:p>
-            <a:pPr algn="l" indent="0" marL="0">
+            <a:pPr marL="0" indent="0" algn="l">
               <a:buNone/>
             </a:pPr>
             <a:r>
@@ -14547,7 +15422,7 @@
           </a:bodyPr>
           <a:lstStyle/>
           <a:p>
-            <a:pPr algn="l" indent="0" marL="0">
+            <a:pPr marL="0" indent="0" algn="l">
               <a:buNone/>
             </a:pPr>
             <a:r>
@@ -14593,6 +15468,13 @@
             <a:prstDash val="solid"/>
           </a:ln>
         </p:spPr>
+        <p:txBody>
+          <a:bodyPr/>
+          <a:lstStyle/>
+          <a:p>
+            <a:endParaRPr lang="en-US"/>
+          </a:p>
+        </p:txBody>
       </p:sp>
       <p:sp>
         <p:nvSpPr>
@@ -14617,11 +15499,11 @@
           </a:bodyPr>
           <a:lstStyle/>
           <a:p>
-            <a:pPr algn="l" indent="0" marL="0">
-              <a:buNone/>
-            </a:pPr>
-            <a:r>
-              <a:rPr lang="en-US" sz="1000" b="1" spc="100" kern="0" dirty="0">
+            <a:pPr marL="0" indent="0" algn="l">
+              <a:buNone/>
+            </a:pPr>
+            <a:r>
+              <a:rPr lang="en-US" sz="1000" b="1" kern="0" spc="100" dirty="0">
                 <a:solidFill>
                   <a:srgbClr val="38BDF8"/>
                 </a:solidFill>
@@ -14658,7 +15540,7 @@
           </a:bodyPr>
           <a:lstStyle/>
           <a:p>
-            <a:pPr algn="l" indent="0" marL="0">
+            <a:pPr marL="0" indent="0" algn="l">
               <a:buNone/>
             </a:pPr>
             <a:r>
@@ -14704,6 +15586,13 @@
             <a:prstDash val="solid"/>
           </a:ln>
         </p:spPr>
+        <p:txBody>
+          <a:bodyPr/>
+          <a:lstStyle/>
+          <a:p>
+            <a:endParaRPr lang="en-US"/>
+          </a:p>
+        </p:txBody>
       </p:sp>
       <p:sp>
         <p:nvSpPr>
@@ -14733,6 +15622,13 @@
             <a:prstDash val="solid"/>
           </a:ln>
         </p:spPr>
+        <p:txBody>
+          <a:bodyPr/>
+          <a:lstStyle/>
+          <a:p>
+            <a:endParaRPr lang="en-US"/>
+          </a:p>
+        </p:txBody>
       </p:sp>
       <p:sp>
         <p:nvSpPr>
@@ -14757,7 +15653,7 @@
           </a:bodyPr>
           <a:lstStyle/>
           <a:p>
-            <a:pPr algn="l" indent="0" marL="0">
+            <a:pPr marL="0" indent="0" algn="l">
               <a:buNone/>
             </a:pPr>
             <a:r>
@@ -14798,7 +15694,7 @@
           </a:bodyPr>
           <a:lstStyle/>
           <a:p>
-            <a:pPr algn="l" indent="0" marL="0">
+            <a:pPr marL="0" indent="0" algn="l">
               <a:buNone/>
             </a:pPr>
             <a:r>
@@ -14844,6 +15740,13 @@
             <a:prstDash val="solid"/>
           </a:ln>
         </p:spPr>
+        <p:txBody>
+          <a:bodyPr/>
+          <a:lstStyle/>
+          <a:p>
+            <a:endParaRPr lang="en-US"/>
+          </a:p>
+        </p:txBody>
       </p:sp>
       <p:sp>
         <p:nvSpPr>
@@ -14873,6 +15776,13 @@
             <a:prstDash val="solid"/>
           </a:ln>
         </p:spPr>
+        <p:txBody>
+          <a:bodyPr/>
+          <a:lstStyle/>
+          <a:p>
+            <a:endParaRPr lang="en-US"/>
+          </a:p>
+        </p:txBody>
       </p:sp>
       <p:sp>
         <p:nvSpPr>
@@ -14897,7 +15807,7 @@
           </a:bodyPr>
           <a:lstStyle/>
           <a:p>
-            <a:pPr algn="l" indent="0" marL="0">
+            <a:pPr marL="0" indent="0" algn="l">
               <a:buNone/>
             </a:pPr>
             <a:r>
@@ -14938,7 +15848,7 @@
           </a:bodyPr>
           <a:lstStyle/>
           <a:p>
-            <a:pPr algn="l" indent="0" marL="0">
+            <a:pPr marL="0" indent="0" algn="l">
               <a:buNone/>
             </a:pPr>
             <a:r>
@@ -14979,7 +15889,7 @@
           </a:bodyPr>
           <a:lstStyle/>
           <a:p>
-            <a:pPr algn="l" indent="0" marL="0">
+            <a:pPr marL="0" indent="0" algn="l">
               <a:buNone/>
             </a:pPr>
             <a:r>
@@ -15020,7 +15930,7 @@
           </a:bodyPr>
           <a:lstStyle/>
           <a:p>
-            <a:pPr algn="l" indent="0" marL="0">
+            <a:pPr marL="0" indent="0" algn="l">
               <a:buNone/>
             </a:pPr>
             <a:r>
@@ -15061,7 +15971,7 @@
           </a:bodyPr>
           <a:lstStyle/>
           <a:p>
-            <a:pPr algn="l" indent="0" marL="0">
+            <a:pPr marL="0" indent="0" algn="l">
               <a:buNone/>
             </a:pPr>
             <a:r>
@@ -15107,6 +16017,13 @@
             <a:prstDash val="solid"/>
           </a:ln>
         </p:spPr>
+        <p:txBody>
+          <a:bodyPr/>
+          <a:lstStyle/>
+          <a:p>
+            <a:endParaRPr lang="en-US"/>
+          </a:p>
+        </p:txBody>
       </p:sp>
       <p:sp>
         <p:nvSpPr>
@@ -15136,6 +16053,13 @@
             <a:prstDash val="solid"/>
           </a:ln>
         </p:spPr>
+        <p:txBody>
+          <a:bodyPr/>
+          <a:lstStyle/>
+          <a:p>
+            <a:endParaRPr lang="en-US"/>
+          </a:p>
+        </p:txBody>
       </p:sp>
       <p:sp>
         <p:nvSpPr>
@@ -15160,7 +16084,7 @@
           </a:bodyPr>
           <a:lstStyle/>
           <a:p>
-            <a:pPr algn="l" indent="0" marL="0">
+            <a:pPr marL="0" indent="0" algn="l">
               <a:buNone/>
             </a:pPr>
             <a:r>
@@ -15201,7 +16125,7 @@
           </a:bodyPr>
           <a:lstStyle/>
           <a:p>
-            <a:pPr algn="l" indent="0" marL="0">
+            <a:pPr marL="0" indent="0" algn="l">
               <a:buNone/>
             </a:pPr>
             <a:r>
@@ -15247,6 +16171,13 @@
             <a:prstDash val="solid"/>
           </a:ln>
         </p:spPr>
+        <p:txBody>
+          <a:bodyPr/>
+          <a:lstStyle/>
+          <a:p>
+            <a:endParaRPr lang="en-US"/>
+          </a:p>
+        </p:txBody>
       </p:sp>
       <p:sp>
         <p:nvSpPr>
@@ -15276,6 +16207,13 @@
             <a:prstDash val="solid"/>
           </a:ln>
         </p:spPr>
+        <p:txBody>
+          <a:bodyPr/>
+          <a:lstStyle/>
+          <a:p>
+            <a:endParaRPr lang="en-US"/>
+          </a:p>
+        </p:txBody>
       </p:sp>
       <p:sp>
         <p:nvSpPr>
@@ -15300,7 +16238,7 @@
           </a:bodyPr>
           <a:lstStyle/>
           <a:p>
-            <a:pPr algn="l" indent="0" marL="0">
+            <a:pPr marL="0" indent="0" algn="l">
               <a:buNone/>
             </a:pPr>
             <a:r>
@@ -15341,7 +16279,7 @@
           </a:bodyPr>
           <a:lstStyle/>
           <a:p>
-            <a:pPr algn="l" indent="0" marL="0">
+            <a:pPr marL="0" indent="0" algn="l">
               <a:buNone/>
             </a:pPr>
             <a:r>
@@ -15387,6 +16325,13 @@
             <a:prstDash val="solid"/>
           </a:ln>
         </p:spPr>
+        <p:txBody>
+          <a:bodyPr/>
+          <a:lstStyle/>
+          <a:p>
+            <a:endParaRPr lang="en-US"/>
+          </a:p>
+        </p:txBody>
       </p:sp>
       <p:sp>
         <p:nvSpPr>
@@ -15416,6 +16361,13 @@
             <a:prstDash val="solid"/>
           </a:ln>
         </p:spPr>
+        <p:txBody>
+          <a:bodyPr/>
+          <a:lstStyle/>
+          <a:p>
+            <a:endParaRPr lang="en-US"/>
+          </a:p>
+        </p:txBody>
       </p:sp>
       <p:sp>
         <p:nvSpPr>
@@ -15440,7 +16392,7 @@
           </a:bodyPr>
           <a:lstStyle/>
           <a:p>
-            <a:pPr algn="l" indent="0" marL="0">
+            <a:pPr marL="0" indent="0" algn="l">
               <a:buNone/>
             </a:pPr>
             <a:r>
@@ -15481,7 +16433,7 @@
           </a:bodyPr>
           <a:lstStyle/>
           <a:p>
-            <a:pPr algn="l" indent="0" marL="0">
+            <a:pPr marL="0" indent="0" algn="l">
               <a:buNone/>
             </a:pPr>
             <a:r>
@@ -15527,6 +16479,13 @@
             <a:prstDash val="solid"/>
           </a:ln>
         </p:spPr>
+        <p:txBody>
+          <a:bodyPr/>
+          <a:lstStyle/>
+          <a:p>
+            <a:endParaRPr lang="en-US"/>
+          </a:p>
+        </p:txBody>
       </p:sp>
       <p:sp>
         <p:nvSpPr>
@@ -15556,6 +16515,13 @@
             <a:prstDash val="solid"/>
           </a:ln>
         </p:spPr>
+        <p:txBody>
+          <a:bodyPr/>
+          <a:lstStyle/>
+          <a:p>
+            <a:endParaRPr lang="en-US"/>
+          </a:p>
+        </p:txBody>
       </p:sp>
       <p:sp>
         <p:nvSpPr>
@@ -15580,7 +16546,7 @@
           </a:bodyPr>
           <a:lstStyle/>
           <a:p>
-            <a:pPr algn="l" indent="0" marL="0">
+            <a:pPr marL="0" indent="0" algn="l">
               <a:buNone/>
             </a:pPr>
             <a:r>
@@ -15621,7 +16587,7 @@
           </a:bodyPr>
           <a:lstStyle/>
           <a:p>
-            <a:pPr algn="l" indent="0" marL="0">
+            <a:pPr marL="0" indent="0" algn="l">
               <a:buNone/>
             </a:pPr>
             <a:r>
@@ -15667,6 +16633,13 @@
             <a:prstDash val="solid"/>
           </a:ln>
         </p:spPr>
+        <p:txBody>
+          <a:bodyPr/>
+          <a:lstStyle/>
+          <a:p>
+            <a:endParaRPr lang="en-US"/>
+          </a:p>
+        </p:txBody>
       </p:sp>
       <p:sp>
         <p:nvSpPr>
@@ -15696,6 +16669,13 @@
             <a:prstDash val="solid"/>
           </a:ln>
         </p:spPr>
+        <p:txBody>
+          <a:bodyPr/>
+          <a:lstStyle/>
+          <a:p>
+            <a:endParaRPr lang="en-US"/>
+          </a:p>
+        </p:txBody>
       </p:sp>
       <p:sp>
         <p:nvSpPr>
@@ -15720,7 +16700,7 @@
           </a:bodyPr>
           <a:lstStyle/>
           <a:p>
-            <a:pPr algn="l" indent="0" marL="0">
+            <a:pPr marL="0" indent="0" algn="l">
               <a:buNone/>
             </a:pPr>
             <a:r>
@@ -15766,6 +16746,13 @@
             <a:prstDash val="solid"/>
           </a:ln>
         </p:spPr>
+        <p:txBody>
+          <a:bodyPr/>
+          <a:lstStyle/>
+          <a:p>
+            <a:endParaRPr lang="en-US"/>
+          </a:p>
+        </p:txBody>
       </p:sp>
       <p:sp>
         <p:nvSpPr>
@@ -15790,11 +16777,11 @@
           </a:bodyPr>
           <a:lstStyle/>
           <a:p>
-            <a:pPr algn="l" indent="0" marL="0">
-              <a:buNone/>
-            </a:pPr>
-            <a:r>
-              <a:rPr lang="en-US" sz="1000" b="1" spc="100" kern="0" dirty="0">
+            <a:pPr marL="0" indent="0" algn="l">
+              <a:buNone/>
+            </a:pPr>
+            <a:r>
+              <a:rPr lang="en-US" sz="1000" b="1" kern="0" spc="100" dirty="0">
                 <a:solidFill>
                   <a:srgbClr val="38BDF8"/>
                 </a:solidFill>
@@ -15831,7 +16818,7 @@
           </a:bodyPr>
           <a:lstStyle/>
           <a:p>
-            <a:pPr algn="l" indent="0" marL="0">
+            <a:pPr marL="0" indent="0" algn="l">
               <a:buNone/>
             </a:pPr>
             <a:r>
@@ -15873,6 +16860,13 @@
             <a:prstDash val="solid"/>
           </a:ln>
         </p:spPr>
+        <p:txBody>
+          <a:bodyPr/>
+          <a:lstStyle/>
+          <a:p>
+            <a:endParaRPr lang="en-US"/>
+          </a:p>
+        </p:txBody>
       </p:sp>
       <p:sp>
         <p:nvSpPr>
@@ -15897,7 +16891,7 @@
           </a:bodyPr>
           <a:lstStyle/>
           <a:p>
-            <a:pPr algn="l" indent="0" marL="0">
+            <a:pPr marL="0" indent="0" algn="l">
               <a:buNone/>
             </a:pPr>
             <a:r>
@@ -15939,6 +16933,13 @@
             <a:prstDash val="solid"/>
           </a:ln>
         </p:spPr>
+        <p:txBody>
+          <a:bodyPr/>
+          <a:lstStyle/>
+          <a:p>
+            <a:endParaRPr lang="en-US"/>
+          </a:p>
+        </p:txBody>
       </p:sp>
       <p:sp>
         <p:nvSpPr>
@@ -15963,7 +16964,7 @@
           </a:bodyPr>
           <a:lstStyle/>
           <a:p>
-            <a:pPr algn="ctr" indent="0" marL="0">
+            <a:pPr marL="0" indent="0" algn="ctr">
               <a:buNone/>
             </a:pPr>
             <a:r>
@@ -16005,6 +17006,13 @@
             <a:prstDash val="solid"/>
           </a:ln>
         </p:spPr>
+        <p:txBody>
+          <a:bodyPr/>
+          <a:lstStyle/>
+          <a:p>
+            <a:endParaRPr lang="en-US"/>
+          </a:p>
+        </p:txBody>
       </p:sp>
       <p:sp>
         <p:nvSpPr>
@@ -16029,7 +17037,7 @@
           </a:bodyPr>
           <a:lstStyle/>
           <a:p>
-            <a:pPr algn="ctr" indent="0" marL="0">
+            <a:pPr marL="0" indent="0" algn="ctr">
               <a:buNone/>
             </a:pPr>
             <a:r>
@@ -16071,6 +17079,13 @@
             <a:prstDash val="solid"/>
           </a:ln>
         </p:spPr>
+        <p:txBody>
+          <a:bodyPr/>
+          <a:lstStyle/>
+          <a:p>
+            <a:endParaRPr lang="en-US"/>
+          </a:p>
+        </p:txBody>
       </p:sp>
       <p:sp>
         <p:nvSpPr>
@@ -16095,7 +17110,7 @@
           </a:bodyPr>
           <a:lstStyle/>
           <a:p>
-            <a:pPr algn="l" indent="0" marL="0">
+            <a:pPr marL="0" indent="0" algn="l">
               <a:buNone/>
             </a:pPr>
             <a:r>
@@ -16137,6 +17152,13 @@
             <a:prstDash val="solid"/>
           </a:ln>
         </p:spPr>
+        <p:txBody>
+          <a:bodyPr/>
+          <a:lstStyle/>
+          <a:p>
+            <a:endParaRPr lang="en-US"/>
+          </a:p>
+        </p:txBody>
       </p:sp>
       <p:sp>
         <p:nvSpPr>
@@ -16161,7 +17183,7 @@
           </a:bodyPr>
           <a:lstStyle/>
           <a:p>
-            <a:pPr algn="ctr" indent="0" marL="0">
+            <a:pPr marL="0" indent="0" algn="ctr">
               <a:buNone/>
             </a:pPr>
             <a:r>
@@ -16203,6 +17225,13 @@
             <a:prstDash val="solid"/>
           </a:ln>
         </p:spPr>
+        <p:txBody>
+          <a:bodyPr/>
+          <a:lstStyle/>
+          <a:p>
+            <a:endParaRPr lang="en-US"/>
+          </a:p>
+        </p:txBody>
       </p:sp>
       <p:sp>
         <p:nvSpPr>
@@ -16227,7 +17256,7 @@
           </a:bodyPr>
           <a:lstStyle/>
           <a:p>
-            <a:pPr algn="ctr" indent="0" marL="0">
+            <a:pPr marL="0" indent="0" algn="ctr">
               <a:buNone/>
             </a:pPr>
             <a:r>
@@ -16269,6 +17298,13 @@
             <a:prstDash val="solid"/>
           </a:ln>
         </p:spPr>
+        <p:txBody>
+          <a:bodyPr/>
+          <a:lstStyle/>
+          <a:p>
+            <a:endParaRPr lang="en-US"/>
+          </a:p>
+        </p:txBody>
       </p:sp>
       <p:sp>
         <p:nvSpPr>
@@ -16293,7 +17329,7 @@
           </a:bodyPr>
           <a:lstStyle/>
           <a:p>
-            <a:pPr algn="l" indent="0" marL="0">
+            <a:pPr marL="0" indent="0" algn="l">
               <a:buNone/>
             </a:pPr>
             <a:r>
@@ -16335,6 +17371,13 @@
             <a:prstDash val="solid"/>
           </a:ln>
         </p:spPr>
+        <p:txBody>
+          <a:bodyPr/>
+          <a:lstStyle/>
+          <a:p>
+            <a:endParaRPr lang="en-US"/>
+          </a:p>
+        </p:txBody>
       </p:sp>
       <p:sp>
         <p:nvSpPr>
@@ -16359,7 +17402,7 @@
           </a:bodyPr>
           <a:lstStyle/>
           <a:p>
-            <a:pPr algn="ctr" indent="0" marL="0">
+            <a:pPr marL="0" indent="0" algn="ctr">
               <a:buNone/>
             </a:pPr>
             <a:r>
@@ -16401,6 +17444,13 @@
             <a:prstDash val="solid"/>
           </a:ln>
         </p:spPr>
+        <p:txBody>
+          <a:bodyPr/>
+          <a:lstStyle/>
+          <a:p>
+            <a:endParaRPr lang="en-US"/>
+          </a:p>
+        </p:txBody>
       </p:sp>
       <p:sp>
         <p:nvSpPr>
@@ -16425,7 +17475,7 @@
           </a:bodyPr>
           <a:lstStyle/>
           <a:p>
-            <a:pPr algn="ctr" indent="0" marL="0">
+            <a:pPr marL="0" indent="0" algn="ctr">
               <a:buNone/>
             </a:pPr>
             <a:r>
@@ -16467,6 +17517,13 @@
             <a:prstDash val="solid"/>
           </a:ln>
         </p:spPr>
+        <p:txBody>
+          <a:bodyPr/>
+          <a:lstStyle/>
+          <a:p>
+            <a:endParaRPr lang="en-US"/>
+          </a:p>
+        </p:txBody>
       </p:sp>
       <p:sp>
         <p:nvSpPr>
@@ -16491,7 +17548,7 @@
           </a:bodyPr>
           <a:lstStyle/>
           <a:p>
-            <a:pPr algn="l" indent="0" marL="0">
+            <a:pPr marL="0" indent="0" algn="l">
               <a:buNone/>
             </a:pPr>
             <a:r>
@@ -16533,6 +17590,13 @@
             <a:prstDash val="solid"/>
           </a:ln>
         </p:spPr>
+        <p:txBody>
+          <a:bodyPr/>
+          <a:lstStyle/>
+          <a:p>
+            <a:endParaRPr lang="en-US"/>
+          </a:p>
+        </p:txBody>
       </p:sp>
       <p:sp>
         <p:nvSpPr>
@@ -16557,7 +17621,7 @@
           </a:bodyPr>
           <a:lstStyle/>
           <a:p>
-            <a:pPr algn="ctr" indent="0" marL="0">
+            <a:pPr marL="0" indent="0" algn="ctr">
               <a:buNone/>
             </a:pPr>
             <a:r>
@@ -16599,6 +17663,13 @@
             <a:prstDash val="solid"/>
           </a:ln>
         </p:spPr>
+        <p:txBody>
+          <a:bodyPr/>
+          <a:lstStyle/>
+          <a:p>
+            <a:endParaRPr lang="en-US"/>
+          </a:p>
+        </p:txBody>
       </p:sp>
       <p:sp>
         <p:nvSpPr>
@@ -16623,7 +17694,7 @@
           </a:bodyPr>
           <a:lstStyle/>
           <a:p>
-            <a:pPr algn="ctr" indent="0" marL="0">
+            <a:pPr marL="0" indent="0" algn="ctr">
               <a:buNone/>
             </a:pPr>
             <a:r>
@@ -16665,6 +17736,13 @@
             <a:prstDash val="solid"/>
           </a:ln>
         </p:spPr>
+        <p:txBody>
+          <a:bodyPr/>
+          <a:lstStyle/>
+          <a:p>
+            <a:endParaRPr lang="en-US"/>
+          </a:p>
+        </p:txBody>
       </p:sp>
       <p:sp>
         <p:nvSpPr>
@@ -16689,7 +17767,7 @@
           </a:bodyPr>
           <a:lstStyle/>
           <a:p>
-            <a:pPr algn="l" indent="0" marL="0">
+            <a:pPr marL="0" indent="0" algn="l">
               <a:buNone/>
             </a:pPr>
             <a:r>
@@ -16731,6 +17809,13 @@
             <a:prstDash val="solid"/>
           </a:ln>
         </p:spPr>
+        <p:txBody>
+          <a:bodyPr/>
+          <a:lstStyle/>
+          <a:p>
+            <a:endParaRPr lang="en-US"/>
+          </a:p>
+        </p:txBody>
       </p:sp>
       <p:sp>
         <p:nvSpPr>
@@ -16755,7 +17840,7 @@
           </a:bodyPr>
           <a:lstStyle/>
           <a:p>
-            <a:pPr algn="ctr" indent="0" marL="0">
+            <a:pPr marL="0" indent="0" algn="ctr">
               <a:buNone/>
             </a:pPr>
             <a:r>
@@ -16797,6 +17882,13 @@
             <a:prstDash val="solid"/>
           </a:ln>
         </p:spPr>
+        <p:txBody>
+          <a:bodyPr/>
+          <a:lstStyle/>
+          <a:p>
+            <a:endParaRPr lang="en-US"/>
+          </a:p>
+        </p:txBody>
       </p:sp>
       <p:sp>
         <p:nvSpPr>
@@ -16821,7 +17913,7 @@
           </a:bodyPr>
           <a:lstStyle/>
           <a:p>
-            <a:pPr algn="ctr" indent="0" marL="0">
+            <a:pPr marL="0" indent="0" algn="ctr">
               <a:buNone/>
             </a:pPr>
             <a:r>
@@ -16862,7 +17954,7 @@
           </a:bodyPr>
           <a:lstStyle/>
           <a:p>
-            <a:pPr algn="l" indent="0" marL="0">
+            <a:pPr marL="0" indent="0" algn="l">
               <a:buNone/>
             </a:pPr>
             <a:r>
@@ -16903,7 +17995,7 @@
           </a:bodyPr>
           <a:lstStyle/>
           <a:p>
-            <a:pPr algn="l" indent="0" marL="0">
+            <a:pPr marL="0" indent="0" algn="l">
               <a:buNone/>
             </a:pPr>
             <a:r>
@@ -16949,6 +18041,13 @@
             <a:prstDash val="solid"/>
           </a:ln>
         </p:spPr>
+        <p:txBody>
+          <a:bodyPr/>
+          <a:lstStyle/>
+          <a:p>
+            <a:endParaRPr lang="en-US"/>
+          </a:p>
+        </p:txBody>
       </p:sp>
       <p:sp>
         <p:nvSpPr>
@@ -16978,6 +18077,13 @@
             <a:prstDash val="solid"/>
           </a:ln>
         </p:spPr>
+        <p:txBody>
+          <a:bodyPr/>
+          <a:lstStyle/>
+          <a:p>
+            <a:endParaRPr lang="en-US"/>
+          </a:p>
+        </p:txBody>
       </p:sp>
       <p:sp>
         <p:nvSpPr>
@@ -17002,7 +18108,7 @@
           </a:bodyPr>
           <a:lstStyle/>
           <a:p>
-            <a:pPr algn="l" indent="0" marL="0">
+            <a:pPr marL="0" indent="0" algn="l">
               <a:buNone/>
             </a:pPr>
             <a:r>
@@ -17043,7 +18149,7 @@
           </a:bodyPr>
           <a:lstStyle/>
           <a:p>
-            <a:pPr algn="l" indent="0" marL="0">
+            <a:pPr marL="0" indent="0" algn="l">
               <a:buNone/>
             </a:pPr>
             <a:r>
@@ -17089,6 +18195,13 @@
             <a:prstDash val="solid"/>
           </a:ln>
         </p:spPr>
+        <p:txBody>
+          <a:bodyPr/>
+          <a:lstStyle/>
+          <a:p>
+            <a:endParaRPr lang="en-US"/>
+          </a:p>
+        </p:txBody>
       </p:sp>
       <p:sp>
         <p:nvSpPr>
@@ -17118,6 +18231,13 @@
             <a:prstDash val="solid"/>
           </a:ln>
         </p:spPr>
+        <p:txBody>
+          <a:bodyPr/>
+          <a:lstStyle/>
+          <a:p>
+            <a:endParaRPr lang="en-US"/>
+          </a:p>
+        </p:txBody>
       </p:sp>
       <p:sp>
         <p:nvSpPr>
@@ -17142,7 +18262,7 @@
           </a:bodyPr>
           <a:lstStyle/>
           <a:p>
-            <a:pPr algn="l" indent="0" marL="0">
+            <a:pPr marL="0" indent="0" algn="l">
               <a:buNone/>
             </a:pPr>
             <a:r>
@@ -17162,7 +18282,7 @@
       </p:sp>
       <p:sp>
         <p:nvSpPr>
-          <p:cNvPr id="25" name="Slide Number Placeholder 0"/>
+          <p:cNvPr id="80" name="Slide Number Placeholder 0"/>
           <p:cNvSpPr>
             <a:spLocks noGrp="1"/>
           </p:cNvSpPr>
@@ -17180,7 +18300,7 @@
           </a:prstGeom>
           <a:extLst>
             <a:ext uri="{C572A759-6A51-4108-AA02-DFA0A04FC94B}">
-              <ma14:wrappingTextBoxFlag xmlns:ma14="http://schemas.microsoft.com/office/mac/drawingml/2011/main" val="0"/>
+              <ma14:wrappingTextBoxFlag xmlns:ma14="http://schemas.microsoft.com/office/mac/drawingml/2011/main" xmlns="" val="0"/>
             </a:ext>
           </a:extLst>
         </p:spPr>
@@ -17201,7 +18321,7 @@
           <a:p>
             <a:pPr algn="l"/>
             <a:fld id="{F7021451-1387-4CA6-816F-3879F97B5CBC}" type="slidenum">
-              <a:rPr b="0" lang="en-US"/>
+              <a:rPr lang="en-US" b="0"/>
               <a:t>5</a:t>
             </a:fld>
             <a:endParaRPr lang="en-US"/>
@@ -17256,11 +18376,11 @@
           </a:bodyPr>
           <a:lstStyle/>
           <a:p>
-            <a:pPr algn="l" indent="0" marL="0">
-              <a:buNone/>
-            </a:pPr>
-            <a:r>
-              <a:rPr lang="en-US" sz="900" b="1" spc="150" kern="0" dirty="0">
+            <a:pPr marL="0" indent="0" algn="l">
+              <a:buNone/>
+            </a:pPr>
+            <a:r>
+              <a:rPr lang="en-US" sz="900" b="1" kern="0" spc="150" dirty="0">
                 <a:solidFill>
                   <a:srgbClr val="38BDF8"/>
                 </a:solidFill>
@@ -17297,7 +18417,7 @@
           </a:bodyPr>
           <a:lstStyle/>
           <a:p>
-            <a:pPr algn="l" indent="0" marL="0">
+            <a:pPr marL="0" indent="0" algn="l">
               <a:buNone/>
             </a:pPr>
             <a:r>
@@ -17338,7 +18458,7 @@
           </a:bodyPr>
           <a:lstStyle/>
           <a:p>
-            <a:pPr algn="l" indent="0" marL="0">
+            <a:pPr marL="0" indent="0" algn="l">
               <a:buNone/>
             </a:pPr>
             <a:r>
@@ -17384,6 +18504,13 @@
             <a:prstDash val="solid"/>
           </a:ln>
         </p:spPr>
+        <p:txBody>
+          <a:bodyPr/>
+          <a:lstStyle/>
+          <a:p>
+            <a:endParaRPr lang="en-US"/>
+          </a:p>
+        </p:txBody>
       </p:sp>
       <p:sp>
         <p:nvSpPr>
@@ -17408,7 +18535,7 @@
           </a:bodyPr>
           <a:lstStyle/>
           <a:p>
-            <a:pPr algn="ctr" indent="0" marL="0">
+            <a:pPr marL="0" indent="0" algn="ctr">
               <a:buNone/>
             </a:pPr>
             <a:r>
@@ -17454,6 +18581,13 @@
             <a:prstDash val="solid"/>
           </a:ln>
         </p:spPr>
+        <p:txBody>
+          <a:bodyPr/>
+          <a:lstStyle/>
+          <a:p>
+            <a:endParaRPr lang="en-US"/>
+          </a:p>
+        </p:txBody>
       </p:sp>
       <p:sp>
         <p:nvSpPr>
@@ -17478,7 +18612,7 @@
           </a:bodyPr>
           <a:lstStyle/>
           <a:p>
-            <a:pPr algn="ctr" indent="0" marL="0">
+            <a:pPr marL="0" indent="0" algn="ctr">
               <a:buNone/>
             </a:pPr>
             <a:r>
@@ -17524,6 +18658,13 @@
             <a:prstDash val="solid"/>
           </a:ln>
         </p:spPr>
+        <p:txBody>
+          <a:bodyPr/>
+          <a:lstStyle/>
+          <a:p>
+            <a:endParaRPr lang="en-US"/>
+          </a:p>
+        </p:txBody>
       </p:sp>
       <p:sp>
         <p:nvSpPr>
@@ -17548,7 +18689,7 @@
           </a:bodyPr>
           <a:lstStyle/>
           <a:p>
-            <a:pPr algn="ctr" indent="0" marL="0">
+            <a:pPr marL="0" indent="0" algn="ctr">
               <a:buNone/>
             </a:pPr>
             <a:r>
@@ -17594,6 +18735,13 @@
             <a:prstDash val="solid"/>
           </a:ln>
         </p:spPr>
+        <p:txBody>
+          <a:bodyPr/>
+          <a:lstStyle/>
+          <a:p>
+            <a:endParaRPr lang="en-US"/>
+          </a:p>
+        </p:txBody>
       </p:sp>
       <p:sp>
         <p:nvSpPr>
@@ -17618,7 +18766,7 @@
           </a:bodyPr>
           <a:lstStyle/>
           <a:p>
-            <a:pPr algn="ctr" indent="0" marL="0">
+            <a:pPr marL="0" indent="0" algn="ctr">
               <a:buNone/>
             </a:pPr>
             <a:r>
@@ -17660,6 +18808,13 @@
             <a:tailEnd type="none"/>
           </a:ln>
         </p:spPr>
+        <p:txBody>
+          <a:bodyPr/>
+          <a:lstStyle/>
+          <a:p>
+            <a:endParaRPr lang="en-US"/>
+          </a:p>
+        </p:txBody>
       </p:sp>
       <p:sp>
         <p:nvSpPr>
@@ -17689,6 +18844,13 @@
             <a:prstDash val="solid"/>
           </a:ln>
         </p:spPr>
+        <p:txBody>
+          <a:bodyPr/>
+          <a:lstStyle/>
+          <a:p>
+            <a:endParaRPr lang="en-US"/>
+          </a:p>
+        </p:txBody>
       </p:sp>
       <p:sp>
         <p:nvSpPr>
@@ -17713,7 +18875,7 @@
           </a:bodyPr>
           <a:lstStyle/>
           <a:p>
-            <a:pPr algn="ctr" indent="0" marL="0">
+            <a:pPr marL="0" indent="0" algn="ctr">
               <a:buNone/>
             </a:pPr>
             <a:r>
@@ -17754,7 +18916,7 @@
           </a:bodyPr>
           <a:lstStyle/>
           <a:p>
-            <a:pPr algn="ctr" indent="0" marL="0">
+            <a:pPr marL="0" indent="0" algn="ctr">
               <a:buNone/>
             </a:pPr>
             <a:r>
@@ -17800,6 +18962,13 @@
             <a:prstDash val="solid"/>
           </a:ln>
         </p:spPr>
+        <p:txBody>
+          <a:bodyPr/>
+          <a:lstStyle/>
+          <a:p>
+            <a:endParaRPr lang="en-US"/>
+          </a:p>
+        </p:txBody>
       </p:sp>
       <p:sp>
         <p:nvSpPr>
@@ -17824,7 +18993,7 @@
           </a:bodyPr>
           <a:lstStyle/>
           <a:p>
-            <a:pPr algn="ctr" indent="0" marL="0">
+            <a:pPr marL="0" indent="0" algn="ctr">
               <a:buNone/>
             </a:pPr>
             <a:r>
@@ -17865,7 +19034,7 @@
           </a:bodyPr>
           <a:lstStyle/>
           <a:p>
-            <a:pPr algn="ctr" indent="0" marL="0">
+            <a:pPr marL="0" indent="0" algn="ctr">
               <a:buNone/>
             </a:pPr>
             <a:r>
@@ -17911,6 +19080,13 @@
             <a:prstDash val="solid"/>
           </a:ln>
         </p:spPr>
+        <p:txBody>
+          <a:bodyPr/>
+          <a:lstStyle/>
+          <a:p>
+            <a:endParaRPr lang="en-US"/>
+          </a:p>
+        </p:txBody>
       </p:sp>
       <p:sp>
         <p:nvSpPr>
@@ -17935,7 +19111,7 @@
           </a:bodyPr>
           <a:lstStyle/>
           <a:p>
-            <a:pPr algn="ctr" indent="0" marL="0">
+            <a:pPr marL="0" indent="0" algn="ctr">
               <a:buNone/>
             </a:pPr>
             <a:r>
@@ -17976,7 +19152,7 @@
           </a:bodyPr>
           <a:lstStyle/>
           <a:p>
-            <a:pPr algn="ctr" indent="0" marL="0">
+            <a:pPr marL="0" indent="0" algn="ctr">
               <a:buNone/>
             </a:pPr>
             <a:r>
@@ -18022,6 +19198,13 @@
             <a:prstDash val="solid"/>
           </a:ln>
         </p:spPr>
+        <p:txBody>
+          <a:bodyPr/>
+          <a:lstStyle/>
+          <a:p>
+            <a:endParaRPr lang="en-US"/>
+          </a:p>
+        </p:txBody>
       </p:sp>
       <p:sp>
         <p:nvSpPr>
@@ -18046,7 +19229,7 @@
           </a:bodyPr>
           <a:lstStyle/>
           <a:p>
-            <a:pPr algn="ctr" indent="0" marL="0">
+            <a:pPr marL="0" indent="0" algn="ctr">
               <a:buNone/>
             </a:pPr>
             <a:r>
@@ -18087,7 +19270,7 @@
           </a:bodyPr>
           <a:lstStyle/>
           <a:p>
-            <a:pPr algn="ctr" indent="0" marL="0">
+            <a:pPr marL="0" indent="0" algn="ctr">
               <a:buNone/>
             </a:pPr>
             <a:r>
@@ -18133,6 +19316,13 @@
             <a:prstDash val="solid"/>
           </a:ln>
         </p:spPr>
+        <p:txBody>
+          <a:bodyPr/>
+          <a:lstStyle/>
+          <a:p>
+            <a:endParaRPr lang="en-US"/>
+          </a:p>
+        </p:txBody>
       </p:sp>
       <p:sp>
         <p:nvSpPr>
@@ -18157,7 +19347,7 @@
           </a:bodyPr>
           <a:lstStyle/>
           <a:p>
-            <a:pPr algn="l" indent="0" marL="0">
+            <a:pPr marL="0" indent="0" algn="l">
               <a:buNone/>
             </a:pPr>
             <a:r>
@@ -18198,7 +19388,7 @@
           </a:bodyPr>
           <a:lstStyle/>
           <a:p>
-            <a:pPr algn="l" indent="0" marL="0">
+            <a:pPr marL="0" indent="0" algn="l">
               <a:buNone/>
             </a:pPr>
             <a:r>
@@ -18218,7 +19408,7 @@
       </p:sp>
       <p:sp>
         <p:nvSpPr>
-          <p:cNvPr id="25" name="Slide Number Placeholder 0"/>
+          <p:cNvPr id="29" name="Slide Number Placeholder 0"/>
           <p:cNvSpPr>
             <a:spLocks noGrp="1"/>
           </p:cNvSpPr>
@@ -18236,7 +19426,7 @@
           </a:prstGeom>
           <a:extLst>
             <a:ext uri="{C572A759-6A51-4108-AA02-DFA0A04FC94B}">
-              <ma14:wrappingTextBoxFlag xmlns:ma14="http://schemas.microsoft.com/office/mac/drawingml/2011/main" val="0"/>
+              <ma14:wrappingTextBoxFlag xmlns:ma14="http://schemas.microsoft.com/office/mac/drawingml/2011/main" xmlns="" val="0"/>
             </a:ext>
           </a:extLst>
         </p:spPr>
@@ -18257,7 +19447,7 @@
           <a:p>
             <a:pPr algn="l"/>
             <a:fld id="{F7021451-1387-4CA6-816F-3879F97B5CBC}" type="slidenum">
-              <a:rPr b="0" lang="en-US"/>
+              <a:rPr lang="en-US" b="0"/>
               <a:t>6</a:t>
             </a:fld>
             <a:endParaRPr lang="en-US"/>
@@ -18312,11 +19502,11 @@
           </a:bodyPr>
           <a:lstStyle/>
           <a:p>
-            <a:pPr algn="l" indent="0" marL="0">
-              <a:buNone/>
-            </a:pPr>
-            <a:r>
-              <a:rPr lang="en-US" sz="900" b="1" spc="150" kern="0" dirty="0">
+            <a:pPr marL="0" indent="0" algn="l">
+              <a:buNone/>
+            </a:pPr>
+            <a:r>
+              <a:rPr lang="en-US" sz="900" b="1" kern="0" spc="150" dirty="0">
                 <a:solidFill>
                   <a:srgbClr val="38BDF8"/>
                 </a:solidFill>
@@ -18353,7 +19543,7 @@
           </a:bodyPr>
           <a:lstStyle/>
           <a:p>
-            <a:pPr algn="l" indent="0" marL="0">
+            <a:pPr marL="0" indent="0" algn="l">
               <a:buNone/>
             </a:pPr>
             <a:r>
@@ -18394,7 +19584,7 @@
           </a:bodyPr>
           <a:lstStyle/>
           <a:p>
-            <a:pPr algn="l" indent="0" marL="0">
+            <a:pPr marL="0" indent="0" algn="l">
               <a:buNone/>
             </a:pPr>
             <a:r>
@@ -18440,6 +19630,13 @@
             <a:prstDash val="solid"/>
           </a:ln>
         </p:spPr>
+        <p:txBody>
+          <a:bodyPr/>
+          <a:lstStyle/>
+          <a:p>
+            <a:endParaRPr lang="en-US"/>
+          </a:p>
+        </p:txBody>
       </p:sp>
       <p:sp>
         <p:nvSpPr>
@@ -18464,11 +19661,11 @@
           </a:bodyPr>
           <a:lstStyle/>
           <a:p>
-            <a:pPr algn="l" indent="0" marL="0">
-              <a:buNone/>
-            </a:pPr>
-            <a:r>
-              <a:rPr lang="en-US" sz="1000" b="1" spc="100" kern="0" dirty="0">
+            <a:pPr marL="0" indent="0" algn="l">
+              <a:buNone/>
+            </a:pPr>
+            <a:r>
+              <a:rPr lang="en-US" sz="1000" b="1" kern="0" spc="100" dirty="0">
                 <a:solidFill>
                   <a:srgbClr val="38BDF8"/>
                 </a:solidFill>
@@ -18505,7 +19702,7 @@
           </a:bodyPr>
           <a:lstStyle/>
           <a:p>
-            <a:pPr algn="l" indent="0" marL="0">
+            <a:pPr marL="0" indent="0" algn="l">
               <a:buNone/>
             </a:pPr>
             <a:r>
@@ -18546,7 +19743,7 @@
           </a:bodyPr>
           <a:lstStyle/>
           <a:p>
-            <a:pPr algn="l" indent="0" marL="0">
+            <a:pPr marL="0" indent="0" algn="l">
               <a:buNone/>
             </a:pPr>
             <a:r>
@@ -18587,7 +19784,7 @@
           </a:bodyPr>
           <a:lstStyle/>
           <a:p>
-            <a:pPr algn="l" indent="0" marL="0">
+            <a:pPr marL="0" indent="0" algn="l">
               <a:buNone/>
             </a:pPr>
             <a:r>
@@ -18628,7 +19825,7 @@
           </a:bodyPr>
           <a:lstStyle/>
           <a:p>
-            <a:pPr algn="l" indent="0" marL="0">
+            <a:pPr marL="0" indent="0" algn="l">
               <a:buNone/>
             </a:pPr>
             <a:r>
@@ -18669,7 +19866,7 @@
           </a:bodyPr>
           <a:lstStyle/>
           <a:p>
-            <a:pPr algn="l" indent="0" marL="0">
+            <a:pPr marL="0" indent="0" algn="l">
               <a:buNone/>
             </a:pPr>
             <a:r>
@@ -18710,7 +19907,7 @@
           </a:bodyPr>
           <a:lstStyle/>
           <a:p>
-            <a:pPr algn="l" indent="0" marL="0">
+            <a:pPr marL="0" indent="0" algn="l">
               <a:buNone/>
             </a:pPr>
             <a:r>
@@ -18751,7 +19948,7 @@
           </a:bodyPr>
           <a:lstStyle/>
           <a:p>
-            <a:pPr algn="l" indent="0" marL="0">
+            <a:pPr marL="0" indent="0" algn="l">
               <a:buNone/>
             </a:pPr>
             <a:r>
@@ -18792,7 +19989,7 @@
           </a:bodyPr>
           <a:lstStyle/>
           <a:p>
-            <a:pPr algn="l" indent="0" marL="0">
+            <a:pPr marL="0" indent="0" algn="l">
               <a:buNone/>
             </a:pPr>
             <a:r>
@@ -18833,7 +20030,7 @@
           </a:bodyPr>
           <a:lstStyle/>
           <a:p>
-            <a:pPr algn="l" indent="0" marL="0">
+            <a:pPr marL="0" indent="0" algn="l">
               <a:buNone/>
             </a:pPr>
             <a:r>
@@ -18874,7 +20071,7 @@
           </a:bodyPr>
           <a:lstStyle/>
           <a:p>
-            <a:pPr algn="l" indent="0" marL="0">
+            <a:pPr marL="0" indent="0" algn="l">
               <a:buNone/>
             </a:pPr>
             <a:r>
@@ -18915,7 +20112,7 @@
           </a:bodyPr>
           <a:lstStyle/>
           <a:p>
-            <a:pPr algn="l" indent="0" marL="0">
+            <a:pPr marL="0" indent="0" algn="l">
               <a:buNone/>
             </a:pPr>
             <a:r>
@@ -18956,7 +20153,7 @@
           </a:bodyPr>
           <a:lstStyle/>
           <a:p>
-            <a:pPr algn="l" indent="0" marL="0">
+            <a:pPr marL="0" indent="0" algn="l">
               <a:buNone/>
             </a:pPr>
             <a:r>
@@ -19002,6 +20199,13 @@
             <a:prstDash val="solid"/>
           </a:ln>
         </p:spPr>
+        <p:txBody>
+          <a:bodyPr/>
+          <a:lstStyle/>
+          <a:p>
+            <a:endParaRPr lang="en-US"/>
+          </a:p>
+        </p:txBody>
       </p:sp>
       <p:sp>
         <p:nvSpPr>
@@ -19026,11 +20230,11 @@
           </a:bodyPr>
           <a:lstStyle/>
           <a:p>
-            <a:pPr algn="l" indent="0" marL="0">
-              <a:buNone/>
-            </a:pPr>
-            <a:r>
-              <a:rPr lang="en-US" sz="1000" b="1" spc="100" kern="0" dirty="0">
+            <a:pPr marL="0" indent="0" algn="l">
+              <a:buNone/>
+            </a:pPr>
+            <a:r>
+              <a:rPr lang="en-US" sz="1000" b="1" kern="0" spc="100" dirty="0">
                 <a:solidFill>
                   <a:srgbClr val="38BDF8"/>
                 </a:solidFill>
@@ -19072,6 +20276,13 @@
             <a:prstDash val="solid"/>
           </a:ln>
         </p:spPr>
+        <p:txBody>
+          <a:bodyPr/>
+          <a:lstStyle/>
+          <a:p>
+            <a:endParaRPr lang="en-US"/>
+          </a:p>
+        </p:txBody>
       </p:sp>
       <p:sp>
         <p:nvSpPr>
@@ -19097,6 +20308,13 @@
             <a:tailEnd type="none"/>
           </a:ln>
         </p:spPr>
+        <p:txBody>
+          <a:bodyPr/>
+          <a:lstStyle/>
+          <a:p>
+            <a:endParaRPr lang="en-US"/>
+          </a:p>
+        </p:txBody>
       </p:sp>
       <p:sp>
         <p:nvSpPr>
@@ -19122,6 +20340,13 @@
             <a:tailEnd type="none"/>
           </a:ln>
         </p:spPr>
+        <p:txBody>
+          <a:bodyPr/>
+          <a:lstStyle/>
+          <a:p>
+            <a:endParaRPr lang="en-US"/>
+          </a:p>
+        </p:txBody>
       </p:sp>
       <p:sp>
         <p:nvSpPr>
@@ -19147,6 +20372,13 @@
             <a:tailEnd type="none"/>
           </a:ln>
         </p:spPr>
+        <p:txBody>
+          <a:bodyPr/>
+          <a:lstStyle/>
+          <a:p>
+            <a:endParaRPr lang="en-US"/>
+          </a:p>
+        </p:txBody>
       </p:sp>
       <p:sp>
         <p:nvSpPr>
@@ -19171,7 +20403,7 @@
           </a:bodyPr>
           <a:lstStyle/>
           <a:p>
-            <a:pPr algn="ctr" indent="0" marL="0">
+            <a:pPr marL="0" indent="0" algn="ctr">
               <a:buNone/>
             </a:pPr>
             <a:r>
@@ -19213,6 +20445,13 @@
             <a:tailEnd type="none"/>
           </a:ln>
         </p:spPr>
+        <p:txBody>
+          <a:bodyPr/>
+          <a:lstStyle/>
+          <a:p>
+            <a:endParaRPr lang="en-US"/>
+          </a:p>
+        </p:txBody>
       </p:sp>
       <p:sp>
         <p:nvSpPr>
@@ -19242,6 +20481,13 @@
             <a:prstDash val="solid"/>
           </a:ln>
         </p:spPr>
+        <p:txBody>
+          <a:bodyPr/>
+          <a:lstStyle/>
+          <a:p>
+            <a:endParaRPr lang="en-US"/>
+          </a:p>
+        </p:txBody>
       </p:sp>
       <p:sp>
         <p:nvSpPr>
@@ -19267,6 +20513,13 @@
             <a:tailEnd type="none"/>
           </a:ln>
         </p:spPr>
+        <p:txBody>
+          <a:bodyPr/>
+          <a:lstStyle/>
+          <a:p>
+            <a:endParaRPr lang="en-US"/>
+          </a:p>
+        </p:txBody>
       </p:sp>
       <p:sp>
         <p:nvSpPr>
@@ -19292,6 +20545,13 @@
             <a:tailEnd type="none"/>
           </a:ln>
         </p:spPr>
+        <p:txBody>
+          <a:bodyPr/>
+          <a:lstStyle/>
+          <a:p>
+            <a:endParaRPr lang="en-US"/>
+          </a:p>
+        </p:txBody>
       </p:sp>
       <p:sp>
         <p:nvSpPr>
@@ -19317,6 +20577,13 @@
             <a:tailEnd type="none"/>
           </a:ln>
         </p:spPr>
+        <p:txBody>
+          <a:bodyPr/>
+          <a:lstStyle/>
+          <a:p>
+            <a:endParaRPr lang="en-US"/>
+          </a:p>
+        </p:txBody>
       </p:sp>
       <p:sp>
         <p:nvSpPr>
@@ -19341,7 +20608,7 @@
           </a:bodyPr>
           <a:lstStyle/>
           <a:p>
-            <a:pPr algn="ctr" indent="0" marL="0">
+            <a:pPr marL="0" indent="0" algn="ctr">
               <a:buNone/>
             </a:pPr>
             <a:r>
@@ -19383,6 +20650,13 @@
             <a:tailEnd type="none"/>
           </a:ln>
         </p:spPr>
+        <p:txBody>
+          <a:bodyPr/>
+          <a:lstStyle/>
+          <a:p>
+            <a:endParaRPr lang="en-US"/>
+          </a:p>
+        </p:txBody>
       </p:sp>
       <p:sp>
         <p:nvSpPr>
@@ -19412,6 +20686,13 @@
             <a:prstDash val="solid"/>
           </a:ln>
         </p:spPr>
+        <p:txBody>
+          <a:bodyPr/>
+          <a:lstStyle/>
+          <a:p>
+            <a:endParaRPr lang="en-US"/>
+          </a:p>
+        </p:txBody>
       </p:sp>
       <p:sp>
         <p:nvSpPr>
@@ -19437,6 +20718,13 @@
             <a:tailEnd type="none"/>
           </a:ln>
         </p:spPr>
+        <p:txBody>
+          <a:bodyPr/>
+          <a:lstStyle/>
+          <a:p>
+            <a:endParaRPr lang="en-US"/>
+          </a:p>
+        </p:txBody>
       </p:sp>
       <p:sp>
         <p:nvSpPr>
@@ -19462,6 +20750,13 @@
             <a:tailEnd type="none"/>
           </a:ln>
         </p:spPr>
+        <p:txBody>
+          <a:bodyPr/>
+          <a:lstStyle/>
+          <a:p>
+            <a:endParaRPr lang="en-US"/>
+          </a:p>
+        </p:txBody>
       </p:sp>
       <p:sp>
         <p:nvSpPr>
@@ -19487,6 +20782,13 @@
             <a:tailEnd type="none"/>
           </a:ln>
         </p:spPr>
+        <p:txBody>
+          <a:bodyPr/>
+          <a:lstStyle/>
+          <a:p>
+            <a:endParaRPr lang="en-US"/>
+          </a:p>
+        </p:txBody>
       </p:sp>
       <p:sp>
         <p:nvSpPr>
@@ -19511,7 +20813,7 @@
           </a:bodyPr>
           <a:lstStyle/>
           <a:p>
-            <a:pPr algn="ctr" indent="0" marL="0">
+            <a:pPr marL="0" indent="0" algn="ctr">
               <a:buNone/>
             </a:pPr>
             <a:r>
@@ -19553,6 +20855,13 @@
             <a:tailEnd type="none"/>
           </a:ln>
         </p:spPr>
+        <p:txBody>
+          <a:bodyPr/>
+          <a:lstStyle/>
+          <a:p>
+            <a:endParaRPr lang="en-US"/>
+          </a:p>
+        </p:txBody>
       </p:sp>
       <p:sp>
         <p:nvSpPr>
@@ -19582,6 +20891,13 @@
             <a:prstDash val="solid"/>
           </a:ln>
         </p:spPr>
+        <p:txBody>
+          <a:bodyPr/>
+          <a:lstStyle/>
+          <a:p>
+            <a:endParaRPr lang="en-US"/>
+          </a:p>
+        </p:txBody>
       </p:sp>
       <p:sp>
         <p:nvSpPr>
@@ -19607,6 +20923,13 @@
             <a:tailEnd type="none"/>
           </a:ln>
         </p:spPr>
+        <p:txBody>
+          <a:bodyPr/>
+          <a:lstStyle/>
+          <a:p>
+            <a:endParaRPr lang="en-US"/>
+          </a:p>
+        </p:txBody>
       </p:sp>
       <p:sp>
         <p:nvSpPr>
@@ -19632,6 +20955,13 @@
             <a:tailEnd type="none"/>
           </a:ln>
         </p:spPr>
+        <p:txBody>
+          <a:bodyPr/>
+          <a:lstStyle/>
+          <a:p>
+            <a:endParaRPr lang="en-US"/>
+          </a:p>
+        </p:txBody>
       </p:sp>
       <p:sp>
         <p:nvSpPr>
@@ -19657,6 +20987,13 @@
             <a:tailEnd type="none"/>
           </a:ln>
         </p:spPr>
+        <p:txBody>
+          <a:bodyPr/>
+          <a:lstStyle/>
+          <a:p>
+            <a:endParaRPr lang="en-US"/>
+          </a:p>
+        </p:txBody>
       </p:sp>
       <p:sp>
         <p:nvSpPr>
@@ -19681,7 +21018,7 @@
           </a:bodyPr>
           <a:lstStyle/>
           <a:p>
-            <a:pPr algn="ctr" indent="0" marL="0">
+            <a:pPr marL="0" indent="0" algn="ctr">
               <a:buNone/>
             </a:pPr>
             <a:r>
@@ -19723,6 +21060,13 @@
             <a:tailEnd type="none"/>
           </a:ln>
         </p:spPr>
+        <p:txBody>
+          <a:bodyPr/>
+          <a:lstStyle/>
+          <a:p>
+            <a:endParaRPr lang="en-US"/>
+          </a:p>
+        </p:txBody>
       </p:sp>
       <p:sp>
         <p:nvSpPr>
@@ -19752,6 +21096,13 @@
             <a:prstDash val="solid"/>
           </a:ln>
         </p:spPr>
+        <p:txBody>
+          <a:bodyPr/>
+          <a:lstStyle/>
+          <a:p>
+            <a:endParaRPr lang="en-US"/>
+          </a:p>
+        </p:txBody>
       </p:sp>
       <p:sp>
         <p:nvSpPr>
@@ -19777,6 +21128,13 @@
             <a:tailEnd type="none"/>
           </a:ln>
         </p:spPr>
+        <p:txBody>
+          <a:bodyPr/>
+          <a:lstStyle/>
+          <a:p>
+            <a:endParaRPr lang="en-US"/>
+          </a:p>
+        </p:txBody>
       </p:sp>
       <p:sp>
         <p:nvSpPr>
@@ -19802,6 +21160,13 @@
             <a:tailEnd type="none"/>
           </a:ln>
         </p:spPr>
+        <p:txBody>
+          <a:bodyPr/>
+          <a:lstStyle/>
+          <a:p>
+            <a:endParaRPr lang="en-US"/>
+          </a:p>
+        </p:txBody>
       </p:sp>
       <p:sp>
         <p:nvSpPr>
@@ -19827,6 +21192,13 @@
             <a:tailEnd type="none"/>
           </a:ln>
         </p:spPr>
+        <p:txBody>
+          <a:bodyPr/>
+          <a:lstStyle/>
+          <a:p>
+            <a:endParaRPr lang="en-US"/>
+          </a:p>
+        </p:txBody>
       </p:sp>
       <p:sp>
         <p:nvSpPr>
@@ -19851,7 +21223,7 @@
           </a:bodyPr>
           <a:lstStyle/>
           <a:p>
-            <a:pPr algn="ctr" indent="0" marL="0">
+            <a:pPr marL="0" indent="0" algn="ctr">
               <a:buNone/>
             </a:pPr>
             <a:r>
@@ -19897,6 +21269,13 @@
             <a:prstDash val="solid"/>
           </a:ln>
         </p:spPr>
+        <p:txBody>
+          <a:bodyPr/>
+          <a:lstStyle/>
+          <a:p>
+            <a:endParaRPr lang="en-US"/>
+          </a:p>
+        </p:txBody>
       </p:sp>
       <p:sp>
         <p:nvSpPr>
@@ -19921,7 +21300,7 @@
           </a:bodyPr>
           <a:lstStyle/>
           <a:p>
-            <a:pPr algn="ctr" indent="0" marL="0">
+            <a:pPr marL="0" indent="0" algn="ctr">
               <a:buNone/>
             </a:pPr>
             <a:r>
@@ -19938,7 +21317,7 @@
             <a:endParaRPr lang="en-US" sz="1200" dirty="0"/>
           </a:p>
           <a:p>
-            <a:pPr algn="ctr" indent="0" marL="0">
+            <a:pPr marL="0" indent="0" algn="ctr">
               <a:buNone/>
             </a:pPr>
             <a:r>
@@ -19980,6 +21359,13 @@
             <a:tailEnd type="none"/>
           </a:ln>
         </p:spPr>
+        <p:txBody>
+          <a:bodyPr/>
+          <a:lstStyle/>
+          <a:p>
+            <a:endParaRPr lang="en-US"/>
+          </a:p>
+        </p:txBody>
       </p:sp>
       <p:sp>
         <p:nvSpPr>
@@ -20004,7 +21390,7 @@
           </a:bodyPr>
           <a:lstStyle/>
           <a:p>
-            <a:pPr algn="l" indent="0" marL="0">
+            <a:pPr marL="0" indent="0" algn="l">
               <a:buNone/>
             </a:pPr>
             <a:r>
@@ -20045,7 +21431,7 @@
           </a:bodyPr>
           <a:lstStyle/>
           <a:p>
-            <a:pPr algn="l" indent="0" marL="0">
+            <a:pPr marL="0" indent="0" algn="l">
               <a:buNone/>
             </a:pPr>
             <a:r>
@@ -20065,7 +21451,7 @@
       </p:sp>
       <p:sp>
         <p:nvSpPr>
-          <p:cNvPr id="25" name="Slide Number Placeholder 0"/>
+          <p:cNvPr id="55" name="Slide Number Placeholder 0"/>
           <p:cNvSpPr>
             <a:spLocks noGrp="1"/>
           </p:cNvSpPr>
@@ -20083,7 +21469,7 @@
           </a:prstGeom>
           <a:extLst>
             <a:ext uri="{C572A759-6A51-4108-AA02-DFA0A04FC94B}">
-              <ma14:wrappingTextBoxFlag xmlns:ma14="http://schemas.microsoft.com/office/mac/drawingml/2011/main" val="0"/>
+              <ma14:wrappingTextBoxFlag xmlns:ma14="http://schemas.microsoft.com/office/mac/drawingml/2011/main" xmlns="" val="0"/>
             </a:ext>
           </a:extLst>
         </p:spPr>
@@ -20104,7 +21490,7 @@
           <a:p>
             <a:pPr algn="l"/>
             <a:fld id="{F7021451-1387-4CA6-816F-3879F97B5CBC}" type="slidenum">
-              <a:rPr b="0" lang="en-US"/>
+              <a:rPr lang="en-US" b="0"/>
               <a:t>7</a:t>
             </a:fld>
             <a:endParaRPr lang="en-US"/>
@@ -20159,11 +21545,11 @@
           </a:bodyPr>
           <a:lstStyle/>
           <a:p>
-            <a:pPr algn="l" indent="0" marL="0">
-              <a:buNone/>
-            </a:pPr>
-            <a:r>
-              <a:rPr lang="en-US" sz="900" b="1" spc="150" kern="0" dirty="0">
+            <a:pPr marL="0" indent="0" algn="l">
+              <a:buNone/>
+            </a:pPr>
+            <a:r>
+              <a:rPr lang="en-US" sz="900" b="1" kern="0" spc="150" dirty="0">
                 <a:solidFill>
                   <a:srgbClr val="38BDF8"/>
                 </a:solidFill>
@@ -20200,7 +21586,7 @@
           </a:bodyPr>
           <a:lstStyle/>
           <a:p>
-            <a:pPr algn="l" indent="0" marL="0">
+            <a:pPr marL="0" indent="0" algn="l">
               <a:buNone/>
             </a:pPr>
             <a:r>
@@ -20241,7 +21627,7 @@
           </a:bodyPr>
           <a:lstStyle/>
           <a:p>
-            <a:pPr algn="l" indent="0" marL="0">
+            <a:pPr marL="0" indent="0" algn="l">
               <a:buNone/>
             </a:pPr>
             <a:r>
@@ -20287,6 +21673,13 @@
             <a:prstDash val="solid"/>
           </a:ln>
         </p:spPr>
+        <p:txBody>
+          <a:bodyPr/>
+          <a:lstStyle/>
+          <a:p>
+            <a:endParaRPr lang="en-US"/>
+          </a:p>
+        </p:txBody>
       </p:sp>
       <p:sp>
         <p:nvSpPr>
@@ -20311,7 +21704,7 @@
           </a:bodyPr>
           <a:lstStyle/>
           <a:p>
-            <a:pPr algn="l" indent="0" marL="0">
+            <a:pPr marL="0" indent="0" algn="l">
               <a:buNone/>
             </a:pPr>
             <a:r>
@@ -20352,11 +21745,11 @@
           </a:bodyPr>
           <a:lstStyle/>
           <a:p>
-            <a:pPr algn="l" indent="0" marL="0">
-              <a:buNone/>
-            </a:pPr>
-            <a:r>
-              <a:rPr lang="en-US" sz="800" b="1" spc="100" kern="0" dirty="0">
+            <a:pPr marL="0" indent="0" algn="l">
+              <a:buNone/>
+            </a:pPr>
+            <a:r>
+              <a:rPr lang="en-US" sz="800" b="1" kern="0" spc="100" dirty="0">
                 <a:solidFill>
                   <a:srgbClr val="9DB3C8"/>
                 </a:solidFill>
@@ -20398,6 +21791,13 @@
             <a:prstDash val="solid"/>
           </a:ln>
         </p:spPr>
+        <p:txBody>
+          <a:bodyPr/>
+          <a:lstStyle/>
+          <a:p>
+            <a:endParaRPr lang="en-US"/>
+          </a:p>
+        </p:txBody>
       </p:sp>
       <p:sp>
         <p:nvSpPr>
@@ -20422,7 +21822,7 @@
           </a:bodyPr>
           <a:lstStyle/>
           <a:p>
-            <a:pPr algn="l" indent="0" marL="0">
+            <a:pPr marL="0" indent="0" algn="l">
               <a:buNone/>
             </a:pPr>
             <a:r>
@@ -20463,11 +21863,11 @@
           </a:bodyPr>
           <a:lstStyle/>
           <a:p>
-            <a:pPr algn="l" indent="0" marL="0">
-              <a:buNone/>
-            </a:pPr>
-            <a:r>
-              <a:rPr lang="en-US" sz="800" b="1" spc="100" kern="0" dirty="0">
+            <a:pPr marL="0" indent="0" algn="l">
+              <a:buNone/>
+            </a:pPr>
+            <a:r>
+              <a:rPr lang="en-US" sz="800" b="1" kern="0" spc="100" dirty="0">
                 <a:solidFill>
                   <a:srgbClr val="9DB3C8"/>
                 </a:solidFill>
@@ -20509,6 +21909,13 @@
             <a:prstDash val="solid"/>
           </a:ln>
         </p:spPr>
+        <p:txBody>
+          <a:bodyPr/>
+          <a:lstStyle/>
+          <a:p>
+            <a:endParaRPr lang="en-US"/>
+          </a:p>
+        </p:txBody>
       </p:sp>
       <p:sp>
         <p:nvSpPr>
@@ -20533,7 +21940,7 @@
           </a:bodyPr>
           <a:lstStyle/>
           <a:p>
-            <a:pPr algn="l" indent="0" marL="0">
+            <a:pPr marL="0" indent="0" algn="l">
               <a:buNone/>
             </a:pPr>
             <a:r>
@@ -20574,11 +21981,11 @@
           </a:bodyPr>
           <a:lstStyle/>
           <a:p>
-            <a:pPr algn="l" indent="0" marL="0">
-              <a:buNone/>
-            </a:pPr>
-            <a:r>
-              <a:rPr lang="en-US" sz="800" b="1" spc="100" kern="0" dirty="0">
+            <a:pPr marL="0" indent="0" algn="l">
+              <a:buNone/>
+            </a:pPr>
+            <a:r>
+              <a:rPr lang="en-US" sz="800" b="1" kern="0" spc="100" dirty="0">
                 <a:solidFill>
                   <a:srgbClr val="9DB3C8"/>
                 </a:solidFill>
@@ -20620,6 +22027,13 @@
             <a:prstDash val="solid"/>
           </a:ln>
         </p:spPr>
+        <p:txBody>
+          <a:bodyPr/>
+          <a:lstStyle/>
+          <a:p>
+            <a:endParaRPr lang="en-US"/>
+          </a:p>
+        </p:txBody>
       </p:sp>
       <p:sp>
         <p:nvSpPr>
@@ -20644,7 +22058,7 @@
           </a:bodyPr>
           <a:lstStyle/>
           <a:p>
-            <a:pPr algn="l" indent="0" marL="0">
+            <a:pPr marL="0" indent="0" algn="l">
               <a:buNone/>
             </a:pPr>
             <a:r>
@@ -20685,11 +22099,11 @@
           </a:bodyPr>
           <a:lstStyle/>
           <a:p>
-            <a:pPr algn="l" indent="0" marL="0">
-              <a:buNone/>
-            </a:pPr>
-            <a:r>
-              <a:rPr lang="en-US" sz="800" b="1" spc="100" kern="0" dirty="0">
+            <a:pPr marL="0" indent="0" algn="l">
+              <a:buNone/>
+            </a:pPr>
+            <a:r>
+              <a:rPr lang="en-US" sz="800" b="1" kern="0" spc="100" dirty="0">
                 <a:solidFill>
                   <a:srgbClr val="9DB3C8"/>
                 </a:solidFill>
@@ -20727,6 +22141,13 @@
             <a:prstDash val="solid"/>
           </a:ln>
         </p:spPr>
+        <p:txBody>
+          <a:bodyPr/>
+          <a:lstStyle/>
+          <a:p>
+            <a:endParaRPr lang="en-US"/>
+          </a:p>
+        </p:txBody>
       </p:sp>
       <p:sp>
         <p:nvSpPr>
@@ -20751,7 +22172,7 @@
           </a:bodyPr>
           <a:lstStyle/>
           <a:p>
-            <a:pPr algn="l" indent="0" marL="0">
+            <a:pPr marL="0" indent="0" algn="l">
               <a:buNone/>
             </a:pPr>
             <a:r>
@@ -20793,6 +22214,13 @@
             <a:prstDash val="solid"/>
           </a:ln>
         </p:spPr>
+        <p:txBody>
+          <a:bodyPr/>
+          <a:lstStyle/>
+          <a:p>
+            <a:endParaRPr lang="en-US"/>
+          </a:p>
+        </p:txBody>
       </p:sp>
       <p:sp>
         <p:nvSpPr>
@@ -20817,7 +22245,7 @@
           </a:bodyPr>
           <a:lstStyle/>
           <a:p>
-            <a:pPr algn="ctr" indent="0" marL="0">
+            <a:pPr marL="0" indent="0" algn="ctr">
               <a:buNone/>
             </a:pPr>
             <a:r>
@@ -20859,6 +22287,13 @@
             <a:prstDash val="solid"/>
           </a:ln>
         </p:spPr>
+        <p:txBody>
+          <a:bodyPr/>
+          <a:lstStyle/>
+          <a:p>
+            <a:endParaRPr lang="en-US"/>
+          </a:p>
+        </p:txBody>
       </p:sp>
       <p:sp>
         <p:nvSpPr>
@@ -20883,7 +22318,7 @@
           </a:bodyPr>
           <a:lstStyle/>
           <a:p>
-            <a:pPr algn="ctr" indent="0" marL="0">
+            <a:pPr marL="0" indent="0" algn="ctr">
               <a:buNone/>
             </a:pPr>
             <a:r>
@@ -20925,6 +22360,13 @@
             <a:prstDash val="solid"/>
           </a:ln>
         </p:spPr>
+        <p:txBody>
+          <a:bodyPr/>
+          <a:lstStyle/>
+          <a:p>
+            <a:endParaRPr lang="en-US"/>
+          </a:p>
+        </p:txBody>
       </p:sp>
       <p:sp>
         <p:nvSpPr>
@@ -20949,7 +22391,7 @@
           </a:bodyPr>
           <a:lstStyle/>
           <a:p>
-            <a:pPr algn="ctr" indent="0" marL="0">
+            <a:pPr marL="0" indent="0" algn="ctr">
               <a:buNone/>
             </a:pPr>
             <a:r>
@@ -20991,6 +22433,13 @@
             <a:prstDash val="solid"/>
           </a:ln>
         </p:spPr>
+        <p:txBody>
+          <a:bodyPr/>
+          <a:lstStyle/>
+          <a:p>
+            <a:endParaRPr lang="en-US"/>
+          </a:p>
+        </p:txBody>
       </p:sp>
       <p:sp>
         <p:nvSpPr>
@@ -21015,7 +22464,7 @@
           </a:bodyPr>
           <a:lstStyle/>
           <a:p>
-            <a:pPr algn="ctr" indent="0" marL="0">
+            <a:pPr marL="0" indent="0" algn="ctr">
               <a:buNone/>
             </a:pPr>
             <a:r>
@@ -21057,6 +22506,13 @@
             <a:prstDash val="solid"/>
           </a:ln>
         </p:spPr>
+        <p:txBody>
+          <a:bodyPr/>
+          <a:lstStyle/>
+          <a:p>
+            <a:endParaRPr lang="en-US"/>
+          </a:p>
+        </p:txBody>
       </p:sp>
       <p:sp>
         <p:nvSpPr>
@@ -21081,7 +22537,7 @@
           </a:bodyPr>
           <a:lstStyle/>
           <a:p>
-            <a:pPr algn="l" indent="0" marL="0">
+            <a:pPr marL="0" indent="0" algn="l">
               <a:buNone/>
             </a:pPr>
             <a:r>
@@ -21123,6 +22579,13 @@
             <a:prstDash val="solid"/>
           </a:ln>
         </p:spPr>
+        <p:txBody>
+          <a:bodyPr/>
+          <a:lstStyle/>
+          <a:p>
+            <a:endParaRPr lang="en-US"/>
+          </a:p>
+        </p:txBody>
       </p:sp>
       <p:sp>
         <p:nvSpPr>
@@ -21147,7 +22610,7 @@
           </a:bodyPr>
           <a:lstStyle/>
           <a:p>
-            <a:pPr algn="ctr" indent="0" marL="0">
+            <a:pPr marL="0" indent="0" algn="ctr">
               <a:buNone/>
             </a:pPr>
             <a:r>
@@ -21189,6 +22652,13 @@
             <a:prstDash val="solid"/>
           </a:ln>
         </p:spPr>
+        <p:txBody>
+          <a:bodyPr/>
+          <a:lstStyle/>
+          <a:p>
+            <a:endParaRPr lang="en-US"/>
+          </a:p>
+        </p:txBody>
       </p:sp>
       <p:sp>
         <p:nvSpPr>
@@ -21213,7 +22683,7 @@
           </a:bodyPr>
           <a:lstStyle/>
           <a:p>
-            <a:pPr algn="ctr" indent="0" marL="0">
+            <a:pPr marL="0" indent="0" algn="ctr">
               <a:buNone/>
             </a:pPr>
             <a:r>
@@ -21255,6 +22725,13 @@
             <a:prstDash val="solid"/>
           </a:ln>
         </p:spPr>
+        <p:txBody>
+          <a:bodyPr/>
+          <a:lstStyle/>
+          <a:p>
+            <a:endParaRPr lang="en-US"/>
+          </a:p>
+        </p:txBody>
       </p:sp>
       <p:sp>
         <p:nvSpPr>
@@ -21279,7 +22756,7 @@
           </a:bodyPr>
           <a:lstStyle/>
           <a:p>
-            <a:pPr algn="ctr" indent="0" marL="0">
+            <a:pPr marL="0" indent="0" algn="ctr">
               <a:buNone/>
             </a:pPr>
             <a:r>
@@ -21321,6 +22798,13 @@
             <a:prstDash val="solid"/>
           </a:ln>
         </p:spPr>
+        <p:txBody>
+          <a:bodyPr/>
+          <a:lstStyle/>
+          <a:p>
+            <a:endParaRPr lang="en-US"/>
+          </a:p>
+        </p:txBody>
       </p:sp>
       <p:sp>
         <p:nvSpPr>
@@ -21345,7 +22829,7 @@
           </a:bodyPr>
           <a:lstStyle/>
           <a:p>
-            <a:pPr algn="ctr" indent="0" marL="0">
+            <a:pPr marL="0" indent="0" algn="ctr">
               <a:buNone/>
             </a:pPr>
             <a:r>
@@ -21387,6 +22871,13 @@
             <a:prstDash val="solid"/>
           </a:ln>
         </p:spPr>
+        <p:txBody>
+          <a:bodyPr/>
+          <a:lstStyle/>
+          <a:p>
+            <a:endParaRPr lang="en-US"/>
+          </a:p>
+        </p:txBody>
       </p:sp>
       <p:sp>
         <p:nvSpPr>
@@ -21411,7 +22902,7 @@
           </a:bodyPr>
           <a:lstStyle/>
           <a:p>
-            <a:pPr algn="l" indent="0" marL="0">
+            <a:pPr marL="0" indent="0" algn="l">
               <a:buNone/>
             </a:pPr>
             <a:r>
@@ -21453,6 +22944,13 @@
             <a:prstDash val="solid"/>
           </a:ln>
         </p:spPr>
+        <p:txBody>
+          <a:bodyPr/>
+          <a:lstStyle/>
+          <a:p>
+            <a:endParaRPr lang="en-US"/>
+          </a:p>
+        </p:txBody>
       </p:sp>
       <p:sp>
         <p:nvSpPr>
@@ -21477,7 +22975,7 @@
           </a:bodyPr>
           <a:lstStyle/>
           <a:p>
-            <a:pPr algn="ctr" indent="0" marL="0">
+            <a:pPr marL="0" indent="0" algn="ctr">
               <a:buNone/>
             </a:pPr>
             <a:r>
@@ -21519,6 +23017,13 @@
             <a:prstDash val="solid"/>
           </a:ln>
         </p:spPr>
+        <p:txBody>
+          <a:bodyPr/>
+          <a:lstStyle/>
+          <a:p>
+            <a:endParaRPr lang="en-US"/>
+          </a:p>
+        </p:txBody>
       </p:sp>
       <p:sp>
         <p:nvSpPr>
@@ -21543,7 +23048,7 @@
           </a:bodyPr>
           <a:lstStyle/>
           <a:p>
-            <a:pPr algn="ctr" indent="0" marL="0">
+            <a:pPr marL="0" indent="0" algn="ctr">
               <a:buNone/>
             </a:pPr>
             <a:r>
@@ -21585,6 +23090,13 @@
             <a:prstDash val="solid"/>
           </a:ln>
         </p:spPr>
+        <p:txBody>
+          <a:bodyPr/>
+          <a:lstStyle/>
+          <a:p>
+            <a:endParaRPr lang="en-US"/>
+          </a:p>
+        </p:txBody>
       </p:sp>
       <p:sp>
         <p:nvSpPr>
@@ -21609,7 +23121,7 @@
           </a:bodyPr>
           <a:lstStyle/>
           <a:p>
-            <a:pPr algn="ctr" indent="0" marL="0">
+            <a:pPr marL="0" indent="0" algn="ctr">
               <a:buNone/>
             </a:pPr>
             <a:r>
@@ -21651,6 +23163,13 @@
             <a:prstDash val="solid"/>
           </a:ln>
         </p:spPr>
+        <p:txBody>
+          <a:bodyPr/>
+          <a:lstStyle/>
+          <a:p>
+            <a:endParaRPr lang="en-US"/>
+          </a:p>
+        </p:txBody>
       </p:sp>
       <p:sp>
         <p:nvSpPr>
@@ -21675,7 +23194,7 @@
           </a:bodyPr>
           <a:lstStyle/>
           <a:p>
-            <a:pPr algn="ctr" indent="0" marL="0">
+            <a:pPr marL="0" indent="0" algn="ctr">
               <a:buNone/>
             </a:pPr>
             <a:r>
@@ -21717,6 +23236,13 @@
             <a:prstDash val="solid"/>
           </a:ln>
         </p:spPr>
+        <p:txBody>
+          <a:bodyPr/>
+          <a:lstStyle/>
+          <a:p>
+            <a:endParaRPr lang="en-US"/>
+          </a:p>
+        </p:txBody>
       </p:sp>
       <p:sp>
         <p:nvSpPr>
@@ -21741,7 +23267,7 @@
           </a:bodyPr>
           <a:lstStyle/>
           <a:p>
-            <a:pPr algn="l" indent="0" marL="0">
+            <a:pPr marL="0" indent="0" algn="l">
               <a:buNone/>
             </a:pPr>
             <a:r>
@@ -21783,6 +23309,13 @@
             <a:prstDash val="solid"/>
           </a:ln>
         </p:spPr>
+        <p:txBody>
+          <a:bodyPr/>
+          <a:lstStyle/>
+          <a:p>
+            <a:endParaRPr lang="en-US"/>
+          </a:p>
+        </p:txBody>
       </p:sp>
       <p:sp>
         <p:nvSpPr>
@@ -21807,7 +23340,7 @@
           </a:bodyPr>
           <a:lstStyle/>
           <a:p>
-            <a:pPr algn="ctr" indent="0" marL="0">
+            <a:pPr marL="0" indent="0" algn="ctr">
               <a:buNone/>
             </a:pPr>
             <a:r>
@@ -21849,6 +23382,13 @@
             <a:prstDash val="solid"/>
           </a:ln>
         </p:spPr>
+        <p:txBody>
+          <a:bodyPr/>
+          <a:lstStyle/>
+          <a:p>
+            <a:endParaRPr lang="en-US"/>
+          </a:p>
+        </p:txBody>
       </p:sp>
       <p:sp>
         <p:nvSpPr>
@@ -21873,7 +23413,7 @@
           </a:bodyPr>
           <a:lstStyle/>
           <a:p>
-            <a:pPr algn="ctr" indent="0" marL="0">
+            <a:pPr marL="0" indent="0" algn="ctr">
               <a:buNone/>
             </a:pPr>
             <a:r>
@@ -21915,6 +23455,13 @@
             <a:prstDash val="solid"/>
           </a:ln>
         </p:spPr>
+        <p:txBody>
+          <a:bodyPr/>
+          <a:lstStyle/>
+          <a:p>
+            <a:endParaRPr lang="en-US"/>
+          </a:p>
+        </p:txBody>
       </p:sp>
       <p:sp>
         <p:nvSpPr>
@@ -21939,7 +23486,7 @@
           </a:bodyPr>
           <a:lstStyle/>
           <a:p>
-            <a:pPr algn="ctr" indent="0" marL="0">
+            <a:pPr marL="0" indent="0" algn="ctr">
               <a:buNone/>
             </a:pPr>
             <a:r>
@@ -21981,6 +23528,13 @@
             <a:prstDash val="solid"/>
           </a:ln>
         </p:spPr>
+        <p:txBody>
+          <a:bodyPr/>
+          <a:lstStyle/>
+          <a:p>
+            <a:endParaRPr lang="en-US"/>
+          </a:p>
+        </p:txBody>
       </p:sp>
       <p:sp>
         <p:nvSpPr>
@@ -22005,7 +23559,7 @@
           </a:bodyPr>
           <a:lstStyle/>
           <a:p>
-            <a:pPr algn="ctr" indent="0" marL="0">
+            <a:pPr marL="0" indent="0" algn="ctr">
               <a:buNone/>
             </a:pPr>
             <a:r>
@@ -22047,6 +23601,13 @@
             <a:prstDash val="solid"/>
           </a:ln>
         </p:spPr>
+        <p:txBody>
+          <a:bodyPr/>
+          <a:lstStyle/>
+          <a:p>
+            <a:endParaRPr lang="en-US"/>
+          </a:p>
+        </p:txBody>
       </p:sp>
       <p:sp>
         <p:nvSpPr>
@@ -22071,7 +23632,7 @@
           </a:bodyPr>
           <a:lstStyle/>
           <a:p>
-            <a:pPr algn="l" indent="0" marL="0">
+            <a:pPr marL="0" indent="0" algn="l">
               <a:buNone/>
             </a:pPr>
             <a:r>
@@ -22113,6 +23674,13 @@
             <a:prstDash val="solid"/>
           </a:ln>
         </p:spPr>
+        <p:txBody>
+          <a:bodyPr/>
+          <a:lstStyle/>
+          <a:p>
+            <a:endParaRPr lang="en-US"/>
+          </a:p>
+        </p:txBody>
       </p:sp>
       <p:sp>
         <p:nvSpPr>
@@ -22137,7 +23705,7 @@
           </a:bodyPr>
           <a:lstStyle/>
           <a:p>
-            <a:pPr algn="ctr" indent="0" marL="0">
+            <a:pPr marL="0" indent="0" algn="ctr">
               <a:buNone/>
             </a:pPr>
             <a:r>
@@ -22179,6 +23747,13 @@
             <a:prstDash val="solid"/>
           </a:ln>
         </p:spPr>
+        <p:txBody>
+          <a:bodyPr/>
+          <a:lstStyle/>
+          <a:p>
+            <a:endParaRPr lang="en-US"/>
+          </a:p>
+        </p:txBody>
       </p:sp>
       <p:sp>
         <p:nvSpPr>
@@ -22203,7 +23778,7 @@
           </a:bodyPr>
           <a:lstStyle/>
           <a:p>
-            <a:pPr algn="ctr" indent="0" marL="0">
+            <a:pPr marL="0" indent="0" algn="ctr">
               <a:buNone/>
             </a:pPr>
             <a:r>
@@ -22245,6 +23820,13 @@
             <a:prstDash val="solid"/>
           </a:ln>
         </p:spPr>
+        <p:txBody>
+          <a:bodyPr/>
+          <a:lstStyle/>
+          <a:p>
+            <a:endParaRPr lang="en-US"/>
+          </a:p>
+        </p:txBody>
       </p:sp>
       <p:sp>
         <p:nvSpPr>
@@ -22269,7 +23851,7 @@
           </a:bodyPr>
           <a:lstStyle/>
           <a:p>
-            <a:pPr algn="ctr" indent="0" marL="0">
+            <a:pPr marL="0" indent="0" algn="ctr">
               <a:buNone/>
             </a:pPr>
             <a:r>
@@ -22311,6 +23893,13 @@
             <a:prstDash val="solid"/>
           </a:ln>
         </p:spPr>
+        <p:txBody>
+          <a:bodyPr/>
+          <a:lstStyle/>
+          <a:p>
+            <a:endParaRPr lang="en-US"/>
+          </a:p>
+        </p:txBody>
       </p:sp>
       <p:sp>
         <p:nvSpPr>
@@ -22335,7 +23924,7 @@
           </a:bodyPr>
           <a:lstStyle/>
           <a:p>
-            <a:pPr algn="ctr" indent="0" marL="0">
+            <a:pPr marL="0" indent="0" algn="ctr">
               <a:buNone/>
             </a:pPr>
             <a:r>
@@ -22381,6 +23970,13 @@
             <a:prstDash val="solid"/>
           </a:ln>
         </p:spPr>
+        <p:txBody>
+          <a:bodyPr/>
+          <a:lstStyle/>
+          <a:p>
+            <a:endParaRPr lang="en-US"/>
+          </a:p>
+        </p:txBody>
       </p:sp>
       <p:sp>
         <p:nvSpPr>
@@ -22405,11 +24001,11 @@
           </a:bodyPr>
           <a:lstStyle/>
           <a:p>
-            <a:pPr algn="l" indent="0" marL="0">
-              <a:buNone/>
-            </a:pPr>
-            <a:r>
-              <a:rPr lang="en-US" sz="1000" b="1" spc="100" kern="0" dirty="0">
+            <a:pPr marL="0" indent="0" algn="l">
+              <a:buNone/>
+            </a:pPr>
+            <a:r>
+              <a:rPr lang="en-US" sz="1000" b="1" kern="0" spc="100" dirty="0">
                 <a:solidFill>
                   <a:srgbClr val="38BDF8"/>
                 </a:solidFill>
@@ -22447,6 +24043,13 @@
             <a:prstDash val="solid"/>
           </a:ln>
         </p:spPr>
+        <p:txBody>
+          <a:bodyPr/>
+          <a:lstStyle/>
+          <a:p>
+            <a:endParaRPr lang="en-US"/>
+          </a:p>
+        </p:txBody>
       </p:sp>
       <p:sp>
         <p:nvSpPr>
@@ -22471,7 +24074,7 @@
           </a:bodyPr>
           <a:lstStyle/>
           <a:p>
-            <a:pPr algn="l" indent="0" marL="0">
+            <a:pPr marL="0" indent="0" algn="l">
               <a:buNone/>
             </a:pPr>
             <a:endParaRPr lang="en-US" sz="1000" dirty="0"/>
@@ -22502,6 +24105,13 @@
             <a:prstDash val="solid"/>
           </a:ln>
         </p:spPr>
+        <p:txBody>
+          <a:bodyPr/>
+          <a:lstStyle/>
+          <a:p>
+            <a:endParaRPr lang="en-US"/>
+          </a:p>
+        </p:txBody>
       </p:sp>
       <p:sp>
         <p:nvSpPr>
@@ -22526,7 +24136,7 @@
           </a:bodyPr>
           <a:lstStyle/>
           <a:p>
-            <a:pPr algn="ctr" indent="0" marL="0">
+            <a:pPr marL="0" indent="0" algn="ctr">
               <a:buNone/>
             </a:pPr>
             <a:r>
@@ -22568,6 +24178,13 @@
             <a:prstDash val="solid"/>
           </a:ln>
         </p:spPr>
+        <p:txBody>
+          <a:bodyPr/>
+          <a:lstStyle/>
+          <a:p>
+            <a:endParaRPr lang="en-US"/>
+          </a:p>
+        </p:txBody>
       </p:sp>
       <p:sp>
         <p:nvSpPr>
@@ -22592,7 +24209,7 @@
           </a:bodyPr>
           <a:lstStyle/>
           <a:p>
-            <a:pPr algn="ctr" indent="0" marL="0">
+            <a:pPr marL="0" indent="0" algn="ctr">
               <a:buNone/>
             </a:pPr>
             <a:r>
@@ -22634,6 +24251,13 @@
             <a:prstDash val="solid"/>
           </a:ln>
         </p:spPr>
+        <p:txBody>
+          <a:bodyPr/>
+          <a:lstStyle/>
+          <a:p>
+            <a:endParaRPr lang="en-US"/>
+          </a:p>
+        </p:txBody>
       </p:sp>
       <p:sp>
         <p:nvSpPr>
@@ -22658,7 +24282,7 @@
           </a:bodyPr>
           <a:lstStyle/>
           <a:p>
-            <a:pPr algn="l" indent="0" marL="0">
+            <a:pPr marL="0" indent="0" algn="l">
               <a:buNone/>
             </a:pPr>
             <a:r>
@@ -22700,6 +24324,13 @@
             <a:prstDash val="solid"/>
           </a:ln>
         </p:spPr>
+        <p:txBody>
+          <a:bodyPr/>
+          <a:lstStyle/>
+          <a:p>
+            <a:endParaRPr lang="en-US"/>
+          </a:p>
+        </p:txBody>
       </p:sp>
       <p:sp>
         <p:nvSpPr>
@@ -22724,7 +24355,7 @@
           </a:bodyPr>
           <a:lstStyle/>
           <a:p>
-            <a:pPr algn="ctr" indent="0" marL="0">
+            <a:pPr marL="0" indent="0" algn="ctr">
               <a:buNone/>
             </a:pPr>
             <a:r>
@@ -22766,6 +24397,13 @@
             <a:prstDash val="solid"/>
           </a:ln>
         </p:spPr>
+        <p:txBody>
+          <a:bodyPr/>
+          <a:lstStyle/>
+          <a:p>
+            <a:endParaRPr lang="en-US"/>
+          </a:p>
+        </p:txBody>
       </p:sp>
       <p:sp>
         <p:nvSpPr>
@@ -22790,7 +24428,7 @@
           </a:bodyPr>
           <a:lstStyle/>
           <a:p>
-            <a:pPr algn="ctr" indent="0" marL="0">
+            <a:pPr marL="0" indent="0" algn="ctr">
               <a:buNone/>
             </a:pPr>
             <a:r>
@@ -22832,6 +24470,13 @@
             <a:prstDash val="solid"/>
           </a:ln>
         </p:spPr>
+        <p:txBody>
+          <a:bodyPr/>
+          <a:lstStyle/>
+          <a:p>
+            <a:endParaRPr lang="en-US"/>
+          </a:p>
+        </p:txBody>
       </p:sp>
       <p:sp>
         <p:nvSpPr>
@@ -22856,7 +24501,7 @@
           </a:bodyPr>
           <a:lstStyle/>
           <a:p>
-            <a:pPr algn="l" indent="0" marL="0">
+            <a:pPr marL="0" indent="0" algn="l">
               <a:buNone/>
             </a:pPr>
             <a:r>
@@ -22898,6 +24543,13 @@
             <a:prstDash val="solid"/>
           </a:ln>
         </p:spPr>
+        <p:txBody>
+          <a:bodyPr/>
+          <a:lstStyle/>
+          <a:p>
+            <a:endParaRPr lang="en-US"/>
+          </a:p>
+        </p:txBody>
       </p:sp>
       <p:sp>
         <p:nvSpPr>
@@ -22922,7 +24574,7 @@
           </a:bodyPr>
           <a:lstStyle/>
           <a:p>
-            <a:pPr algn="ctr" indent="0" marL="0">
+            <a:pPr marL="0" indent="0" algn="ctr">
               <a:buNone/>
             </a:pPr>
             <a:r>
@@ -22964,6 +24616,13 @@
             <a:prstDash val="solid"/>
           </a:ln>
         </p:spPr>
+        <p:txBody>
+          <a:bodyPr/>
+          <a:lstStyle/>
+          <a:p>
+            <a:endParaRPr lang="en-US"/>
+          </a:p>
+        </p:txBody>
       </p:sp>
       <p:sp>
         <p:nvSpPr>
@@ -22988,7 +24647,7 @@
           </a:bodyPr>
           <a:lstStyle/>
           <a:p>
-            <a:pPr algn="ctr" indent="0" marL="0">
+            <a:pPr marL="0" indent="0" algn="ctr">
               <a:buNone/>
             </a:pPr>
             <a:r>
@@ -23029,7 +24688,7 @@
           </a:bodyPr>
           <a:lstStyle/>
           <a:p>
-            <a:pPr algn="l" indent="0" marL="0">
+            <a:pPr marL="0" indent="0" algn="l">
               <a:buNone/>
             </a:pPr>
             <a:r>
@@ -23075,6 +24734,13 @@
             <a:prstDash val="solid"/>
           </a:ln>
         </p:spPr>
+        <p:txBody>
+          <a:bodyPr/>
+          <a:lstStyle/>
+          <a:p>
+            <a:endParaRPr lang="en-US"/>
+          </a:p>
+        </p:txBody>
       </p:sp>
       <p:sp>
         <p:nvSpPr>
@@ -23099,7 +24765,7 @@
           </a:bodyPr>
           <a:lstStyle/>
           <a:p>
-            <a:pPr algn="ctr" indent="0" marL="0">
+            <a:pPr marL="0" indent="0" algn="ctr">
               <a:buNone/>
             </a:pPr>
             <a:r>
@@ -23119,7 +24785,7 @@
       </p:sp>
       <p:sp>
         <p:nvSpPr>
-          <p:cNvPr id="25" name="Slide Number Placeholder 0"/>
+          <p:cNvPr id="90" name="Slide Number Placeholder 0"/>
           <p:cNvSpPr>
             <a:spLocks noGrp="1"/>
           </p:cNvSpPr>
@@ -23137,7 +24803,7 @@
           </a:prstGeom>
           <a:extLst>
             <a:ext uri="{C572A759-6A51-4108-AA02-DFA0A04FC94B}">
-              <ma14:wrappingTextBoxFlag xmlns:ma14="http://schemas.microsoft.com/office/mac/drawingml/2011/main" val="0"/>
+              <ma14:wrappingTextBoxFlag xmlns:ma14="http://schemas.microsoft.com/office/mac/drawingml/2011/main" xmlns="" val="0"/>
             </a:ext>
           </a:extLst>
         </p:spPr>
@@ -23158,7 +24824,7 @@
           <a:p>
             <a:pPr algn="l"/>
             <a:fld id="{F7021451-1387-4CA6-816F-3879F97B5CBC}" type="slidenum">
-              <a:rPr b="0" lang="en-US"/>
+              <a:rPr lang="en-US" b="0"/>
               <a:t>8</a:t>
             </a:fld>
             <a:endParaRPr lang="en-US"/>
@@ -23213,11 +24879,11 @@
           </a:bodyPr>
           <a:lstStyle/>
           <a:p>
-            <a:pPr algn="l" indent="0" marL="0">
-              <a:buNone/>
-            </a:pPr>
-            <a:r>
-              <a:rPr lang="en-US" sz="900" b="1" spc="150" kern="0" dirty="0">
+            <a:pPr marL="0" indent="0" algn="l">
+              <a:buNone/>
+            </a:pPr>
+            <a:r>
+              <a:rPr lang="en-US" sz="900" b="1" kern="0" spc="150" dirty="0">
                 <a:solidFill>
                   <a:srgbClr val="38BDF8"/>
                 </a:solidFill>
@@ -23254,7 +24920,7 @@
           </a:bodyPr>
           <a:lstStyle/>
           <a:p>
-            <a:pPr algn="l" indent="0" marL="0">
+            <a:pPr marL="0" indent="0" algn="l">
               <a:buNone/>
             </a:pPr>
             <a:r>
@@ -23295,7 +24961,7 @@
           </a:bodyPr>
           <a:lstStyle/>
           <a:p>
-            <a:pPr algn="l" indent="0" marL="0">
+            <a:pPr marL="0" indent="0" algn="l">
               <a:buNone/>
             </a:pPr>
             <a:r>
@@ -23336,7 +25002,7 @@
           </a:bodyPr>
           <a:lstStyle/>
           <a:p>
-            <a:pPr algn="l" indent="0" marL="0">
+            <a:pPr marL="0" indent="0" algn="l">
               <a:buNone/>
             </a:pPr>
             <a:r>
@@ -23382,6 +25048,13 @@
             <a:prstDash val="solid"/>
           </a:ln>
         </p:spPr>
+        <p:txBody>
+          <a:bodyPr/>
+          <a:lstStyle/>
+          <a:p>
+            <a:endParaRPr lang="en-US"/>
+          </a:p>
+        </p:txBody>
       </p:sp>
       <p:sp>
         <p:nvSpPr>
@@ -23411,6 +25084,13 @@
             <a:prstDash val="solid"/>
           </a:ln>
         </p:spPr>
+        <p:txBody>
+          <a:bodyPr/>
+          <a:lstStyle/>
+          <a:p>
+            <a:endParaRPr lang="en-US"/>
+          </a:p>
+        </p:txBody>
       </p:sp>
       <p:sp>
         <p:nvSpPr>
@@ -23435,7 +25115,7 @@
           </a:bodyPr>
           <a:lstStyle/>
           <a:p>
-            <a:pPr algn="l" indent="0" marL="0">
+            <a:pPr marL="0" indent="0" algn="l">
               <a:buNone/>
             </a:pPr>
             <a:r>
@@ -23481,6 +25161,13 @@
             <a:prstDash val="solid"/>
           </a:ln>
         </p:spPr>
+        <p:txBody>
+          <a:bodyPr/>
+          <a:lstStyle/>
+          <a:p>
+            <a:endParaRPr lang="en-US"/>
+          </a:p>
+        </p:txBody>
       </p:sp>
       <p:sp>
         <p:nvSpPr>
@@ -23505,7 +25192,7 @@
           </a:bodyPr>
           <a:lstStyle/>
           <a:p>
-            <a:pPr algn="ctr" indent="0" marL="0">
+            <a:pPr marL="0" indent="0" algn="ctr">
               <a:buNone/>
             </a:pPr>
             <a:r>
@@ -23546,7 +25233,7 @@
           </a:bodyPr>
           <a:lstStyle/>
           <a:p>
-            <a:pPr algn="l" indent="0" marL="0">
+            <a:pPr marL="0" indent="0" algn="l">
               <a:buNone/>
             </a:pPr>
             <a:r>
@@ -23592,6 +25279,13 @@
             <a:prstDash val="solid"/>
           </a:ln>
         </p:spPr>
+        <p:txBody>
+          <a:bodyPr/>
+          <a:lstStyle/>
+          <a:p>
+            <a:endParaRPr lang="en-US"/>
+          </a:p>
+        </p:txBody>
       </p:sp>
       <p:sp>
         <p:nvSpPr>
@@ -23621,6 +25315,13 @@
             <a:prstDash val="solid"/>
           </a:ln>
         </p:spPr>
+        <p:txBody>
+          <a:bodyPr/>
+          <a:lstStyle/>
+          <a:p>
+            <a:endParaRPr lang="en-US"/>
+          </a:p>
+        </p:txBody>
       </p:sp>
       <p:sp>
         <p:nvSpPr>
@@ -23645,7 +25346,7 @@
           </a:bodyPr>
           <a:lstStyle/>
           <a:p>
-            <a:pPr algn="l" indent="0" marL="0">
+            <a:pPr marL="0" indent="0" algn="l">
               <a:buNone/>
             </a:pPr>
             <a:r>
@@ -23691,6 +25392,13 @@
             <a:prstDash val="solid"/>
           </a:ln>
         </p:spPr>
+        <p:txBody>
+          <a:bodyPr/>
+          <a:lstStyle/>
+          <a:p>
+            <a:endParaRPr lang="en-US"/>
+          </a:p>
+        </p:txBody>
       </p:sp>
       <p:sp>
         <p:nvSpPr>
@@ -23715,7 +25423,7 @@
           </a:bodyPr>
           <a:lstStyle/>
           <a:p>
-            <a:pPr algn="ctr" indent="0" marL="0">
+            <a:pPr marL="0" indent="0" algn="ctr">
               <a:buNone/>
             </a:pPr>
             <a:r>
@@ -23756,7 +25464,7 @@
           </a:bodyPr>
           <a:lstStyle/>
           <a:p>
-            <a:pPr algn="l" indent="0" marL="0">
+            <a:pPr marL="0" indent="0" algn="l">
               <a:buNone/>
             </a:pPr>
             <a:r>
@@ -23802,6 +25510,13 @@
             <a:prstDash val="solid"/>
           </a:ln>
         </p:spPr>
+        <p:txBody>
+          <a:bodyPr/>
+          <a:lstStyle/>
+          <a:p>
+            <a:endParaRPr lang="en-US"/>
+          </a:p>
+        </p:txBody>
       </p:sp>
       <p:sp>
         <p:nvSpPr>
@@ -23831,6 +25546,13 @@
             <a:prstDash val="solid"/>
           </a:ln>
         </p:spPr>
+        <p:txBody>
+          <a:bodyPr/>
+          <a:lstStyle/>
+          <a:p>
+            <a:endParaRPr lang="en-US"/>
+          </a:p>
+        </p:txBody>
       </p:sp>
       <p:sp>
         <p:nvSpPr>
@@ -23855,7 +25577,7 @@
           </a:bodyPr>
           <a:lstStyle/>
           <a:p>
-            <a:pPr algn="l" indent="0" marL="0">
+            <a:pPr marL="0" indent="0" algn="l">
               <a:buNone/>
             </a:pPr>
             <a:r>
@@ -23901,6 +25623,13 @@
             <a:prstDash val="solid"/>
           </a:ln>
         </p:spPr>
+        <p:txBody>
+          <a:bodyPr/>
+          <a:lstStyle/>
+          <a:p>
+            <a:endParaRPr lang="en-US"/>
+          </a:p>
+        </p:txBody>
       </p:sp>
       <p:sp>
         <p:nvSpPr>
@@ -23925,7 +25654,7 @@
           </a:bodyPr>
           <a:lstStyle/>
           <a:p>
-            <a:pPr algn="ctr" indent="0" marL="0">
+            <a:pPr marL="0" indent="0" algn="ctr">
               <a:buNone/>
             </a:pPr>
             <a:r>
@@ -23966,7 +25695,7 @@
           </a:bodyPr>
           <a:lstStyle/>
           <a:p>
-            <a:pPr algn="l" indent="0" marL="0">
+            <a:pPr marL="0" indent="0" algn="l">
               <a:buNone/>
             </a:pPr>
             <a:r>
@@ -24012,6 +25741,13 @@
             <a:prstDash val="solid"/>
           </a:ln>
         </p:spPr>
+        <p:txBody>
+          <a:bodyPr/>
+          <a:lstStyle/>
+          <a:p>
+            <a:endParaRPr lang="en-US"/>
+          </a:p>
+        </p:txBody>
       </p:sp>
       <p:sp>
         <p:nvSpPr>
@@ -24041,6 +25777,13 @@
             <a:prstDash val="solid"/>
           </a:ln>
         </p:spPr>
+        <p:txBody>
+          <a:bodyPr/>
+          <a:lstStyle/>
+          <a:p>
+            <a:endParaRPr lang="en-US"/>
+          </a:p>
+        </p:txBody>
       </p:sp>
       <p:sp>
         <p:nvSpPr>
@@ -24065,7 +25808,7 @@
           </a:bodyPr>
           <a:lstStyle/>
           <a:p>
-            <a:pPr algn="l" indent="0" marL="0">
+            <a:pPr marL="0" indent="0" algn="l">
               <a:buNone/>
             </a:pPr>
             <a:r>
@@ -24111,6 +25854,13 @@
             <a:prstDash val="solid"/>
           </a:ln>
         </p:spPr>
+        <p:txBody>
+          <a:bodyPr/>
+          <a:lstStyle/>
+          <a:p>
+            <a:endParaRPr lang="en-US"/>
+          </a:p>
+        </p:txBody>
       </p:sp>
       <p:sp>
         <p:nvSpPr>
@@ -24135,7 +25885,7 @@
           </a:bodyPr>
           <a:lstStyle/>
           <a:p>
-            <a:pPr algn="ctr" indent="0" marL="0">
+            <a:pPr marL="0" indent="0" algn="ctr">
               <a:buNone/>
             </a:pPr>
             <a:r>
@@ -24176,7 +25926,7 @@
           </a:bodyPr>
           <a:lstStyle/>
           <a:p>
-            <a:pPr algn="l" indent="0" marL="0">
+            <a:pPr marL="0" indent="0" algn="l">
               <a:buNone/>
             </a:pPr>
             <a:r>
@@ -24222,6 +25972,13 @@
             <a:prstDash val="solid"/>
           </a:ln>
         </p:spPr>
+        <p:txBody>
+          <a:bodyPr/>
+          <a:lstStyle/>
+          <a:p>
+            <a:endParaRPr lang="en-US"/>
+          </a:p>
+        </p:txBody>
       </p:sp>
       <p:sp>
         <p:nvSpPr>
@@ -24251,6 +26008,13 @@
             <a:prstDash val="solid"/>
           </a:ln>
         </p:spPr>
+        <p:txBody>
+          <a:bodyPr/>
+          <a:lstStyle/>
+          <a:p>
+            <a:endParaRPr lang="en-US"/>
+          </a:p>
+        </p:txBody>
       </p:sp>
       <p:sp>
         <p:nvSpPr>
@@ -24275,7 +26039,7 @@
           </a:bodyPr>
           <a:lstStyle/>
           <a:p>
-            <a:pPr algn="l" indent="0" marL="0">
+            <a:pPr marL="0" indent="0" algn="l">
               <a:buNone/>
             </a:pPr>
             <a:r>
@@ -24321,6 +26085,13 @@
             <a:prstDash val="solid"/>
           </a:ln>
         </p:spPr>
+        <p:txBody>
+          <a:bodyPr/>
+          <a:lstStyle/>
+          <a:p>
+            <a:endParaRPr lang="en-US"/>
+          </a:p>
+        </p:txBody>
       </p:sp>
       <p:sp>
         <p:nvSpPr>
@@ -24345,7 +26116,7 @@
           </a:bodyPr>
           <a:lstStyle/>
           <a:p>
-            <a:pPr algn="ctr" indent="0" marL="0">
+            <a:pPr marL="0" indent="0" algn="ctr">
               <a:buNone/>
             </a:pPr>
             <a:r>
@@ -24387,6 +26158,13 @@
             <a:tailEnd type="none"/>
           </a:ln>
         </p:spPr>
+        <p:txBody>
+          <a:bodyPr/>
+          <a:lstStyle/>
+          <a:p>
+            <a:endParaRPr lang="en-US"/>
+          </a:p>
+        </p:txBody>
       </p:sp>
       <p:sp>
         <p:nvSpPr>
@@ -24411,7 +26189,7 @@
           </a:bodyPr>
           <a:lstStyle/>
           <a:p>
-            <a:pPr algn="l" indent="0" marL="0">
+            <a:pPr marL="0" indent="0" algn="l">
               <a:buNone/>
             </a:pPr>
             <a:r>
@@ -24453,6 +26231,13 @@
             <a:tailEnd type="none"/>
           </a:ln>
         </p:spPr>
+        <p:txBody>
+          <a:bodyPr/>
+          <a:lstStyle/>
+          <a:p>
+            <a:endParaRPr lang="en-US"/>
+          </a:p>
+        </p:txBody>
       </p:sp>
       <p:sp>
         <p:nvSpPr>
@@ -24477,7 +26262,7 @@
           </a:bodyPr>
           <a:lstStyle/>
           <a:p>
-            <a:pPr algn="l" indent="0" marL="0">
+            <a:pPr marL="0" indent="0" algn="l">
               <a:buNone/>
             </a:pPr>
             <a:r>
@@ -24497,7 +26282,7 @@
       </p:sp>
       <p:sp>
         <p:nvSpPr>
-          <p:cNvPr id="25" name="Slide Number Placeholder 0"/>
+          <p:cNvPr id="39" name="Slide Number Placeholder 0"/>
           <p:cNvSpPr>
             <a:spLocks noGrp="1"/>
           </p:cNvSpPr>
@@ -24515,7 +26300,7 @@
           </a:prstGeom>
           <a:extLst>
             <a:ext uri="{C572A759-6A51-4108-AA02-DFA0A04FC94B}">
-              <ma14:wrappingTextBoxFlag xmlns:ma14="http://schemas.microsoft.com/office/mac/drawingml/2011/main" val="0"/>
+              <ma14:wrappingTextBoxFlag xmlns:ma14="http://schemas.microsoft.com/office/mac/drawingml/2011/main" xmlns="" val="0"/>
             </a:ext>
           </a:extLst>
         </p:spPr>
@@ -24536,7 +26321,7 @@
           <a:p>
             <a:pPr algn="l"/>
             <a:fld id="{F7021451-1387-4CA6-816F-3879F97B5CBC}" type="slidenum">
-              <a:rPr b="0" lang="en-US"/>
+              <a:rPr lang="en-US" b="0"/>
               <a:t>9</a:t>
             </a:fld>
             <a:endParaRPr lang="en-US"/>
@@ -24844,4 +26629,319 @@
     </a:ext>
   </a:extLst>
 </a:theme>
+</file>
+
+<file path=ppt/theme/theme2.xml><?xml version="1.0" encoding="utf-8"?>
+<a:theme xmlns:a="http://schemas.openxmlformats.org/drawingml/2006/main" name="Office Theme">
+  <a:themeElements>
+    <a:clrScheme name="Office">
+      <a:dk1>
+        <a:sysClr val="windowText" lastClr="000000"/>
+      </a:dk1>
+      <a:lt1>
+        <a:sysClr val="window" lastClr="FFFFFF"/>
+      </a:lt1>
+      <a:dk2>
+        <a:srgbClr val="0E2841"/>
+      </a:dk2>
+      <a:lt2>
+        <a:srgbClr val="E8E8E8"/>
+      </a:lt2>
+      <a:accent1>
+        <a:srgbClr val="156082"/>
+      </a:accent1>
+      <a:accent2>
+        <a:srgbClr val="E97132"/>
+      </a:accent2>
+      <a:accent3>
+        <a:srgbClr val="196B24"/>
+      </a:accent3>
+      <a:accent4>
+        <a:srgbClr val="0F9ED5"/>
+      </a:accent4>
+      <a:accent5>
+        <a:srgbClr val="A02B93"/>
+      </a:accent5>
+      <a:accent6>
+        <a:srgbClr val="4EA72E"/>
+      </a:accent6>
+      <a:hlink>
+        <a:srgbClr val="467886"/>
+      </a:hlink>
+      <a:folHlink>
+        <a:srgbClr val="96607D"/>
+      </a:folHlink>
+    </a:clrScheme>
+    <a:fontScheme name="Office">
+      <a:majorFont>
+        <a:latin typeface="Aptos Display" panose="02110004020202020204"/>
+        <a:ea typeface=""/>
+        <a:cs typeface=""/>
+        <a:font script="Jpan" typeface="游ゴシック Light"/>
+        <a:font script="Hang" typeface="맑은 고딕"/>
+        <a:font script="Hans" typeface="等线 Light"/>
+        <a:font script="Hant" typeface="新細明體"/>
+        <a:font script="Arab" typeface="Times New Roman"/>
+        <a:font script="Hebr" typeface="Times New Roman"/>
+        <a:font script="Thai" typeface="Angsana New"/>
+        <a:font script="Ethi" typeface="Nyala"/>
+        <a:font script="Beng" typeface="Vrinda"/>
+        <a:font script="Gujr" typeface="Shruti"/>
+        <a:font script="Khmr" typeface="MoolBoran"/>
+        <a:font script="Knda" typeface="Tunga"/>
+        <a:font script="Guru" typeface="Raavi"/>
+        <a:font script="Cans" typeface="Euphemia"/>
+        <a:font script="Cher" typeface="Plantagenet Cherokee"/>
+        <a:font script="Yiii" typeface="Microsoft Yi Baiti"/>
+        <a:font script="Tibt" typeface="Microsoft Himalaya"/>
+        <a:font script="Thaa" typeface="MV Boli"/>
+        <a:font script="Deva" typeface="Mangal"/>
+        <a:font script="Telu" typeface="Gautami"/>
+        <a:font script="Taml" typeface="Latha"/>
+        <a:font script="Syrc" typeface="Estrangelo Edessa"/>
+        <a:font script="Orya" typeface="Kalinga"/>
+        <a:font script="Mlym" typeface="Kartika"/>
+        <a:font script="Laoo" typeface="DokChampa"/>
+        <a:font script="Sinh" typeface="Iskoola Pota"/>
+        <a:font script="Mong" typeface="Mongolian Baiti"/>
+        <a:font script="Viet" typeface="Times New Roman"/>
+        <a:font script="Uigh" typeface="Microsoft Uighur"/>
+        <a:font script="Geor" typeface="Sylfaen"/>
+        <a:font script="Armn" typeface="Arial"/>
+        <a:font script="Bugi" typeface="Leelawadee UI"/>
+        <a:font script="Bopo" typeface="Microsoft JhengHei"/>
+        <a:font script="Java" typeface="Javanese Text"/>
+        <a:font script="Lisu" typeface="Segoe UI"/>
+        <a:font script="Mymr" typeface="Myanmar Text"/>
+        <a:font script="Nkoo" typeface="Ebrima"/>
+        <a:font script="Olck" typeface="Nirmala UI"/>
+        <a:font script="Osma" typeface="Ebrima"/>
+        <a:font script="Phag" typeface="Phagspa"/>
+        <a:font script="Syrn" typeface="Estrangelo Edessa"/>
+        <a:font script="Syrj" typeface="Estrangelo Edessa"/>
+        <a:font script="Syre" typeface="Estrangelo Edessa"/>
+        <a:font script="Sora" typeface="Nirmala UI"/>
+        <a:font script="Tale" typeface="Microsoft Tai Le"/>
+        <a:font script="Talu" typeface="Microsoft New Tai Lue"/>
+        <a:font script="Tfng" typeface="Ebrima"/>
+      </a:majorFont>
+      <a:minorFont>
+        <a:latin typeface="Aptos" panose="02110004020202020204"/>
+        <a:ea typeface=""/>
+        <a:cs typeface=""/>
+        <a:font script="Jpan" typeface="游ゴシック"/>
+        <a:font script="Hang" typeface="맑은 고딕"/>
+        <a:font script="Hans" typeface="等线"/>
+        <a:font script="Hant" typeface="新細明體"/>
+        <a:font script="Arab" typeface="Arial"/>
+        <a:font script="Hebr" typeface="Arial"/>
+        <a:font script="Thai" typeface="Cordia New"/>
+        <a:font script="Ethi" typeface="Nyala"/>
+        <a:font script="Beng" typeface="Vrinda"/>
+        <a:font script="Gujr" typeface="Shruti"/>
+        <a:font script="Khmr" typeface="DaunPenh"/>
+        <a:font script="Knda" typeface="Tunga"/>
+        <a:font script="Guru" typeface="Raavi"/>
+        <a:font script="Cans" typeface="Euphemia"/>
+        <a:font script="Cher" typeface="Plantagenet Cherokee"/>
+        <a:font script="Yiii" typeface="Microsoft Yi Baiti"/>
+        <a:font script="Tibt" typeface="Microsoft Himalaya"/>
+        <a:font script="Thaa" typeface="MV Boli"/>
+        <a:font script="Deva" typeface="Mangal"/>
+        <a:font script="Telu" typeface="Gautami"/>
+        <a:font script="Taml" typeface="Latha"/>
+        <a:font script="Syrc" typeface="Estrangelo Edessa"/>
+        <a:font script="Orya" typeface="Kalinga"/>
+        <a:font script="Mlym" typeface="Kartika"/>
+        <a:font script="Laoo" typeface="DokChampa"/>
+        <a:font script="Sinh" typeface="Iskoola Pota"/>
+        <a:font script="Mong" typeface="Mongolian Baiti"/>
+        <a:font script="Viet" typeface="Arial"/>
+        <a:font script="Uigh" typeface="Microsoft Uighur"/>
+        <a:font script="Geor" typeface="Sylfaen"/>
+        <a:font script="Armn" typeface="Arial"/>
+        <a:font script="Bugi" typeface="Leelawadee UI"/>
+        <a:font script="Bopo" typeface="Microsoft JhengHei"/>
+        <a:font script="Java" typeface="Javanese Text"/>
+        <a:font script="Lisu" typeface="Segoe UI"/>
+        <a:font script="Mymr" typeface="Myanmar Text"/>
+        <a:font script="Nkoo" typeface="Ebrima"/>
+        <a:font script="Olck" typeface="Nirmala UI"/>
+        <a:font script="Osma" typeface="Ebrima"/>
+        <a:font script="Phag" typeface="Phagspa"/>
+        <a:font script="Syrn" typeface="Estrangelo Edessa"/>
+        <a:font script="Syrj" typeface="Estrangelo Edessa"/>
+        <a:font script="Syre" typeface="Estrangelo Edessa"/>
+        <a:font script="Sora" typeface="Nirmala UI"/>
+        <a:font script="Tale" typeface="Microsoft Tai Le"/>
+        <a:font script="Talu" typeface="Microsoft New Tai Lue"/>
+        <a:font script="Tfng" typeface="Ebrima"/>
+      </a:minorFont>
+    </a:fontScheme>
+    <a:fmtScheme name="Office">
+      <a:fillStyleLst>
+        <a:solidFill>
+          <a:schemeClr val="phClr"/>
+        </a:solidFill>
+        <a:gradFill rotWithShape="1">
+          <a:gsLst>
+            <a:gs pos="0">
+              <a:schemeClr val="phClr">
+                <a:lumMod val="110000"/>
+                <a:satMod val="105000"/>
+                <a:tint val="67000"/>
+              </a:schemeClr>
+            </a:gs>
+            <a:gs pos="50000">
+              <a:schemeClr val="phClr">
+                <a:lumMod val="105000"/>
+                <a:satMod val="103000"/>
+                <a:tint val="73000"/>
+              </a:schemeClr>
+            </a:gs>
+            <a:gs pos="100000">
+              <a:schemeClr val="phClr">
+                <a:lumMod val="105000"/>
+                <a:satMod val="109000"/>
+                <a:tint val="81000"/>
+              </a:schemeClr>
+            </a:gs>
+          </a:gsLst>
+          <a:lin ang="5400000" scaled="0"/>
+        </a:gradFill>
+        <a:gradFill rotWithShape="1">
+          <a:gsLst>
+            <a:gs pos="0">
+              <a:schemeClr val="phClr">
+                <a:satMod val="103000"/>
+                <a:lumMod val="102000"/>
+                <a:tint val="94000"/>
+              </a:schemeClr>
+            </a:gs>
+            <a:gs pos="50000">
+              <a:schemeClr val="phClr">
+                <a:satMod val="110000"/>
+                <a:lumMod val="100000"/>
+                <a:shade val="100000"/>
+              </a:schemeClr>
+            </a:gs>
+            <a:gs pos="100000">
+              <a:schemeClr val="phClr">
+                <a:lumMod val="99000"/>
+                <a:satMod val="120000"/>
+                <a:shade val="78000"/>
+              </a:schemeClr>
+            </a:gs>
+          </a:gsLst>
+          <a:lin ang="5400000" scaled="0"/>
+        </a:gradFill>
+      </a:fillStyleLst>
+      <a:lnStyleLst>
+        <a:ln w="12700" cap="flat" cmpd="sng" algn="ctr">
+          <a:solidFill>
+            <a:schemeClr val="phClr"/>
+          </a:solidFill>
+          <a:prstDash val="solid"/>
+          <a:miter lim="800000"/>
+        </a:ln>
+        <a:ln w="19050" cap="flat" cmpd="sng" algn="ctr">
+          <a:solidFill>
+            <a:schemeClr val="phClr"/>
+          </a:solidFill>
+          <a:prstDash val="solid"/>
+          <a:miter lim="800000"/>
+        </a:ln>
+        <a:ln w="25400" cap="flat" cmpd="sng" algn="ctr">
+          <a:solidFill>
+            <a:schemeClr val="phClr"/>
+          </a:solidFill>
+          <a:prstDash val="solid"/>
+          <a:miter lim="800000"/>
+        </a:ln>
+      </a:lnStyleLst>
+      <a:effectStyleLst>
+        <a:effectStyle>
+          <a:effectLst/>
+        </a:effectStyle>
+        <a:effectStyle>
+          <a:effectLst/>
+        </a:effectStyle>
+        <a:effectStyle>
+          <a:effectLst>
+            <a:outerShdw blurRad="57150" dist="19050" dir="5400000" algn="ctr" rotWithShape="0">
+              <a:srgbClr val="000000">
+                <a:alpha val="63000"/>
+              </a:srgbClr>
+            </a:outerShdw>
+          </a:effectLst>
+        </a:effectStyle>
+      </a:effectStyleLst>
+      <a:bgFillStyleLst>
+        <a:solidFill>
+          <a:schemeClr val="phClr"/>
+        </a:solidFill>
+        <a:solidFill>
+          <a:schemeClr val="phClr">
+            <a:tint val="95000"/>
+            <a:satMod val="170000"/>
+          </a:schemeClr>
+        </a:solidFill>
+        <a:gradFill rotWithShape="1">
+          <a:gsLst>
+            <a:gs pos="0">
+              <a:schemeClr val="phClr">
+                <a:tint val="93000"/>
+                <a:satMod val="150000"/>
+                <a:shade val="98000"/>
+                <a:lumMod val="102000"/>
+              </a:schemeClr>
+            </a:gs>
+            <a:gs pos="50000">
+              <a:schemeClr val="phClr">
+                <a:tint val="98000"/>
+                <a:satMod val="130000"/>
+                <a:shade val="90000"/>
+                <a:lumMod val="103000"/>
+              </a:schemeClr>
+            </a:gs>
+            <a:gs pos="100000">
+              <a:schemeClr val="phClr">
+                <a:shade val="63000"/>
+                <a:satMod val="120000"/>
+              </a:schemeClr>
+            </a:gs>
+          </a:gsLst>
+          <a:lin ang="5400000" scaled="0"/>
+        </a:gradFill>
+      </a:bgFillStyleLst>
+    </a:fmtScheme>
+  </a:themeElements>
+  <a:objectDefaults>
+    <a:lnDef>
+      <a:spPr/>
+      <a:bodyPr/>
+      <a:lstStyle/>
+      <a:style>
+        <a:lnRef idx="2">
+          <a:schemeClr val="accent1"/>
+        </a:lnRef>
+        <a:fillRef idx="0">
+          <a:schemeClr val="accent1"/>
+        </a:fillRef>
+        <a:effectRef idx="1">
+          <a:schemeClr val="accent1"/>
+        </a:effectRef>
+        <a:fontRef idx="minor">
+          <a:schemeClr val="tx1"/>
+        </a:fontRef>
+      </a:style>
+    </a:lnDef>
+  </a:objectDefaults>
+  <a:extraClrSchemeLst/>
+  <a:extLst>
+    <a:ext uri="{05A4C25C-085E-4340-85A3-A5531E510DB2}">
+      <thm15:themeFamily xmlns:thm15="http://schemas.microsoft.com/office/thememl/2012/main" name="Office Theme" id="{2E142A2C-CD16-42D6-873A-C26D2A0506FA}" vid="{1BDDFF52-6CD6-40A5-AB3C-68EB2F1E4D0A}"/>
+    </a:ext>
+  </a:extLst>
+</a:theme>
 </file>